--- a/decks/vaping-and-your-brain-lesson-v2.pptx
+++ b/decks/vaping-and-your-brain-lesson-v2.pptx
@@ -18,6 +18,7 @@
     <p:sldId id="266" r:id="rId18"/>
     <p:sldId id="267" r:id="rId19"/>
     <p:sldId id="268" r:id="rId20"/>
+    <p:sldId id="269" r:id="rId21"/>
   </p:sldIdLst>
   <p:sldSz cx="12192000" cy="6858000" type="screen4x3"/>
   <p:notesSz cx="6858000" cy="9144000"/>
@@ -514,7 +515,7 @@
           <a:lstStyle/>
           <a:p>
             <a:r>
-              <a:t>This page and the next three are hidden. They stay in the deck for you and are skipped when you present.</a:t>
+              <a:t>This page is hidden and skipped when you present. The full plan, care notes and research are on the hidden pages at the end of the deck, if you want them.</a:t>
             </a:r>
           </a:p>
         </p:txBody>
@@ -585,6 +586,76 @@
           <a:p>
             <a:r>
               <a:t>5 MINUTES. Collect anonymously. Share the take-home link on the slide (post it in your class page too). It has the main ideas, the quit steps, a private check-in, and who to talk to, including after hours.</a:t>
+            </a:r>
+          </a:p>
+        </p:txBody>
+      </p:sp>
+      <p:sp>
+        <p:nvSpPr>
+          <p:cNvPr id="4" name="Slide Number Placeholder 3"/>
+          <p:cNvSpPr>
+            <a:spLocks noGrp="1"/>
+          </p:cNvSpPr>
+          <p:nvPr>
+            <p:ph type="sldNum" idx="5" sz="quarter"/>
+          </p:nvPr>
+        </p:nvSpPr>
+        <p:spPr/>
+      </p:sp>
+    </p:spTree>
+  </p:cSld>
+  <p:clrMapOvr>
+    <a:masterClrMapping/>
+  </p:clrMapOvr>
+</p:notes>
+</file>
+
+<file path=ppt/notesSlides/notesSlide11.xml><?xml version="1.0" encoding="utf-8"?>
+<p:notes xmlns:a="http://schemas.openxmlformats.org/drawingml/2006/main" xmlns:p="http://schemas.openxmlformats.org/presentationml/2006/main" xmlns:r="http://schemas.openxmlformats.org/officeDocument/2006/relationships">
+  <p:cSld>
+    <p:spTree>
+      <p:nvGrpSpPr>
+        <p:cNvPr id="1" name=""/>
+        <p:cNvGrpSpPr/>
+        <p:nvPr/>
+      </p:nvGrpSpPr>
+      <p:grpSpPr>
+        <a:xfrm>
+          <a:off x="0" y="0"/>
+          <a:ext cx="0" cy="0"/>
+          <a:chOff x="0" y="0"/>
+          <a:chExt cx="0" cy="0"/>
+        </a:xfrm>
+      </p:grpSpPr>
+      <p:sp>
+        <p:nvSpPr>
+          <p:cNvPr id="2" name="Slide Image Placeholder 1"/>
+          <p:cNvSpPr>
+            <a:spLocks noGrp="1"/>
+          </p:cNvSpPr>
+          <p:nvPr>
+            <p:ph type="sldImg" idx="2"/>
+          </p:nvPr>
+        </p:nvSpPr>
+        <p:spPr/>
+      </p:sp>
+      <p:sp>
+        <p:nvSpPr>
+          <p:cNvPr id="3" name="Notes Placeholder 2"/>
+          <p:cNvSpPr>
+            <a:spLocks noGrp="1"/>
+          </p:cNvSpPr>
+          <p:nvPr>
+            <p:ph type="body" idx="3" sz="quarter"/>
+          </p:nvPr>
+        </p:nvSpPr>
+        <p:spPr/>
+        <p:txBody>
+          <a:bodyPr/>
+          <a:lstStyle/>
+          <a:p>
+            <a:r>
+              <a:t>If you want more: this page and the next three are hidden and skipped when you present.</a:t>
             </a:r>
           </a:p>
         </p:txBody>
@@ -4236,7 +4307,7 @@
                 </a:solidFill>
                 <a:latin typeface="Inter Tight"/>
               </a:rPr>
-              <a:t>TEACHER PAGE  ·  skipped when you present  ·  Lesson plan</a:t>
+              <a:t>TEACHER PAGE  ·  skipped when you present  ·  Before you start</a:t>
             </a:r>
           </a:p>
         </p:txBody>
@@ -4327,8 +4398,8 @@
         </p:nvSpPr>
         <p:spPr>
           <a:xfrm>
-            <a:off x="548640" y="1828800"/>
-            <a:ext cx="5120640" cy="4389120"/>
+            <a:off x="548640" y="2011680"/>
+            <a:ext cx="11064240" cy="4206240"/>
           </a:xfrm>
           <a:prstGeom prst="rect">
             <a:avLst/>
@@ -4343,43 +4414,43 @@
           <a:p>
             <a:pPr algn="l">
               <a:spcAft>
-                <a:spcPts val="675"/>
-              </a:spcAft>
-            </a:pPr>
-            <a:r>
-              <a:rPr sz="1100" b="1" i="0">
+                <a:spcPts val="810"/>
+              </a:spcAft>
+            </a:pPr>
+            <a:r>
+              <a:rPr sz="1200" b="1" i="0">
                 <a:solidFill>
                   <a:srgbClr val="0B2D5B"/>
                 </a:solidFill>
                 <a:latin typeface="Inter Tight"/>
               </a:rPr>
-              <a:t>GOAL</a:t>
-            </a:r>
-          </a:p>
-          <a:p>
-            <a:pPr algn="l">
-              <a:spcAft>
-                <a:spcPts val="675"/>
-              </a:spcAft>
-            </a:pPr>
-            <a:r>
-              <a:rPr sz="1500" b="0" i="0">
+              <a:t>BEFORE YOU START</a:t>
+            </a:r>
+          </a:p>
+          <a:p>
+            <a:pPr algn="l">
+              <a:spcAft>
+                <a:spcPts val="810"/>
+              </a:spcAft>
+            </a:pPr>
+            <a:r>
+              <a:rPr sz="1800" b="0" i="0">
                 <a:solidFill>
                   <a:srgbClr val="1C1B19"/>
                 </a:solidFill>
                 <a:latin typeface="Source Serif 4"/>
               </a:rPr>
-              <a:t>Students can explain how nicotine dependence builds (cue, hit, relief, craving), why vaping feels like stress relief, and name two real ways to get help quitting. The aim is understanding. Nobody in the room should feel caught.</a:t>
-            </a:r>
-          </a:p>
-          <a:p>
-            <a:pPr algn="l">
-              <a:spcAft>
-                <a:spcPts val="675"/>
-              </a:spcAft>
-            </a:pPr>
-            <a:r>
-              <a:rPr sz="1500" b="0" i="0">
+              <a:t>Students learn how nicotine dependence builds (cue, hit, relief, craving), why vaping feels like stress relief, and two real ways to get help quitting. Bring sticky notes, keep it calm and factual, and know your school's next step before a student says "I'm hooked."</a:t>
+            </a:r>
+          </a:p>
+          <a:p>
+            <a:pPr algn="l">
+              <a:spcAft>
+                <a:spcPts val="810"/>
+              </a:spcAft>
+            </a:pPr>
+            <a:r>
+              <a:rPr sz="1800" b="0" i="0">
                 <a:solidFill>
                   <a:srgbClr val="1C1B19"/>
                 </a:solidFill>
@@ -4391,321 +4462,75 @@
           <a:p>
             <a:pPr algn="l">
               <a:spcAft>
-                <a:spcPts val="675"/>
-              </a:spcAft>
-            </a:pPr>
-            <a:r>
-              <a:rPr sz="1100" b="1" i="0">
+                <a:spcPts val="810"/>
+              </a:spcAft>
+            </a:pPr>
+            <a:r>
+              <a:rPr sz="1200" b="1" i="0">
                 <a:solidFill>
                   <a:srgbClr val="0B2D5B"/>
                 </a:solidFill>
                 <a:latin typeface="Inter Tight"/>
               </a:rPr>
-              <a:t>MATERIALS</a:t>
-            </a:r>
-          </a:p>
-          <a:p>
-            <a:pPr algn="l">
-              <a:spcAft>
-                <a:spcPts val="675"/>
-              </a:spcAft>
-            </a:pPr>
-            <a:r>
-              <a:rPr sz="1500" b="0" i="0">
+              <a:t>EVERY STUDENT IN THE ROOM</a:t>
+            </a:r>
+          </a:p>
+          <a:p>
+            <a:pPr algn="l">
+              <a:spcAft>
+                <a:spcPts val="810"/>
+              </a:spcAft>
+            </a:pPr>
+            <a:r>
+              <a:rPr sz="1800" b="0" i="0">
                 <a:solidFill>
                   <a:srgbClr val="1C1B19"/>
                 </a:solidFill>
                 <a:latin typeface="Source Serif 4"/>
               </a:rPr>
-              <a:t>Sticky notes or index cards, one stack per table</a:t>
-            </a:r>
-          </a:p>
-          <a:p>
-            <a:pPr algn="l">
-              <a:spcAft>
-                <a:spcPts val="675"/>
-              </a:spcAft>
-            </a:pPr>
-            <a:r>
-              <a:rPr sz="1500" b="0" i="0">
+              <a:t>Some students fear what happens if they ask for help, and menthol and LGBTQ+ marketing were aimed on purpose; every support in the lesson is free.</a:t>
+            </a:r>
+          </a:p>
+          <a:p>
+            <a:pPr algn="l">
+              <a:spcAft>
+                <a:spcPts val="810"/>
+              </a:spcAft>
+            </a:pPr>
+            <a:r>
+              <a:rPr sz="1800" b="0" i="0">
                 <a:solidFill>
                   <a:srgbClr val="1C1B19"/>
                 </a:solidFill>
                 <a:latin typeface="Source Serif 4"/>
               </a:rPr>
-              <a:t>A wall or board space for the loop</a:t>
-            </a:r>
-          </a:p>
-          <a:p>
-            <a:pPr algn="l">
-              <a:spcAft>
-                <a:spcPts val="675"/>
-              </a:spcAft>
-            </a:pPr>
-            <a:r>
-              <a:rPr sz="1500" b="0" i="0">
-                <a:solidFill>
-                  <a:srgbClr val="1C1B19"/>
-                </a:solidFill>
-                <a:latin typeface="Source Serif 4"/>
-              </a:rPr>
-              <a:t>The take-home link (last slide) to share after class</a:t>
-            </a:r>
-          </a:p>
-        </p:txBody>
-      </p:sp>
-      <p:sp>
-        <p:nvSpPr>
-          <p:cNvPr id="7" name="TextBox 6"/>
-          <p:cNvSpPr txBox="1"/>
-          <p:nvPr/>
-        </p:nvSpPr>
-        <p:spPr>
-          <a:xfrm>
-            <a:off x="6126480" y="1828800"/>
-            <a:ext cx="5486400" cy="4389120"/>
-          </a:xfrm>
-          <a:prstGeom prst="rect">
-            <a:avLst/>
-          </a:prstGeom>
-          <a:noFill/>
-        </p:spPr>
-        <p:txBody>
-          <a:bodyPr wrap="square" anchor="t" lIns="0" rIns="0" tIns="0" bIns="0">
-            <a:spAutoFit/>
-          </a:bodyPr>
-          <a:lstStyle/>
-          <a:p>
-            <a:pPr algn="l">
-              <a:spcAft>
-                <a:spcPts val="630"/>
-              </a:spcAft>
-            </a:pPr>
-            <a:r>
-              <a:rPr sz="1100" b="1" i="0">
+              <a:t/>
+            </a:r>
+          </a:p>
+          <a:p>
+            <a:pPr algn="l">
+              <a:spcAft>
+                <a:spcPts val="810"/>
+              </a:spcAft>
+            </a:pPr>
+            <a:r>
+              <a:rPr sz="1200" b="1" i="0">
                 <a:solidFill>
                   <a:srgbClr val="0B2D5B"/>
                 </a:solidFill>
                 <a:latin typeface="Inter Tight"/>
               </a:rPr>
-              <a:t>FLOW</a:t>
-            </a:r>
-          </a:p>
-          <a:p>
-            <a:pPr algn="l">
-              <a:spcAft>
-                <a:spcPts val="630"/>
-              </a:spcAft>
-            </a:pPr>
-            <a:r>
-              <a:rPr sz="1300" b="1" i="0">
-                <a:solidFill>
-                  <a:srgbClr val="F47B20"/>
-                </a:solidFill>
-                <a:latin typeface="Inter Tight"/>
-              </a:rPr>
-              <a:t>5 min   </a:t>
-            </a:r>
-            <a:r>
-              <a:rPr sz="1400" b="0" i="0">
-                <a:solidFill>
-                  <a:srgbClr val="1C1B19"/>
-                </a:solidFill>
-                <a:latin typeface="Source Serif 4"/>
-              </a:rPr>
-              <a:t>Myth or fact (stand up, sit down)</a:t>
-            </a:r>
-          </a:p>
-          <a:p>
-            <a:pPr algn="l">
-              <a:spcAft>
-                <a:spcPts val="630"/>
-              </a:spcAft>
-            </a:pPr>
-            <a:r>
-              <a:rPr sz="1300" b="1" i="0">
-                <a:solidFill>
-                  <a:srgbClr val="F47B20"/>
-                </a:solidFill>
-                <a:latin typeface="Inter Tight"/>
-              </a:rPr>
-              <a:t>10 min   </a:t>
-            </a:r>
-            <a:r>
-              <a:rPr sz="1400" b="0" i="0">
-                <a:solidFill>
-                  <a:srgbClr val="1C1B19"/>
-                </a:solidFill>
-                <a:latin typeface="Source Serif 4"/>
-              </a:rPr>
-              <a:t>The loop: how dependence builds</a:t>
-            </a:r>
-          </a:p>
-          <a:p>
-            <a:pPr algn="l">
-              <a:spcAft>
-                <a:spcPts val="630"/>
-              </a:spcAft>
-            </a:pPr>
-            <a:r>
-              <a:rPr sz="1300" b="1" i="0">
-                <a:solidFill>
-                  <a:srgbClr val="F47B20"/>
-                </a:solidFill>
-                <a:latin typeface="Inter Tight"/>
-              </a:rPr>
-              <a:t>5 min   </a:t>
-            </a:r>
-            <a:r>
-              <a:rPr sz="1400" b="0" i="0">
-                <a:solidFill>
-                  <a:srgbClr val="1C1B19"/>
-                </a:solidFill>
-                <a:latin typeface="Source Serif 4"/>
-              </a:rPr>
-              <a:t>Where the cues show up (anonymous cards)</a:t>
-            </a:r>
-          </a:p>
-          <a:p>
-            <a:pPr algn="l">
-              <a:spcAft>
-                <a:spcPts val="630"/>
-              </a:spcAft>
-            </a:pPr>
-            <a:r>
-              <a:rPr sz="1300" b="1" i="0">
-                <a:solidFill>
-                  <a:srgbClr val="F47B20"/>
-                </a:solidFill>
-                <a:latin typeface="Inter Tight"/>
-              </a:rPr>
-              <a:t>5 min   </a:t>
-            </a:r>
-            <a:r>
-              <a:rPr sz="1400" b="0" i="0">
-                <a:solidFill>
-                  <a:srgbClr val="1C1B19"/>
-                </a:solidFill>
-                <a:latin typeface="Source Serif 4"/>
-              </a:rPr>
-              <a:t>The stress trap</a:t>
-            </a:r>
-          </a:p>
-          <a:p>
-            <a:pPr algn="l">
-              <a:spcAft>
-                <a:spcPts val="630"/>
-              </a:spcAft>
-            </a:pPr>
-            <a:r>
-              <a:rPr sz="1300" b="1" i="0">
-                <a:solidFill>
-                  <a:srgbClr val="F47B20"/>
-                </a:solidFill>
-                <a:latin typeface="Inter Tight"/>
-              </a:rPr>
-              <a:t>10 min   </a:t>
-            </a:r>
-            <a:r>
-              <a:rPr sz="1400" b="0" i="0">
-                <a:solidFill>
-                  <a:srgbClr val="1C1B19"/>
-                </a:solidFill>
-                <a:latin typeface="Source Serif 4"/>
-              </a:rPr>
-              <a:t>Three moments (small groups)</a:t>
-            </a:r>
-          </a:p>
-          <a:p>
-            <a:pPr algn="l">
-              <a:spcAft>
-                <a:spcPts val="630"/>
-              </a:spcAft>
-            </a:pPr>
-            <a:r>
-              <a:rPr sz="1300" b="1" i="0">
-                <a:solidFill>
-                  <a:srgbClr val="F47B20"/>
-                </a:solidFill>
-                <a:latin typeface="Inter Tight"/>
-              </a:rPr>
-              <a:t>5 min   </a:t>
-            </a:r>
-            <a:r>
-              <a:rPr sz="1400" b="0" i="0">
-                <a:solidFill>
-                  <a:srgbClr val="1C1B19"/>
-                </a:solidFill>
-                <a:latin typeface="Source Serif 4"/>
-              </a:rPr>
-              <a:t>What actually helps</a:t>
-            </a:r>
-          </a:p>
-          <a:p>
-            <a:pPr algn="l">
-              <a:spcAft>
-                <a:spcPts val="630"/>
-              </a:spcAft>
-            </a:pPr>
-            <a:r>
-              <a:rPr sz="1300" b="1" i="0">
-                <a:solidFill>
-                  <a:srgbClr val="F47B20"/>
-                </a:solidFill>
-                <a:latin typeface="Inter Tight"/>
-              </a:rPr>
-              <a:t>5 min   </a:t>
-            </a:r>
-            <a:r>
-              <a:rPr sz="1400" b="0" i="0">
-                <a:solidFill>
-                  <a:srgbClr val="1C1B19"/>
-                </a:solidFill>
-                <a:latin typeface="Source Serif 4"/>
-              </a:rPr>
-              <a:t>Exit card and take-home link</a:t>
-            </a:r>
-          </a:p>
-          <a:p>
-            <a:pPr algn="l">
-              <a:spcAft>
-                <a:spcPts val="630"/>
-              </a:spcAft>
-            </a:pPr>
-            <a:r>
-              <a:rPr sz="1400" b="0" i="0">
-                <a:solidFill>
-                  <a:srgbClr val="1C1B19"/>
-                </a:solidFill>
-                <a:latin typeface="Source Serif 4"/>
-              </a:rPr>
-              <a:t/>
-            </a:r>
-          </a:p>
-          <a:p>
-            <a:pPr algn="l">
-              <a:spcAft>
-                <a:spcPts val="630"/>
-              </a:spcAft>
-            </a:pPr>
-            <a:r>
-              <a:rPr sz="1100" b="1" i="0">
-                <a:solidFill>
-                  <a:srgbClr val="0B2D5B"/>
-                </a:solidFill>
-                <a:latin typeface="Inter Tight"/>
-              </a:rPr>
               <a:t>SHORT ON TIME (20-MINUTE ADVISORY)</a:t>
             </a:r>
           </a:p>
           <a:p>
             <a:pPr algn="l">
               <a:spcAft>
-                <a:spcPts val="630"/>
-              </a:spcAft>
-            </a:pPr>
-            <a:r>
-              <a:rPr sz="1400" b="0" i="0">
+                <a:spcPts val="810"/>
+              </a:spcAft>
+            </a:pPr>
+            <a:r>
+              <a:rPr sz="1800" b="0" i="0">
                 <a:solidFill>
                   <a:srgbClr val="1C1B19"/>
                 </a:solidFill>
@@ -4820,7 +4645,7 @@
                 </a:solidFill>
                 <a:latin typeface="Inter Tight"/>
               </a:rPr>
-              <a:t>THE STRESS TRAP</a:t>
+              <a:t>BEFORE YOU GO</a:t>
             </a:r>
           </a:p>
         </p:txBody>
@@ -4872,47 +4697,8 @@
         </p:nvSpPr>
         <p:spPr>
           <a:xfrm>
-            <a:off x="822960" y="1463040"/>
-            <a:ext cx="10515600" cy="3291840"/>
-          </a:xfrm>
-          <a:prstGeom prst="rect">
-            <a:avLst/>
-          </a:prstGeom>
-          <a:noFill/>
-        </p:spPr>
-        <p:txBody>
-          <a:bodyPr wrap="square" anchor="ctr" lIns="0" rIns="0" tIns="0" bIns="0">
-            <a:spAutoFit/>
-          </a:bodyPr>
-          <a:lstStyle/>
-          <a:p>
-            <a:pPr algn="l">
-              <a:spcAft>
-                <a:spcPts val="2070"/>
-              </a:spcAft>
-            </a:pPr>
-            <a:r>
-              <a:rPr sz="4600" b="1" i="0">
-                <a:solidFill>
-                  <a:srgbClr val="1C1B19"/>
-                </a:solidFill>
-                <a:latin typeface="Source Serif 4"/>
-              </a:rPr>
-              <a:t>It relieves stress it created.</a:t>
-            </a:r>
-          </a:p>
-        </p:txBody>
-      </p:sp>
-      <p:sp>
-        <p:nvSpPr>
-          <p:cNvPr id="6" name="TextBox 5"/>
-          <p:cNvSpPr txBox="1"/>
-          <p:nvPr/>
-        </p:nvSpPr>
-        <p:spPr>
-          <a:xfrm>
-            <a:off x="822960" y="4846320"/>
-            <a:ext cx="10515600" cy="1097280"/>
+            <a:off x="822960" y="1188720"/>
+            <a:ext cx="10515600" cy="914400"/>
           </a:xfrm>
           <a:prstGeom prst="rect">
             <a:avLst/>
@@ -4927,17 +4713,180 @@
           <a:p>
             <a:pPr algn="l">
               <a:spcAft>
-                <a:spcPts val="990"/>
-              </a:spcAft>
-            </a:pPr>
-            <a:r>
-              <a:rPr sz="2200" b="0" i="1">
-                <a:solidFill>
-                  <a:srgbClr val="5D5A54"/>
-                </a:solidFill>
-                <a:latin typeface="Source Serif 4"/>
-              </a:rPr>
-              <a:t>As nicotine wears off you feel edgy and foggy. The next hit fixes that. People who quit feel less stressed over time.</a:t>
+                <a:spcPts val="1620"/>
+              </a:spcAft>
+            </a:pPr>
+            <a:r>
+              <a:rPr sz="3600" b="1" i="0">
+                <a:solidFill>
+                  <a:srgbClr val="1C1B19"/>
+                </a:solidFill>
+                <a:latin typeface="Source Serif 4"/>
+              </a:rPr>
+              <a:t>Exit card</a:t>
+            </a:r>
+          </a:p>
+        </p:txBody>
+      </p:sp>
+      <p:sp>
+        <p:nvSpPr>
+          <p:cNvPr id="6" name="TextBox 5"/>
+          <p:cNvSpPr txBox="1"/>
+          <p:nvPr/>
+        </p:nvSpPr>
+        <p:spPr>
+          <a:xfrm>
+            <a:off x="822960" y="2286000"/>
+            <a:ext cx="10515600" cy="1463040"/>
+          </a:xfrm>
+          <a:prstGeom prst="rect">
+            <a:avLst/>
+          </a:prstGeom>
+          <a:noFill/>
+        </p:spPr>
+        <p:txBody>
+          <a:bodyPr wrap="square" anchor="t" lIns="0" rIns="0" tIns="0" bIns="0">
+            <a:spAutoFit/>
+          </a:bodyPr>
+          <a:lstStyle/>
+          <a:p>
+            <a:pPr algn="l">
+              <a:spcAft>
+                <a:spcPts val="1080"/>
+              </a:spcAft>
+            </a:pPr>
+            <a:r>
+              <a:rPr sz="2400" b="0" i="0">
+                <a:solidFill>
+                  <a:srgbClr val="1C1B19"/>
+                </a:solidFill>
+                <a:latin typeface="Source Serif 4"/>
+              </a:rPr>
+              <a:t>What would you tell a friend who says vaping helps their stress?</a:t>
+            </a:r>
+          </a:p>
+        </p:txBody>
+      </p:sp>
+      <p:sp>
+        <p:nvSpPr>
+          <p:cNvPr id="7" name="Rectangle 6"/>
+          <p:cNvSpPr/>
+          <p:nvPr/>
+        </p:nvSpPr>
+        <p:spPr>
+          <a:xfrm>
+            <a:off x="822960" y="4023360"/>
+            <a:ext cx="10515600" cy="1371600"/>
+          </a:xfrm>
+          <a:prstGeom prst="rect">
+            <a:avLst/>
+          </a:prstGeom>
+          <a:solidFill>
+            <a:srgbClr val="FFFFFF"/>
+          </a:solidFill>
+          <a:ln w="15875">
+            <a:solidFill>
+              <a:srgbClr val="1C1B19"/>
+            </a:solidFill>
+          </a:ln>
+          <a:effectLst/>
+        </p:spPr>
+        <p:style>
+          <a:lnRef idx="1">
+            <a:schemeClr val="accent1"/>
+          </a:lnRef>
+          <a:fillRef idx="3">
+            <a:schemeClr val="accent1"/>
+          </a:fillRef>
+          <a:effectRef idx="2">
+            <a:schemeClr val="accent1"/>
+          </a:effectRef>
+          <a:fontRef idx="minor">
+            <a:schemeClr val="lt1"/>
+          </a:fontRef>
+        </p:style>
+        <p:txBody>
+          <a:bodyPr rtlCol="0" anchor="ctr"/>
+          <a:lstStyle/>
+          <a:p>
+            <a:pPr algn="ctr"/>
+          </a:p>
+        </p:txBody>
+      </p:sp>
+      <p:sp>
+        <p:nvSpPr>
+          <p:cNvPr id="8" name="TextBox 7"/>
+          <p:cNvSpPr txBox="1"/>
+          <p:nvPr/>
+        </p:nvSpPr>
+        <p:spPr>
+          <a:xfrm>
+            <a:off x="1097280" y="4206240"/>
+            <a:ext cx="10058400" cy="365760"/>
+          </a:xfrm>
+          <a:prstGeom prst="rect">
+            <a:avLst/>
+          </a:prstGeom>
+          <a:noFill/>
+        </p:spPr>
+        <p:txBody>
+          <a:bodyPr wrap="square" anchor="t" lIns="0" rIns="0" tIns="0" bIns="0">
+            <a:spAutoFit/>
+          </a:bodyPr>
+          <a:lstStyle/>
+          <a:p>
+            <a:pPr algn="l">
+              <a:spcAft>
+                <a:spcPts val="540"/>
+              </a:spcAft>
+            </a:pPr>
+            <a:r>
+              <a:rPr sz="1200" b="1" i="0">
+                <a:solidFill>
+                  <a:srgbClr val="0B2D5B"/>
+                </a:solidFill>
+                <a:latin typeface="Inter Tight"/>
+              </a:rPr>
+              <a:t>TAKE-HOME SHEET</a:t>
+            </a:r>
+          </a:p>
+        </p:txBody>
+      </p:sp>
+      <p:sp>
+        <p:nvSpPr>
+          <p:cNvPr id="9" name="TextBox 8"/>
+          <p:cNvSpPr txBox="1"/>
+          <p:nvPr/>
+        </p:nvSpPr>
+        <p:spPr>
+          <a:xfrm>
+            <a:off x="1097280" y="4617720"/>
+            <a:ext cx="10058400" cy="640080"/>
+          </a:xfrm>
+          <a:prstGeom prst="rect">
+            <a:avLst/>
+          </a:prstGeom>
+          <a:noFill/>
+        </p:spPr>
+        <p:txBody>
+          <a:bodyPr wrap="square" anchor="t" lIns="0" rIns="0" tIns="0" bIns="0">
+            <a:spAutoFit/>
+          </a:bodyPr>
+          <a:lstStyle/>
+          <a:p>
+            <a:pPr algn="l">
+              <a:spcAft>
+                <a:spcPts val="900"/>
+              </a:spcAft>
+            </a:pPr>
+            <a:r>
+              <a:rPr sz="2000" b="0" i="0">
+                <a:solidFill>
+                  <a:srgbClr val="1C1B19"/>
+                </a:solidFill>
+                <a:latin typeface="Inter Tight"/>
+              </a:rPr>
+              <a:t>https://rmwtoolkit.github.io/bcds-toolkit/vaping-and-your-brain-high-school.html</a:t>
             </a:r>
           </a:p>
         </p:txBody>
@@ -4951,6 +4900,2308 @@
 </file>
 
 <file path=ppt/slides/slide11.xml><?xml version="1.0" encoding="utf-8"?>
+<p:sld xmlns:a="http://schemas.openxmlformats.org/drawingml/2006/main" xmlns:p="http://schemas.openxmlformats.org/presentationml/2006/main" xmlns:r="http://schemas.openxmlformats.org/officeDocument/2006/relationships" show="0">
+  <p:cSld>
+    <p:bg>
+      <p:bgPr>
+        <a:solidFill>
+          <a:srgbClr val="EEEBE4"/>
+        </a:solidFill>
+        <a:effectLst/>
+      </p:bgPr>
+    </p:bg>
+    <p:spTree>
+      <p:nvGrpSpPr>
+        <p:cNvPr id="1" name=""/>
+        <p:cNvGrpSpPr/>
+        <p:nvPr/>
+      </p:nvGrpSpPr>
+      <p:grpSpPr/>
+      <p:sp>
+        <p:nvSpPr>
+          <p:cNvPr id="2" name="Rectangle 1"/>
+          <p:cNvSpPr/>
+          <p:nvPr/>
+        </p:nvSpPr>
+        <p:spPr>
+          <a:xfrm>
+            <a:off x="0" y="0"/>
+            <a:ext cx="12191695" cy="384048"/>
+          </a:xfrm>
+          <a:prstGeom prst="rect">
+            <a:avLst/>
+          </a:prstGeom>
+          <a:solidFill>
+            <a:srgbClr val="0B2D5B"/>
+          </a:solidFill>
+          <a:ln>
+            <a:noFill/>
+          </a:ln>
+          <a:effectLst/>
+        </p:spPr>
+        <p:style>
+          <a:lnRef idx="1">
+            <a:schemeClr val="accent1"/>
+          </a:lnRef>
+          <a:fillRef idx="3">
+            <a:schemeClr val="accent1"/>
+          </a:fillRef>
+          <a:effectRef idx="2">
+            <a:schemeClr val="accent1"/>
+          </a:effectRef>
+          <a:fontRef idx="minor">
+            <a:schemeClr val="lt1"/>
+          </a:fontRef>
+        </p:style>
+        <p:txBody>
+          <a:bodyPr rtlCol="0" anchor="ctr"/>
+          <a:lstStyle/>
+          <a:p>
+            <a:pPr algn="ctr"/>
+          </a:p>
+        </p:txBody>
+      </p:sp>
+      <p:sp>
+        <p:nvSpPr>
+          <p:cNvPr id="3" name="TextBox 2"/>
+          <p:cNvSpPr txBox="1"/>
+          <p:nvPr/>
+        </p:nvSpPr>
+        <p:spPr>
+          <a:xfrm>
+            <a:off x="548640" y="100584"/>
+            <a:ext cx="10972800" cy="274320"/>
+          </a:xfrm>
+          <a:prstGeom prst="rect">
+            <a:avLst/>
+          </a:prstGeom>
+          <a:noFill/>
+        </p:spPr>
+        <p:txBody>
+          <a:bodyPr wrap="square" anchor="t" lIns="0" rIns="0" tIns="0" bIns="0">
+            <a:spAutoFit/>
+          </a:bodyPr>
+          <a:lstStyle/>
+          <a:p>
+            <a:pPr algn="l">
+              <a:spcAft>
+                <a:spcPts val="495"/>
+              </a:spcAft>
+            </a:pPr>
+            <a:r>
+              <a:rPr sz="1100" b="1" i="0">
+                <a:solidFill>
+                  <a:srgbClr val="FFFFFF"/>
+                </a:solidFill>
+                <a:latin typeface="Inter Tight"/>
+              </a:rPr>
+              <a:t>TEACHER PAGE  ·  skipped when you present  ·  Lesson plan</a:t>
+            </a:r>
+          </a:p>
+        </p:txBody>
+      </p:sp>
+      <p:sp>
+        <p:nvSpPr>
+          <p:cNvPr id="4" name="TextBox 3"/>
+          <p:cNvSpPr txBox="1"/>
+          <p:nvPr/>
+        </p:nvSpPr>
+        <p:spPr>
+          <a:xfrm>
+            <a:off x="548640" y="685800"/>
+            <a:ext cx="10972800" cy="731520"/>
+          </a:xfrm>
+          <a:prstGeom prst="rect">
+            <a:avLst/>
+          </a:prstGeom>
+          <a:noFill/>
+        </p:spPr>
+        <p:txBody>
+          <a:bodyPr wrap="square" anchor="t" lIns="0" rIns="0" tIns="0" bIns="0">
+            <a:spAutoFit/>
+          </a:bodyPr>
+          <a:lstStyle/>
+          <a:p>
+            <a:pPr algn="l">
+              <a:spcAft>
+                <a:spcPts val="1530"/>
+              </a:spcAft>
+            </a:pPr>
+            <a:r>
+              <a:rPr sz="3400" b="1" i="0">
+                <a:solidFill>
+                  <a:srgbClr val="1C1B19"/>
+                </a:solidFill>
+                <a:latin typeface="Source Serif 4"/>
+              </a:rPr>
+              <a:t>Vaping and Your Brain</a:t>
+            </a:r>
+          </a:p>
+        </p:txBody>
+      </p:sp>
+      <p:sp>
+        <p:nvSpPr>
+          <p:cNvPr id="5" name="TextBox 4"/>
+          <p:cNvSpPr txBox="1"/>
+          <p:nvPr/>
+        </p:nvSpPr>
+        <p:spPr>
+          <a:xfrm>
+            <a:off x="548640" y="1325880"/>
+            <a:ext cx="10972800" cy="365760"/>
+          </a:xfrm>
+          <a:prstGeom prst="rect">
+            <a:avLst/>
+          </a:prstGeom>
+          <a:noFill/>
+        </p:spPr>
+        <p:txBody>
+          <a:bodyPr wrap="square" anchor="t" lIns="0" rIns="0" tIns="0" bIns="0">
+            <a:spAutoFit/>
+          </a:bodyPr>
+          <a:lstStyle/>
+          <a:p>
+            <a:pPr algn="l">
+              <a:spcAft>
+                <a:spcPts val="630"/>
+              </a:spcAft>
+            </a:pPr>
+            <a:r>
+              <a:rPr sz="1400" b="0" i="0">
+                <a:solidFill>
+                  <a:srgbClr val="5D5A54"/>
+                </a:solidFill>
+                <a:latin typeface="Inter Tight"/>
+              </a:rPr>
+              <a:t>Upper School  ·  45 minutes (20-minute advisory version below)  ·  Health class, advisory, or a counselor-led group</a:t>
+            </a:r>
+          </a:p>
+        </p:txBody>
+      </p:sp>
+      <p:sp>
+        <p:nvSpPr>
+          <p:cNvPr id="6" name="TextBox 5"/>
+          <p:cNvSpPr txBox="1"/>
+          <p:nvPr/>
+        </p:nvSpPr>
+        <p:spPr>
+          <a:xfrm>
+            <a:off x="548640" y="1828800"/>
+            <a:ext cx="5120640" cy="4389120"/>
+          </a:xfrm>
+          <a:prstGeom prst="rect">
+            <a:avLst/>
+          </a:prstGeom>
+          <a:noFill/>
+        </p:spPr>
+        <p:txBody>
+          <a:bodyPr wrap="square" anchor="t" lIns="0" rIns="0" tIns="0" bIns="0">
+            <a:spAutoFit/>
+          </a:bodyPr>
+          <a:lstStyle/>
+          <a:p>
+            <a:pPr algn="l">
+              <a:spcAft>
+                <a:spcPts val="675"/>
+              </a:spcAft>
+            </a:pPr>
+            <a:r>
+              <a:rPr sz="1100" b="1" i="0">
+                <a:solidFill>
+                  <a:srgbClr val="0B2D5B"/>
+                </a:solidFill>
+                <a:latin typeface="Inter Tight"/>
+              </a:rPr>
+              <a:t>GOAL</a:t>
+            </a:r>
+          </a:p>
+          <a:p>
+            <a:pPr algn="l">
+              <a:spcAft>
+                <a:spcPts val="675"/>
+              </a:spcAft>
+            </a:pPr>
+            <a:r>
+              <a:rPr sz="1500" b="0" i="0">
+                <a:solidFill>
+                  <a:srgbClr val="1C1B19"/>
+                </a:solidFill>
+                <a:latin typeface="Source Serif 4"/>
+              </a:rPr>
+              <a:t>Students can explain how nicotine dependence builds (cue, hit, relief, craving), why vaping feels like stress relief, and name two real ways to get help quitting. The aim is understanding. Nobody in the room should feel caught.</a:t>
+            </a:r>
+          </a:p>
+          <a:p>
+            <a:pPr algn="l">
+              <a:spcAft>
+                <a:spcPts val="675"/>
+              </a:spcAft>
+            </a:pPr>
+            <a:r>
+              <a:rPr sz="1500" b="0" i="0">
+                <a:solidFill>
+                  <a:srgbClr val="1C1B19"/>
+                </a:solidFill>
+                <a:latin typeface="Source Serif 4"/>
+              </a:rPr>
+              <a:t/>
+            </a:r>
+          </a:p>
+          <a:p>
+            <a:pPr algn="l">
+              <a:spcAft>
+                <a:spcPts val="675"/>
+              </a:spcAft>
+            </a:pPr>
+            <a:r>
+              <a:rPr sz="1100" b="1" i="0">
+                <a:solidFill>
+                  <a:srgbClr val="0B2D5B"/>
+                </a:solidFill>
+                <a:latin typeface="Inter Tight"/>
+              </a:rPr>
+              <a:t>MATERIALS</a:t>
+            </a:r>
+          </a:p>
+          <a:p>
+            <a:pPr algn="l">
+              <a:spcAft>
+                <a:spcPts val="675"/>
+              </a:spcAft>
+            </a:pPr>
+            <a:r>
+              <a:rPr sz="1500" b="0" i="0">
+                <a:solidFill>
+                  <a:srgbClr val="1C1B19"/>
+                </a:solidFill>
+                <a:latin typeface="Source Serif 4"/>
+              </a:rPr>
+              <a:t>Sticky notes or index cards, one stack per table</a:t>
+            </a:r>
+          </a:p>
+          <a:p>
+            <a:pPr algn="l">
+              <a:spcAft>
+                <a:spcPts val="675"/>
+              </a:spcAft>
+            </a:pPr>
+            <a:r>
+              <a:rPr sz="1500" b="0" i="0">
+                <a:solidFill>
+                  <a:srgbClr val="1C1B19"/>
+                </a:solidFill>
+                <a:latin typeface="Source Serif 4"/>
+              </a:rPr>
+              <a:t>A wall or board space for the loop</a:t>
+            </a:r>
+          </a:p>
+          <a:p>
+            <a:pPr algn="l">
+              <a:spcAft>
+                <a:spcPts val="675"/>
+              </a:spcAft>
+            </a:pPr>
+            <a:r>
+              <a:rPr sz="1500" b="0" i="0">
+                <a:solidFill>
+                  <a:srgbClr val="1C1B19"/>
+                </a:solidFill>
+                <a:latin typeface="Source Serif 4"/>
+              </a:rPr>
+              <a:t>The take-home link (last slide) to share after class</a:t>
+            </a:r>
+          </a:p>
+        </p:txBody>
+      </p:sp>
+      <p:sp>
+        <p:nvSpPr>
+          <p:cNvPr id="7" name="TextBox 6"/>
+          <p:cNvSpPr txBox="1"/>
+          <p:nvPr/>
+        </p:nvSpPr>
+        <p:spPr>
+          <a:xfrm>
+            <a:off x="6126480" y="1828800"/>
+            <a:ext cx="5486400" cy="4389120"/>
+          </a:xfrm>
+          <a:prstGeom prst="rect">
+            <a:avLst/>
+          </a:prstGeom>
+          <a:noFill/>
+        </p:spPr>
+        <p:txBody>
+          <a:bodyPr wrap="square" anchor="t" lIns="0" rIns="0" tIns="0" bIns="0">
+            <a:spAutoFit/>
+          </a:bodyPr>
+          <a:lstStyle/>
+          <a:p>
+            <a:pPr algn="l">
+              <a:spcAft>
+                <a:spcPts val="630"/>
+              </a:spcAft>
+            </a:pPr>
+            <a:r>
+              <a:rPr sz="1100" b="1" i="0">
+                <a:solidFill>
+                  <a:srgbClr val="0B2D5B"/>
+                </a:solidFill>
+                <a:latin typeface="Inter Tight"/>
+              </a:rPr>
+              <a:t>FLOW</a:t>
+            </a:r>
+          </a:p>
+          <a:p>
+            <a:pPr algn="l">
+              <a:spcAft>
+                <a:spcPts val="630"/>
+              </a:spcAft>
+            </a:pPr>
+            <a:r>
+              <a:rPr sz="1300" b="1" i="0">
+                <a:solidFill>
+                  <a:srgbClr val="F47B20"/>
+                </a:solidFill>
+                <a:latin typeface="Inter Tight"/>
+              </a:rPr>
+              <a:t>5 min   </a:t>
+            </a:r>
+            <a:r>
+              <a:rPr sz="1400" b="0" i="0">
+                <a:solidFill>
+                  <a:srgbClr val="1C1B19"/>
+                </a:solidFill>
+                <a:latin typeface="Source Serif 4"/>
+              </a:rPr>
+              <a:t>Myth or fact (stand up, sit down)</a:t>
+            </a:r>
+          </a:p>
+          <a:p>
+            <a:pPr algn="l">
+              <a:spcAft>
+                <a:spcPts val="630"/>
+              </a:spcAft>
+            </a:pPr>
+            <a:r>
+              <a:rPr sz="1300" b="1" i="0">
+                <a:solidFill>
+                  <a:srgbClr val="F47B20"/>
+                </a:solidFill>
+                <a:latin typeface="Inter Tight"/>
+              </a:rPr>
+              <a:t>10 min   </a:t>
+            </a:r>
+            <a:r>
+              <a:rPr sz="1400" b="0" i="0">
+                <a:solidFill>
+                  <a:srgbClr val="1C1B19"/>
+                </a:solidFill>
+                <a:latin typeface="Source Serif 4"/>
+              </a:rPr>
+              <a:t>The loop: how dependence builds</a:t>
+            </a:r>
+          </a:p>
+          <a:p>
+            <a:pPr algn="l">
+              <a:spcAft>
+                <a:spcPts val="630"/>
+              </a:spcAft>
+            </a:pPr>
+            <a:r>
+              <a:rPr sz="1300" b="1" i="0">
+                <a:solidFill>
+                  <a:srgbClr val="F47B20"/>
+                </a:solidFill>
+                <a:latin typeface="Inter Tight"/>
+              </a:rPr>
+              <a:t>5 min   </a:t>
+            </a:r>
+            <a:r>
+              <a:rPr sz="1400" b="0" i="0">
+                <a:solidFill>
+                  <a:srgbClr val="1C1B19"/>
+                </a:solidFill>
+                <a:latin typeface="Source Serif 4"/>
+              </a:rPr>
+              <a:t>Where the cues show up (anonymous cards)</a:t>
+            </a:r>
+          </a:p>
+          <a:p>
+            <a:pPr algn="l">
+              <a:spcAft>
+                <a:spcPts val="630"/>
+              </a:spcAft>
+            </a:pPr>
+            <a:r>
+              <a:rPr sz="1300" b="1" i="0">
+                <a:solidFill>
+                  <a:srgbClr val="F47B20"/>
+                </a:solidFill>
+                <a:latin typeface="Inter Tight"/>
+              </a:rPr>
+              <a:t>5 min   </a:t>
+            </a:r>
+            <a:r>
+              <a:rPr sz="1400" b="0" i="0">
+                <a:solidFill>
+                  <a:srgbClr val="1C1B19"/>
+                </a:solidFill>
+                <a:latin typeface="Source Serif 4"/>
+              </a:rPr>
+              <a:t>The stress trap</a:t>
+            </a:r>
+          </a:p>
+          <a:p>
+            <a:pPr algn="l">
+              <a:spcAft>
+                <a:spcPts val="630"/>
+              </a:spcAft>
+            </a:pPr>
+            <a:r>
+              <a:rPr sz="1300" b="1" i="0">
+                <a:solidFill>
+                  <a:srgbClr val="F47B20"/>
+                </a:solidFill>
+                <a:latin typeface="Inter Tight"/>
+              </a:rPr>
+              <a:t>10 min   </a:t>
+            </a:r>
+            <a:r>
+              <a:rPr sz="1400" b="0" i="0">
+                <a:solidFill>
+                  <a:srgbClr val="1C1B19"/>
+                </a:solidFill>
+                <a:latin typeface="Source Serif 4"/>
+              </a:rPr>
+              <a:t>Three moments (small groups)</a:t>
+            </a:r>
+          </a:p>
+          <a:p>
+            <a:pPr algn="l">
+              <a:spcAft>
+                <a:spcPts val="630"/>
+              </a:spcAft>
+            </a:pPr>
+            <a:r>
+              <a:rPr sz="1300" b="1" i="0">
+                <a:solidFill>
+                  <a:srgbClr val="F47B20"/>
+                </a:solidFill>
+                <a:latin typeface="Inter Tight"/>
+              </a:rPr>
+              <a:t>5 min   </a:t>
+            </a:r>
+            <a:r>
+              <a:rPr sz="1400" b="0" i="0">
+                <a:solidFill>
+                  <a:srgbClr val="1C1B19"/>
+                </a:solidFill>
+                <a:latin typeface="Source Serif 4"/>
+              </a:rPr>
+              <a:t>What actually helps</a:t>
+            </a:r>
+          </a:p>
+          <a:p>
+            <a:pPr algn="l">
+              <a:spcAft>
+                <a:spcPts val="630"/>
+              </a:spcAft>
+            </a:pPr>
+            <a:r>
+              <a:rPr sz="1300" b="1" i="0">
+                <a:solidFill>
+                  <a:srgbClr val="F47B20"/>
+                </a:solidFill>
+                <a:latin typeface="Inter Tight"/>
+              </a:rPr>
+              <a:t>5 min   </a:t>
+            </a:r>
+            <a:r>
+              <a:rPr sz="1400" b="0" i="0">
+                <a:solidFill>
+                  <a:srgbClr val="1C1B19"/>
+                </a:solidFill>
+                <a:latin typeface="Source Serif 4"/>
+              </a:rPr>
+              <a:t>Exit card and take-home link</a:t>
+            </a:r>
+          </a:p>
+          <a:p>
+            <a:pPr algn="l">
+              <a:spcAft>
+                <a:spcPts val="630"/>
+              </a:spcAft>
+            </a:pPr>
+            <a:r>
+              <a:rPr sz="1400" b="0" i="0">
+                <a:solidFill>
+                  <a:srgbClr val="1C1B19"/>
+                </a:solidFill>
+                <a:latin typeface="Source Serif 4"/>
+              </a:rPr>
+              <a:t/>
+            </a:r>
+          </a:p>
+          <a:p>
+            <a:pPr algn="l">
+              <a:spcAft>
+                <a:spcPts val="630"/>
+              </a:spcAft>
+            </a:pPr>
+            <a:r>
+              <a:rPr sz="1100" b="1" i="0">
+                <a:solidFill>
+                  <a:srgbClr val="0B2D5B"/>
+                </a:solidFill>
+                <a:latin typeface="Inter Tight"/>
+              </a:rPr>
+              <a:t>SHORT ON TIME (20-MINUTE ADVISORY)</a:t>
+            </a:r>
+          </a:p>
+          <a:p>
+            <a:pPr algn="l">
+              <a:spcAft>
+                <a:spcPts val="630"/>
+              </a:spcAft>
+            </a:pPr>
+            <a:r>
+              <a:rPr sz="1400" b="0" i="0">
+                <a:solidFill>
+                  <a:srgbClr val="1C1B19"/>
+                </a:solidFill>
+                <a:latin typeface="Source Serif 4"/>
+              </a:rPr>
+              <a:t>Myth or fact (5), the loop (7), one of the three moments (5), exit card (3). Share the take-home link so students get the rest.</a:t>
+            </a:r>
+          </a:p>
+        </p:txBody>
+      </p:sp>
+    </p:spTree>
+  </p:cSld>
+  <p:clrMapOvr>
+    <a:masterClrMapping/>
+  </p:clrMapOvr>
+</p:sld>
+</file>
+
+<file path=ppt/slides/slide12.xml><?xml version="1.0" encoding="utf-8"?>
+<p:sld xmlns:a="http://schemas.openxmlformats.org/drawingml/2006/main" xmlns:p="http://schemas.openxmlformats.org/presentationml/2006/main" xmlns:r="http://schemas.openxmlformats.org/officeDocument/2006/relationships" show="0">
+  <p:cSld>
+    <p:bg>
+      <p:bgPr>
+        <a:solidFill>
+          <a:srgbClr val="EEEBE4"/>
+        </a:solidFill>
+        <a:effectLst/>
+      </p:bgPr>
+    </p:bg>
+    <p:spTree>
+      <p:nvGrpSpPr>
+        <p:cNvPr id="1" name=""/>
+        <p:cNvGrpSpPr/>
+        <p:nvPr/>
+      </p:nvGrpSpPr>
+      <p:grpSpPr/>
+      <p:sp>
+        <p:nvSpPr>
+          <p:cNvPr id="2" name="Rectangle 1"/>
+          <p:cNvSpPr/>
+          <p:nvPr/>
+        </p:nvSpPr>
+        <p:spPr>
+          <a:xfrm>
+            <a:off x="0" y="0"/>
+            <a:ext cx="12191695" cy="384048"/>
+          </a:xfrm>
+          <a:prstGeom prst="rect">
+            <a:avLst/>
+          </a:prstGeom>
+          <a:solidFill>
+            <a:srgbClr val="0B2D5B"/>
+          </a:solidFill>
+          <a:ln>
+            <a:noFill/>
+          </a:ln>
+          <a:effectLst/>
+        </p:spPr>
+        <p:style>
+          <a:lnRef idx="1">
+            <a:schemeClr val="accent1"/>
+          </a:lnRef>
+          <a:fillRef idx="3">
+            <a:schemeClr val="accent1"/>
+          </a:fillRef>
+          <a:effectRef idx="2">
+            <a:schemeClr val="accent1"/>
+          </a:effectRef>
+          <a:fontRef idx="minor">
+            <a:schemeClr val="lt1"/>
+          </a:fontRef>
+        </p:style>
+        <p:txBody>
+          <a:bodyPr rtlCol="0" anchor="ctr"/>
+          <a:lstStyle/>
+          <a:p>
+            <a:pPr algn="ctr"/>
+          </a:p>
+        </p:txBody>
+      </p:sp>
+      <p:sp>
+        <p:nvSpPr>
+          <p:cNvPr id="3" name="TextBox 2"/>
+          <p:cNvSpPr txBox="1"/>
+          <p:nvPr/>
+        </p:nvSpPr>
+        <p:spPr>
+          <a:xfrm>
+            <a:off x="548640" y="100584"/>
+            <a:ext cx="10972800" cy="274320"/>
+          </a:xfrm>
+          <a:prstGeom prst="rect">
+            <a:avLst/>
+          </a:prstGeom>
+          <a:noFill/>
+        </p:spPr>
+        <p:txBody>
+          <a:bodyPr wrap="square" anchor="t" lIns="0" rIns="0" tIns="0" bIns="0">
+            <a:spAutoFit/>
+          </a:bodyPr>
+          <a:lstStyle/>
+          <a:p>
+            <a:pPr algn="l">
+              <a:spcAft>
+                <a:spcPts val="495"/>
+              </a:spcAft>
+            </a:pPr>
+            <a:r>
+              <a:rPr sz="1100" b="1" i="0">
+                <a:solidFill>
+                  <a:srgbClr val="FFFFFF"/>
+                </a:solidFill>
+                <a:latin typeface="Inter Tight"/>
+              </a:rPr>
+              <a:t>TEACHER PAGE  ·  skipped when you present  ·  Before you teach</a:t>
+            </a:r>
+          </a:p>
+        </p:txBody>
+      </p:sp>
+      <p:sp>
+        <p:nvSpPr>
+          <p:cNvPr id="4" name="TextBox 3"/>
+          <p:cNvSpPr txBox="1"/>
+          <p:nvPr/>
+        </p:nvSpPr>
+        <p:spPr>
+          <a:xfrm>
+            <a:off x="548640" y="685800"/>
+            <a:ext cx="10972800" cy="640080"/>
+          </a:xfrm>
+          <a:prstGeom prst="rect">
+            <a:avLst/>
+          </a:prstGeom>
+          <a:noFill/>
+        </p:spPr>
+        <p:txBody>
+          <a:bodyPr wrap="square" anchor="t" lIns="0" rIns="0" tIns="0" bIns="0">
+            <a:spAutoFit/>
+          </a:bodyPr>
+          <a:lstStyle/>
+          <a:p>
+            <a:pPr algn="l">
+              <a:spcAft>
+                <a:spcPts val="1350"/>
+              </a:spcAft>
+            </a:pPr>
+            <a:r>
+              <a:rPr sz="3000" b="1" i="0">
+                <a:solidFill>
+                  <a:srgbClr val="1C1B19"/>
+                </a:solidFill>
+                <a:latin typeface="Source Serif 4"/>
+              </a:rPr>
+              <a:t>Before you teach</a:t>
+            </a:r>
+          </a:p>
+        </p:txBody>
+      </p:sp>
+      <p:sp>
+        <p:nvSpPr>
+          <p:cNvPr id="5" name="TextBox 4"/>
+          <p:cNvSpPr txBox="1"/>
+          <p:nvPr/>
+        </p:nvSpPr>
+        <p:spPr>
+          <a:xfrm>
+            <a:off x="548640" y="1463040"/>
+            <a:ext cx="5394960" cy="4937760"/>
+          </a:xfrm>
+          <a:prstGeom prst="rect">
+            <a:avLst/>
+          </a:prstGeom>
+          <a:noFill/>
+        </p:spPr>
+        <p:txBody>
+          <a:bodyPr wrap="square" anchor="t" lIns="0" rIns="0" tIns="0" bIns="0">
+            <a:spAutoFit/>
+          </a:bodyPr>
+          <a:lstStyle/>
+          <a:p>
+            <a:pPr algn="l">
+              <a:spcAft>
+                <a:spcPts val="585"/>
+              </a:spcAft>
+            </a:pPr>
+            <a:r>
+              <a:rPr sz="1500" b="1" i="0">
+                <a:solidFill>
+                  <a:srgbClr val="1C1B19"/>
+                </a:solidFill>
+                <a:latin typeface="Source Serif 4"/>
+              </a:rPr>
+              <a:t>Assume all four groups are in the room.</a:t>
+            </a:r>
+          </a:p>
+          <a:p>
+            <a:pPr algn="l">
+              <a:spcAft>
+                <a:spcPts val="585"/>
+              </a:spcAft>
+            </a:pPr>
+            <a:r>
+              <a:rPr sz="1300" b="0" i="0">
+                <a:solidFill>
+                  <a:srgbClr val="1C1B19"/>
+                </a:solidFill>
+                <a:latin typeface="Source Serif 4"/>
+              </a:rPr>
+              <a:t>Students who have never tried it, students who vape now and then, students who are dependent, and students whose parent smokes or vapes. Talk to all four. Don't ask for a show of hands about anyone's use.</a:t>
+            </a:r>
+          </a:p>
+          <a:p>
+            <a:pPr algn="l">
+              <a:spcAft>
+                <a:spcPts val="585"/>
+              </a:spcAft>
+            </a:pPr>
+            <a:r>
+              <a:rPr sz="1300" b="0" i="0">
+                <a:solidFill>
+                  <a:srgbClr val="1C1B19"/>
+                </a:solidFill>
+                <a:latin typeface="Source Serif 4"/>
+              </a:rPr>
+              <a:t/>
+            </a:r>
+          </a:p>
+          <a:p>
+            <a:pPr algn="l">
+              <a:spcAft>
+                <a:spcPts val="585"/>
+              </a:spcAft>
+            </a:pPr>
+            <a:r>
+              <a:rPr sz="1500" b="1" i="0">
+                <a:solidFill>
+                  <a:srgbClr val="1C1B19"/>
+                </a:solidFill>
+                <a:latin typeface="Source Serif 4"/>
+              </a:rPr>
+              <a:t>Keep it factual and calm.</a:t>
+            </a:r>
+          </a:p>
+          <a:p>
+            <a:pPr algn="l">
+              <a:spcAft>
+                <a:spcPts val="585"/>
+              </a:spcAft>
+            </a:pPr>
+            <a:r>
+              <a:rPr sz="1300" b="0" i="0">
+                <a:solidFill>
+                  <a:srgbClr val="1C1B19"/>
+                </a:solidFill>
+                <a:latin typeface="Source Serif 4"/>
+              </a:rPr>
+              <a:t>Teens tune out exaggeration fast, and one overstated claim can cost you the rest of the period. The real facts are strong enough on their own.</a:t>
+            </a:r>
+          </a:p>
+          <a:p>
+            <a:pPr algn="l">
+              <a:spcAft>
+                <a:spcPts val="585"/>
+              </a:spcAft>
+            </a:pPr>
+            <a:r>
+              <a:rPr sz="1300" b="0" i="0">
+                <a:solidFill>
+                  <a:srgbClr val="1C1B19"/>
+                </a:solidFill>
+                <a:latin typeface="Source Serif 4"/>
+              </a:rPr>
+              <a:t/>
+            </a:r>
+          </a:p>
+          <a:p>
+            <a:pPr algn="l">
+              <a:spcAft>
+                <a:spcPts val="585"/>
+              </a:spcAft>
+            </a:pPr>
+            <a:r>
+              <a:rPr sz="1500" b="1" i="0">
+                <a:solidFill>
+                  <a:srgbClr val="1C1B19"/>
+                </a:solidFill>
+                <a:latin typeface="Source Serif 4"/>
+              </a:rPr>
+              <a:t>Know your policy before class.</a:t>
+            </a:r>
+          </a:p>
+          <a:p>
+            <a:pPr algn="l">
+              <a:spcAft>
+                <a:spcPts val="585"/>
+              </a:spcAft>
+            </a:pPr>
+            <a:r>
+              <a:rPr sz="1300" b="0" i="0">
+                <a:solidFill>
+                  <a:srgbClr val="1C1B19"/>
+                </a:solidFill>
+                <a:latin typeface="Source Serif 4"/>
+              </a:rPr>
+              <a:t>If a student says "I'm hooked," thank them and say you want to get them help, not get them in trouble. Know ahead of time what your school does next, and who you'll walk them to (the nurse or a counselor).</a:t>
+            </a:r>
+          </a:p>
+          <a:p>
+            <a:pPr algn="l">
+              <a:spcAft>
+                <a:spcPts val="585"/>
+              </a:spcAft>
+            </a:pPr>
+            <a:r>
+              <a:rPr sz="1300" b="0" i="0">
+                <a:solidFill>
+                  <a:srgbClr val="1C1B19"/>
+                </a:solidFill>
+                <a:latin typeface="Source Serif 4"/>
+              </a:rPr>
+              <a:t/>
+            </a:r>
+          </a:p>
+        </p:txBody>
+      </p:sp>
+      <p:sp>
+        <p:nvSpPr>
+          <p:cNvPr id="6" name="TextBox 5"/>
+          <p:cNvSpPr txBox="1"/>
+          <p:nvPr/>
+        </p:nvSpPr>
+        <p:spPr>
+          <a:xfrm>
+            <a:off x="6217920" y="1463040"/>
+            <a:ext cx="5394960" cy="4937760"/>
+          </a:xfrm>
+          <a:prstGeom prst="rect">
+            <a:avLst/>
+          </a:prstGeom>
+          <a:noFill/>
+        </p:spPr>
+        <p:txBody>
+          <a:bodyPr wrap="square" anchor="t" lIns="0" rIns="0" tIns="0" bIns="0">
+            <a:spAutoFit/>
+          </a:bodyPr>
+          <a:lstStyle/>
+          <a:p>
+            <a:pPr algn="l">
+              <a:spcAft>
+                <a:spcPts val="585"/>
+              </a:spcAft>
+            </a:pPr>
+            <a:r>
+              <a:rPr sz="1500" b="1" i="0">
+                <a:solidFill>
+                  <a:srgbClr val="1C1B19"/>
+                </a:solidFill>
+                <a:latin typeface="Source Serif 4"/>
+              </a:rPr>
+              <a:t>Watch the family angle.</a:t>
+            </a:r>
+          </a:p>
+          <a:p>
+            <a:pPr algn="l">
+              <a:spcAft>
+                <a:spcPts val="585"/>
+              </a:spcAft>
+            </a:pPr>
+            <a:r>
+              <a:rPr sz="1300" b="0" i="0">
+                <a:solidFill>
+                  <a:srgbClr val="1C1B19"/>
+                </a:solidFill>
+                <a:latin typeface="Source Serif 4"/>
+              </a:rPr>
+              <a:t>"Your dad's choice and your choice are different decisions" respects the family. Avoid anything that makes a parent sound foolish. Some students are worried about that parent.</a:t>
+            </a:r>
+          </a:p>
+          <a:p>
+            <a:pPr algn="l">
+              <a:spcAft>
+                <a:spcPts val="585"/>
+              </a:spcAft>
+            </a:pPr>
+            <a:r>
+              <a:rPr sz="1300" b="0" i="0">
+                <a:solidFill>
+                  <a:srgbClr val="1C1B19"/>
+                </a:solidFill>
+                <a:latin typeface="Source Serif 4"/>
+              </a:rPr>
+              <a:t/>
+            </a:r>
+          </a:p>
+          <a:p>
+            <a:pPr algn="l">
+              <a:spcAft>
+                <a:spcPts val="585"/>
+              </a:spcAft>
+            </a:pPr>
+            <a:r>
+              <a:rPr sz="1500" b="1" i="0">
+                <a:solidFill>
+                  <a:srgbClr val="1C1B19"/>
+                </a:solidFill>
+                <a:latin typeface="Source Serif 4"/>
+              </a:rPr>
+              <a:t>THC comes up. Let it.</a:t>
+            </a:r>
+          </a:p>
+          <a:p>
+            <a:pPr algn="l">
+              <a:spcAft>
+                <a:spcPts val="585"/>
+              </a:spcAft>
+            </a:pPr>
+            <a:r>
+              <a:rPr sz="1300" b="0" i="0">
+                <a:solidFill>
+                  <a:srgbClr val="1C1B19"/>
+                </a:solidFill>
+                <a:latin typeface="Source Serif 4"/>
+              </a:rPr>
+              <a:t>Students may ask about weed carts. The lung injury outbreak (EVALI) was mostly tied to THC carts from informal sellers. Stick to that fact, and offer the weed lesson if your school uses it.</a:t>
+            </a:r>
+          </a:p>
+          <a:p>
+            <a:pPr algn="l">
+              <a:spcAft>
+                <a:spcPts val="585"/>
+              </a:spcAft>
+            </a:pPr>
+            <a:r>
+              <a:rPr sz="1300" b="0" i="0">
+                <a:solidFill>
+                  <a:srgbClr val="1C1B19"/>
+                </a:solidFill>
+                <a:latin typeface="Source Serif 4"/>
+              </a:rPr>
+              <a:t/>
+            </a:r>
+          </a:p>
+          <a:p>
+            <a:pPr algn="l">
+              <a:spcAft>
+                <a:spcPts val="585"/>
+              </a:spcAft>
+            </a:pPr>
+            <a:r>
+              <a:rPr sz="1500" b="1" i="0">
+                <a:solidFill>
+                  <a:srgbClr val="1C1B19"/>
+                </a:solidFill>
+                <a:latin typeface="Source Serif 4"/>
+              </a:rPr>
+              <a:t>If someone gets sick after vaping.</a:t>
+            </a:r>
+          </a:p>
+          <a:p>
+            <a:pPr algn="l">
+              <a:spcAft>
+                <a:spcPts val="585"/>
+              </a:spcAft>
+            </a:pPr>
+            <a:r>
+              <a:rPr sz="1300" b="0" i="0">
+                <a:solidFill>
+                  <a:srgbClr val="1C1B19"/>
+                </a:solidFill>
+                <a:latin typeface="Source Serif 4"/>
+              </a:rPr>
+              <a:t>Trouble breathing, chest pain, confusion or passing out is a 911 call. Poison Control is 1-800-222-1222. Vape liquid swallowed by a small child is poisonous.</a:t>
+            </a:r>
+          </a:p>
+          <a:p>
+            <a:pPr algn="l">
+              <a:spcAft>
+                <a:spcPts val="585"/>
+              </a:spcAft>
+            </a:pPr>
+            <a:r>
+              <a:rPr sz="1300" b="0" i="0">
+                <a:solidFill>
+                  <a:srgbClr val="1C1B19"/>
+                </a:solidFill>
+                <a:latin typeface="Source Serif 4"/>
+              </a:rPr>
+              <a:t/>
+            </a:r>
+          </a:p>
+        </p:txBody>
+      </p:sp>
+    </p:spTree>
+  </p:cSld>
+  <p:clrMapOvr>
+    <a:masterClrMapping/>
+  </p:clrMapOvr>
+</p:sld>
+</file>
+
+<file path=ppt/slides/slide13.xml><?xml version="1.0" encoding="utf-8"?>
+<p:sld xmlns:a="http://schemas.openxmlformats.org/drawingml/2006/main" xmlns:p="http://schemas.openxmlformats.org/presentationml/2006/main" xmlns:r="http://schemas.openxmlformats.org/officeDocument/2006/relationships" show="0">
+  <p:cSld>
+    <p:bg>
+      <p:bgPr>
+        <a:solidFill>
+          <a:srgbClr val="EEEBE4"/>
+        </a:solidFill>
+        <a:effectLst/>
+      </p:bgPr>
+    </p:bg>
+    <p:spTree>
+      <p:nvGrpSpPr>
+        <p:cNvPr id="1" name=""/>
+        <p:cNvGrpSpPr/>
+        <p:nvPr/>
+      </p:nvGrpSpPr>
+      <p:grpSpPr/>
+      <p:sp>
+        <p:nvSpPr>
+          <p:cNvPr id="2" name="Rectangle 1"/>
+          <p:cNvSpPr/>
+          <p:nvPr/>
+        </p:nvSpPr>
+        <p:spPr>
+          <a:xfrm>
+            <a:off x="0" y="0"/>
+            <a:ext cx="12191695" cy="384048"/>
+          </a:xfrm>
+          <a:prstGeom prst="rect">
+            <a:avLst/>
+          </a:prstGeom>
+          <a:solidFill>
+            <a:srgbClr val="0B2D5B"/>
+          </a:solidFill>
+          <a:ln>
+            <a:noFill/>
+          </a:ln>
+          <a:effectLst/>
+        </p:spPr>
+        <p:style>
+          <a:lnRef idx="1">
+            <a:schemeClr val="accent1"/>
+          </a:lnRef>
+          <a:fillRef idx="3">
+            <a:schemeClr val="accent1"/>
+          </a:fillRef>
+          <a:effectRef idx="2">
+            <a:schemeClr val="accent1"/>
+          </a:effectRef>
+          <a:fontRef idx="minor">
+            <a:schemeClr val="lt1"/>
+          </a:fontRef>
+        </p:style>
+        <p:txBody>
+          <a:bodyPr rtlCol="0" anchor="ctr"/>
+          <a:lstStyle/>
+          <a:p>
+            <a:pPr algn="ctr"/>
+          </a:p>
+        </p:txBody>
+      </p:sp>
+      <p:sp>
+        <p:nvSpPr>
+          <p:cNvPr id="3" name="TextBox 2"/>
+          <p:cNvSpPr txBox="1"/>
+          <p:nvPr/>
+        </p:nvSpPr>
+        <p:spPr>
+          <a:xfrm>
+            <a:off x="548640" y="100584"/>
+            <a:ext cx="10972800" cy="274320"/>
+          </a:xfrm>
+          <a:prstGeom prst="rect">
+            <a:avLst/>
+          </a:prstGeom>
+          <a:noFill/>
+        </p:spPr>
+        <p:txBody>
+          <a:bodyPr wrap="square" anchor="t" lIns="0" rIns="0" tIns="0" bIns="0">
+            <a:spAutoFit/>
+          </a:bodyPr>
+          <a:lstStyle/>
+          <a:p>
+            <a:pPr algn="l">
+              <a:spcAft>
+                <a:spcPts val="495"/>
+              </a:spcAft>
+            </a:pPr>
+            <a:r>
+              <a:rPr sz="1100" b="1" i="0">
+                <a:solidFill>
+                  <a:srgbClr val="FFFFFF"/>
+                </a:solidFill>
+                <a:latin typeface="Inter Tight"/>
+              </a:rPr>
+              <a:t>TEACHER PAGE  ·  skipped when you present  ·  Every student in the room</a:t>
+            </a:r>
+          </a:p>
+        </p:txBody>
+      </p:sp>
+      <p:sp>
+        <p:nvSpPr>
+          <p:cNvPr id="4" name="TextBox 3"/>
+          <p:cNvSpPr txBox="1"/>
+          <p:nvPr/>
+        </p:nvSpPr>
+        <p:spPr>
+          <a:xfrm>
+            <a:off x="548640" y="685800"/>
+            <a:ext cx="10972800" cy="640080"/>
+          </a:xfrm>
+          <a:prstGeom prst="rect">
+            <a:avLst/>
+          </a:prstGeom>
+          <a:noFill/>
+        </p:spPr>
+        <p:txBody>
+          <a:bodyPr wrap="square" anchor="t" lIns="0" rIns="0" tIns="0" bIns="0">
+            <a:spAutoFit/>
+          </a:bodyPr>
+          <a:lstStyle/>
+          <a:p>
+            <a:pPr algn="l">
+              <a:spcAft>
+                <a:spcPts val="1350"/>
+              </a:spcAft>
+            </a:pPr>
+            <a:r>
+              <a:rPr sz="3000" b="1" i="0">
+                <a:solidFill>
+                  <a:srgbClr val="1C1B19"/>
+                </a:solidFill>
+                <a:latin typeface="Source Serif 4"/>
+              </a:rPr>
+              <a:t>Every student in the room</a:t>
+            </a:r>
+          </a:p>
+        </p:txBody>
+      </p:sp>
+      <p:sp>
+        <p:nvSpPr>
+          <p:cNvPr id="5" name="TextBox 4"/>
+          <p:cNvSpPr txBox="1"/>
+          <p:nvPr/>
+        </p:nvSpPr>
+        <p:spPr>
+          <a:xfrm>
+            <a:off x="548640" y="1325880"/>
+            <a:ext cx="10972800" cy="365760"/>
+          </a:xfrm>
+          <a:prstGeom prst="rect">
+            <a:avLst/>
+          </a:prstGeom>
+          <a:noFill/>
+        </p:spPr>
+        <p:txBody>
+          <a:bodyPr wrap="square" anchor="t" lIns="0" rIns="0" tIns="0" bIns="0">
+            <a:spAutoFit/>
+          </a:bodyPr>
+          <a:lstStyle/>
+          <a:p>
+            <a:pPr algn="l">
+              <a:spcAft>
+                <a:spcPts val="630"/>
+              </a:spcAft>
+            </a:pPr>
+            <a:r>
+              <a:rPr sz="1400" b="0" i="0">
+                <a:solidFill>
+                  <a:srgbClr val="5D5A54"/>
+                </a:solidFill>
+                <a:latin typeface="Inter Tight"/>
+              </a:rPr>
+              <a:t>Culture, family, identity, ability and money: what to keep in mind for this topic.</a:t>
+            </a:r>
+          </a:p>
+        </p:txBody>
+      </p:sp>
+      <p:sp>
+        <p:nvSpPr>
+          <p:cNvPr id="6" name="TextBox 5"/>
+          <p:cNvSpPr txBox="1"/>
+          <p:nvPr/>
+        </p:nvSpPr>
+        <p:spPr>
+          <a:xfrm>
+            <a:off x="548640" y="1828800"/>
+            <a:ext cx="5394960" cy="4572000"/>
+          </a:xfrm>
+          <a:prstGeom prst="rect">
+            <a:avLst/>
+          </a:prstGeom>
+          <a:noFill/>
+        </p:spPr>
+        <p:txBody>
+          <a:bodyPr wrap="square" anchor="t" lIns="0" rIns="0" tIns="0" bIns="0">
+            <a:spAutoFit/>
+          </a:bodyPr>
+          <a:lstStyle/>
+          <a:p>
+            <a:pPr algn="l">
+              <a:spcAft>
+                <a:spcPts val="585"/>
+              </a:spcAft>
+            </a:pPr>
+            <a:r>
+              <a:rPr sz="1500" b="1" i="0">
+                <a:solidFill>
+                  <a:srgbClr val="1C1B19"/>
+                </a:solidFill>
+                <a:latin typeface="Source Serif 4"/>
+              </a:rPr>
+              <a:t>Families draw different lines.</a:t>
+            </a:r>
+          </a:p>
+          <a:p>
+            <a:pPr algn="l">
+              <a:spcAft>
+                <a:spcPts val="585"/>
+              </a:spcAft>
+            </a:pPr>
+            <a:r>
+              <a:rPr sz="1300" b="0" i="0">
+                <a:solidFill>
+                  <a:srgbClr val="1C1B19"/>
+                </a:solidFill>
+                <a:latin typeface="Source Serif 4"/>
+              </a:rPr>
+              <a:t>In some homes smoking or vaping is an ordinary adult habit, sometimes tied to culture or community. In others any nicotine is off limits. Teach it as health information, never as a judgment of anyone's family.</a:t>
+            </a:r>
+          </a:p>
+          <a:p>
+            <a:pPr algn="l">
+              <a:spcAft>
+                <a:spcPts val="585"/>
+              </a:spcAft>
+            </a:pPr>
+            <a:r>
+              <a:rPr sz="1300" b="0" i="0">
+                <a:solidFill>
+                  <a:srgbClr val="1C1B19"/>
+                </a:solidFill>
+                <a:latin typeface="Source Serif 4"/>
+              </a:rPr>
+              <a:t/>
+            </a:r>
+          </a:p>
+          <a:p>
+            <a:pPr algn="l">
+              <a:spcAft>
+                <a:spcPts val="585"/>
+              </a:spcAft>
+            </a:pPr>
+            <a:r>
+              <a:rPr sz="1500" b="1" i="0">
+                <a:solidFill>
+                  <a:srgbClr val="1C1B19"/>
+                </a:solidFill>
+                <a:latin typeface="Source Serif 4"/>
+              </a:rPr>
+              <a:t>Marketing has aimed at some groups on purpose.</a:t>
+            </a:r>
+          </a:p>
+          <a:p>
+            <a:pPr algn="l">
+              <a:spcAft>
+                <a:spcPts val="585"/>
+              </a:spcAft>
+            </a:pPr>
+            <a:r>
+              <a:rPr sz="1300" b="0" i="0">
+                <a:solidFill>
+                  <a:srgbClr val="1C1B19"/>
+                </a:solidFill>
+                <a:latin typeface="Source Serif 4"/>
+              </a:rPr>
+              <a:t>Tobacco companies have long marketed menthol heavily in Black communities, and have run campaigns aimed at LGBTQ+ young people. Naming that helps students see the target, not blame each other.</a:t>
+            </a:r>
+          </a:p>
+          <a:p>
+            <a:pPr algn="l">
+              <a:spcAft>
+                <a:spcPts val="585"/>
+              </a:spcAft>
+            </a:pPr>
+            <a:r>
+              <a:rPr sz="1300" b="0" i="0">
+                <a:solidFill>
+                  <a:srgbClr val="1C1B19"/>
+                </a:solidFill>
+                <a:latin typeface="Source Serif 4"/>
+              </a:rPr>
+              <a:t/>
+            </a:r>
+          </a:p>
+          <a:p>
+            <a:pPr algn="l">
+              <a:spcAft>
+                <a:spcPts val="585"/>
+              </a:spcAft>
+            </a:pPr>
+            <a:r>
+              <a:rPr sz="1500" b="1" i="0">
+                <a:solidFill>
+                  <a:srgbClr val="1C1B19"/>
+                </a:solidFill>
+                <a:latin typeface="Source Serif 4"/>
+              </a:rPr>
+              <a:t>Disclosure feels riskier for some students.</a:t>
+            </a:r>
+          </a:p>
+          <a:p>
+            <a:pPr algn="l">
+              <a:spcAft>
+                <a:spcPts val="585"/>
+              </a:spcAft>
+            </a:pPr>
+            <a:r>
+              <a:rPr sz="1300" b="0" i="0">
+                <a:solidFill>
+                  <a:srgbClr val="1C1B19"/>
+                </a:solidFill>
+                <a:latin typeface="Source Serif 4"/>
+              </a:rPr>
+              <a:t>Students from families or communities with more experience of discipline or police may fear what happens if they say "I'm hooked." Say plainly what happens next at your school.</a:t>
+            </a:r>
+          </a:p>
+          <a:p>
+            <a:pPr algn="l">
+              <a:spcAft>
+                <a:spcPts val="585"/>
+              </a:spcAft>
+            </a:pPr>
+            <a:r>
+              <a:rPr sz="1300" b="0" i="0">
+                <a:solidFill>
+                  <a:srgbClr val="1C1B19"/>
+                </a:solidFill>
+                <a:latin typeface="Source Serif 4"/>
+              </a:rPr>
+              <a:t/>
+            </a:r>
+          </a:p>
+        </p:txBody>
+      </p:sp>
+      <p:sp>
+        <p:nvSpPr>
+          <p:cNvPr id="7" name="TextBox 6"/>
+          <p:cNvSpPr txBox="1"/>
+          <p:nvPr/>
+        </p:nvSpPr>
+        <p:spPr>
+          <a:xfrm>
+            <a:off x="6217920" y="1828800"/>
+            <a:ext cx="5394960" cy="4572000"/>
+          </a:xfrm>
+          <a:prstGeom prst="rect">
+            <a:avLst/>
+          </a:prstGeom>
+          <a:noFill/>
+        </p:spPr>
+        <p:txBody>
+          <a:bodyPr wrap="square" anchor="t" lIns="0" rIns="0" tIns="0" bIns="0">
+            <a:spAutoFit/>
+          </a:bodyPr>
+          <a:lstStyle/>
+          <a:p>
+            <a:pPr algn="l">
+              <a:spcAft>
+                <a:spcPts val="585"/>
+              </a:spcAft>
+            </a:pPr>
+            <a:r>
+              <a:rPr sz="1500" b="1" i="0">
+                <a:solidFill>
+                  <a:srgbClr val="1C1B19"/>
+                </a:solidFill>
+                <a:latin typeface="Source Serif 4"/>
+              </a:rPr>
+              <a:t>Some students say it helps them focus.</a:t>
+            </a:r>
+          </a:p>
+          <a:p>
+            <a:pPr algn="l">
+              <a:spcAft>
+                <a:spcPts val="585"/>
+              </a:spcAft>
+            </a:pPr>
+            <a:r>
+              <a:rPr sz="1300" b="0" i="0">
+                <a:solidFill>
+                  <a:srgbClr val="1C1B19"/>
+                </a:solidFill>
+                <a:latin typeface="Source Serif 4"/>
+              </a:rPr>
+              <a:t>Students with ADHD or anxiety sometimes describe vaping as self-medication. Take that seriously and connect them with the nurse or a counselor rather than debating it in front of the class.</a:t>
+            </a:r>
+          </a:p>
+          <a:p>
+            <a:pPr algn="l">
+              <a:spcAft>
+                <a:spcPts val="585"/>
+              </a:spcAft>
+            </a:pPr>
+            <a:r>
+              <a:rPr sz="1300" b="0" i="0">
+                <a:solidFill>
+                  <a:srgbClr val="1C1B19"/>
+                </a:solidFill>
+                <a:latin typeface="Source Serif 4"/>
+              </a:rPr>
+              <a:t/>
+            </a:r>
+          </a:p>
+          <a:p>
+            <a:pPr algn="l">
+              <a:spcAft>
+                <a:spcPts val="585"/>
+              </a:spcAft>
+            </a:pPr>
+            <a:r>
+              <a:rPr sz="1500" b="1" i="0">
+                <a:solidFill>
+                  <a:srgbClr val="1C1B19"/>
+                </a:solidFill>
+                <a:latin typeface="Source Serif 4"/>
+              </a:rPr>
+              <a:t>Cost and language.</a:t>
+            </a:r>
+          </a:p>
+          <a:p>
+            <a:pPr algn="l">
+              <a:spcAft>
+                <a:spcPts val="585"/>
+              </a:spcAft>
+            </a:pPr>
+            <a:r>
+              <a:rPr sz="1300" b="0" i="0">
+                <a:solidFill>
+                  <a:srgbClr val="1C1B19"/>
+                </a:solidFill>
+                <a:latin typeface="Source Serif 4"/>
+              </a:rPr>
+              <a:t>Every support in this lesson is free (the text program, the nurse, a counselor). Some students translate health information for their family; the take-home sheet is written in plain language they can share.</a:t>
+            </a:r>
+          </a:p>
+          <a:p>
+            <a:pPr algn="l">
+              <a:spcAft>
+                <a:spcPts val="585"/>
+              </a:spcAft>
+            </a:pPr>
+            <a:r>
+              <a:rPr sz="1300" b="0" i="0">
+                <a:solidFill>
+                  <a:srgbClr val="1C1B19"/>
+                </a:solidFill>
+                <a:latin typeface="Source Serif 4"/>
+              </a:rPr>
+              <a:t/>
+            </a:r>
+          </a:p>
+          <a:p>
+            <a:pPr algn="l">
+              <a:spcAft>
+                <a:spcPts val="585"/>
+              </a:spcAft>
+            </a:pPr>
+            <a:r>
+              <a:rPr sz="1500" b="1" i="0">
+                <a:solidFill>
+                  <a:srgbClr val="1C1B19"/>
+                </a:solidFill>
+                <a:latin typeface="Source Serif 4"/>
+              </a:rPr>
+              <a:t>Who "family" is.</a:t>
+            </a:r>
+          </a:p>
+          <a:p>
+            <a:pPr algn="l">
+              <a:spcAft>
+                <a:spcPts val="585"/>
+              </a:spcAft>
+            </a:pPr>
+            <a:r>
+              <a:rPr sz="1300" b="0" i="0">
+                <a:solidFill>
+                  <a:srgbClr val="1C1B19"/>
+                </a:solidFill>
+                <a:latin typeface="Source Serif 4"/>
+              </a:rPr>
+              <a:t>The parent scenario works with any adult at home: a grandparent, an aunt, a foster parent. Swap in whoever fits your students.</a:t>
+            </a:r>
+          </a:p>
+          <a:p>
+            <a:pPr algn="l">
+              <a:spcAft>
+                <a:spcPts val="585"/>
+              </a:spcAft>
+            </a:pPr>
+            <a:r>
+              <a:rPr sz="1300" b="0" i="0">
+                <a:solidFill>
+                  <a:srgbClr val="1C1B19"/>
+                </a:solidFill>
+                <a:latin typeface="Source Serif 4"/>
+              </a:rPr>
+              <a:t/>
+            </a:r>
+          </a:p>
+        </p:txBody>
+      </p:sp>
+    </p:spTree>
+  </p:cSld>
+  <p:clrMapOvr>
+    <a:masterClrMapping/>
+  </p:clrMapOvr>
+</p:sld>
+</file>
+
+<file path=ppt/slides/slide14.xml><?xml version="1.0" encoding="utf-8"?>
+<p:sld xmlns:a="http://schemas.openxmlformats.org/drawingml/2006/main" xmlns:p="http://schemas.openxmlformats.org/presentationml/2006/main" xmlns:r="http://schemas.openxmlformats.org/officeDocument/2006/relationships" show="0">
+  <p:cSld>
+    <p:bg>
+      <p:bgPr>
+        <a:solidFill>
+          <a:srgbClr val="EEEBE4"/>
+        </a:solidFill>
+        <a:effectLst/>
+      </p:bgPr>
+    </p:bg>
+    <p:spTree>
+      <p:nvGrpSpPr>
+        <p:cNvPr id="1" name=""/>
+        <p:cNvGrpSpPr/>
+        <p:nvPr/>
+      </p:nvGrpSpPr>
+      <p:grpSpPr/>
+      <p:sp>
+        <p:nvSpPr>
+          <p:cNvPr id="2" name="Rectangle 1"/>
+          <p:cNvSpPr/>
+          <p:nvPr/>
+        </p:nvSpPr>
+        <p:spPr>
+          <a:xfrm>
+            <a:off x="0" y="0"/>
+            <a:ext cx="12191695" cy="384048"/>
+          </a:xfrm>
+          <a:prstGeom prst="rect">
+            <a:avLst/>
+          </a:prstGeom>
+          <a:solidFill>
+            <a:srgbClr val="0B2D5B"/>
+          </a:solidFill>
+          <a:ln>
+            <a:noFill/>
+          </a:ln>
+          <a:effectLst/>
+        </p:spPr>
+        <p:style>
+          <a:lnRef idx="1">
+            <a:schemeClr val="accent1"/>
+          </a:lnRef>
+          <a:fillRef idx="3">
+            <a:schemeClr val="accent1"/>
+          </a:fillRef>
+          <a:effectRef idx="2">
+            <a:schemeClr val="accent1"/>
+          </a:effectRef>
+          <a:fontRef idx="minor">
+            <a:schemeClr val="lt1"/>
+          </a:fontRef>
+        </p:style>
+        <p:txBody>
+          <a:bodyPr rtlCol="0" anchor="ctr"/>
+          <a:lstStyle/>
+          <a:p>
+            <a:pPr algn="ctr"/>
+          </a:p>
+        </p:txBody>
+      </p:sp>
+      <p:sp>
+        <p:nvSpPr>
+          <p:cNvPr id="3" name="TextBox 2"/>
+          <p:cNvSpPr txBox="1"/>
+          <p:nvPr/>
+        </p:nvSpPr>
+        <p:spPr>
+          <a:xfrm>
+            <a:off x="548640" y="100584"/>
+            <a:ext cx="10972800" cy="274320"/>
+          </a:xfrm>
+          <a:prstGeom prst="rect">
+            <a:avLst/>
+          </a:prstGeom>
+          <a:noFill/>
+        </p:spPr>
+        <p:txBody>
+          <a:bodyPr wrap="square" anchor="t" lIns="0" rIns="0" tIns="0" bIns="0">
+            <a:spAutoFit/>
+          </a:bodyPr>
+          <a:lstStyle/>
+          <a:p>
+            <a:pPr algn="l">
+              <a:spcAft>
+                <a:spcPts val="495"/>
+              </a:spcAft>
+            </a:pPr>
+            <a:r>
+              <a:rPr sz="1100" b="1" i="0">
+                <a:solidFill>
+                  <a:srgbClr val="FFFFFF"/>
+                </a:solidFill>
+                <a:latin typeface="Inter Tight"/>
+              </a:rPr>
+              <a:t>TEACHER PAGE  ·  skipped when you present  ·  Background</a:t>
+            </a:r>
+          </a:p>
+        </p:txBody>
+      </p:sp>
+      <p:sp>
+        <p:nvSpPr>
+          <p:cNvPr id="4" name="TextBox 3"/>
+          <p:cNvSpPr txBox="1"/>
+          <p:nvPr/>
+        </p:nvSpPr>
+        <p:spPr>
+          <a:xfrm>
+            <a:off x="548640" y="685800"/>
+            <a:ext cx="10972800" cy="640080"/>
+          </a:xfrm>
+          <a:prstGeom prst="rect">
+            <a:avLst/>
+          </a:prstGeom>
+          <a:noFill/>
+        </p:spPr>
+        <p:txBody>
+          <a:bodyPr wrap="square" anchor="t" lIns="0" rIns="0" tIns="0" bIns="0">
+            <a:spAutoFit/>
+          </a:bodyPr>
+          <a:lstStyle/>
+          <a:p>
+            <a:pPr algn="l">
+              <a:spcAft>
+                <a:spcPts val="1350"/>
+              </a:spcAft>
+            </a:pPr>
+            <a:r>
+              <a:rPr sz="3000" b="1" i="0">
+                <a:solidFill>
+                  <a:srgbClr val="1C1B19"/>
+                </a:solidFill>
+                <a:latin typeface="Source Serif 4"/>
+              </a:rPr>
+              <a:t>What the research says</a:t>
+            </a:r>
+          </a:p>
+        </p:txBody>
+      </p:sp>
+      <p:sp>
+        <p:nvSpPr>
+          <p:cNvPr id="5" name="TextBox 4"/>
+          <p:cNvSpPr txBox="1"/>
+          <p:nvPr/>
+        </p:nvSpPr>
+        <p:spPr>
+          <a:xfrm>
+            <a:off x="548640" y="1463040"/>
+            <a:ext cx="5394960" cy="4937760"/>
+          </a:xfrm>
+          <a:prstGeom prst="rect">
+            <a:avLst/>
+          </a:prstGeom>
+          <a:noFill/>
+        </p:spPr>
+        <p:txBody>
+          <a:bodyPr wrap="square" anchor="t" lIns="0" rIns="0" tIns="0" bIns="0">
+            <a:spAutoFit/>
+          </a:bodyPr>
+          <a:lstStyle/>
+          <a:p>
+            <a:pPr algn="l">
+              <a:spcAft>
+                <a:spcPts val="585"/>
+              </a:spcAft>
+            </a:pPr>
+            <a:r>
+              <a:rPr sz="1300" b="0" i="0">
+                <a:solidFill>
+                  <a:srgbClr val="1C1B19"/>
+                </a:solidFill>
+                <a:latin typeface="Source Serif 4"/>
+              </a:rPr>
+              <a:t>In 2024, 7.8% of U.S. high school students had vaped in the past 30 days, the lowest in a decade. Nicotine pouches were the second most used product.</a:t>
+            </a:r>
+          </a:p>
+          <a:p>
+            <a:pPr algn="l">
+              <a:spcAft>
+                <a:spcPts val="585"/>
+              </a:spcAft>
+            </a:pPr>
+            <a:r>
+              <a:rPr sz="1050" b="0" i="0">
+                <a:solidFill>
+                  <a:srgbClr val="5D5A54"/>
+                </a:solidFill>
+                <a:latin typeface="Inter Tight"/>
+              </a:rPr>
+              <a:t>National Youth Tobacco Survey, 2024 (Jamal et al., MMWR)</a:t>
+            </a:r>
+          </a:p>
+          <a:p>
+            <a:pPr algn="l">
+              <a:spcAft>
+                <a:spcPts val="585"/>
+              </a:spcAft>
+            </a:pPr>
+            <a:r>
+              <a:rPr sz="1300" b="0" i="0">
+                <a:solidFill>
+                  <a:srgbClr val="1C1B19"/>
+                </a:solidFill>
+                <a:latin typeface="Source Serif 4"/>
+              </a:rPr>
+              <a:t>Nicotine makes dopamine neurons fire in bursts within seconds. With regular use the brain adds nicotine receptors and needs nicotine to feel normal. Attention and impulse-control circuits are still maturing into the mid-20s.</a:t>
+            </a:r>
+          </a:p>
+          <a:p>
+            <a:pPr algn="l">
+              <a:spcAft>
+                <a:spcPts val="585"/>
+              </a:spcAft>
+            </a:pPr>
+            <a:r>
+              <a:rPr sz="1050" b="0" i="0">
+                <a:solidFill>
+                  <a:srgbClr val="5D5A54"/>
+                </a:solidFill>
+                <a:latin typeface="Inter Tight"/>
+              </a:rPr>
+              <a:t>Surgeon General's report on youth e-cigarette use, 2016</a:t>
+            </a:r>
+          </a:p>
+          <a:p>
+            <a:pPr algn="l">
+              <a:spcAft>
+                <a:spcPts val="585"/>
+              </a:spcAft>
+            </a:pPr>
+            <a:r>
+              <a:rPr sz="1300" b="0" i="0">
+                <a:solidFill>
+                  <a:srgbClr val="1C1B19"/>
+                </a:solidFill>
+                <a:latin typeface="Source Serif 4"/>
+              </a:rPr>
+              <a:t>Nicotine doesn't lower stress overall. Dependent users feel tense as it wears off, and the next dose brings them back to where non-users already are. People who quit report less stress over time.</a:t>
+            </a:r>
+          </a:p>
+          <a:p>
+            <a:pPr algn="l">
+              <a:spcAft>
+                <a:spcPts val="585"/>
+              </a:spcAft>
+            </a:pPr>
+            <a:r>
+              <a:rPr sz="1050" b="0" i="0">
+                <a:solidFill>
+                  <a:srgbClr val="5D5A54"/>
+                </a:solidFill>
+                <a:latin typeface="Inter Tight"/>
+              </a:rPr>
+              <a:t>Parrott, American Psychologist, 1999</a:t>
+            </a:r>
+          </a:p>
+          <a:p>
+            <a:pPr algn="l">
+              <a:spcAft>
+                <a:spcPts val="585"/>
+              </a:spcAft>
+            </a:pPr>
+            <a:r>
+              <a:rPr sz="1300" b="0" i="0">
+                <a:solidFill>
+                  <a:srgbClr val="1C1B19"/>
+                </a:solidFill>
+                <a:latin typeface="Source Serif 4"/>
+              </a:rPr>
+              <a:t>In a study of 681 seventh graders in central Massachusetts, 22% of those who smoked occasionally reported a dependence symptom within four weeks of starting monthly use.</a:t>
+            </a:r>
+          </a:p>
+          <a:p>
+            <a:pPr algn="l">
+              <a:spcAft>
+                <a:spcPts val="585"/>
+              </a:spcAft>
+            </a:pPr>
+            <a:r>
+              <a:rPr sz="1050" b="0" i="0">
+                <a:solidFill>
+                  <a:srgbClr val="5D5A54"/>
+                </a:solidFill>
+                <a:latin typeface="Inter Tight"/>
+              </a:rPr>
+              <a:t>DiFranza et al., Tobacco Control, 2000</a:t>
+            </a:r>
+          </a:p>
+        </p:txBody>
+      </p:sp>
+      <p:sp>
+        <p:nvSpPr>
+          <p:cNvPr id="6" name="TextBox 5"/>
+          <p:cNvSpPr txBox="1"/>
+          <p:nvPr/>
+        </p:nvSpPr>
+        <p:spPr>
+          <a:xfrm>
+            <a:off x="6217920" y="1463040"/>
+            <a:ext cx="5394960" cy="4937760"/>
+          </a:xfrm>
+          <a:prstGeom prst="rect">
+            <a:avLst/>
+          </a:prstGeom>
+          <a:noFill/>
+        </p:spPr>
+        <p:txBody>
+          <a:bodyPr wrap="square" anchor="t" lIns="0" rIns="0" tIns="0" bIns="0">
+            <a:spAutoFit/>
+          </a:bodyPr>
+          <a:lstStyle/>
+          <a:p>
+            <a:pPr algn="l">
+              <a:spcAft>
+                <a:spcPts val="585"/>
+              </a:spcAft>
+            </a:pPr>
+            <a:r>
+              <a:rPr sz="1300" b="0" i="0">
+                <a:solidFill>
+                  <a:srgbClr val="1C1B19"/>
+                </a:solidFill>
+                <a:latin typeface="Source Serif 4"/>
+              </a:rPr>
+              <a:t>Substantial evidence that e-cigarette use raises the risk that young people try cigarettes. Conclusive evidence that vape aerosol has fewer toxicants than cigarette smoke, which matters for an adult smoker who switches completely.</a:t>
+            </a:r>
+          </a:p>
+          <a:p>
+            <a:pPr algn="l">
+              <a:spcAft>
+                <a:spcPts val="585"/>
+              </a:spcAft>
+            </a:pPr>
+            <a:r>
+              <a:rPr sz="1050" b="0" i="0">
+                <a:solidFill>
+                  <a:srgbClr val="5D5A54"/>
+                </a:solidFill>
+                <a:latin typeface="Inter Tight"/>
+              </a:rPr>
+              <a:t>National Academies of Sciences, 2018</a:t>
+            </a:r>
+          </a:p>
+          <a:p>
+            <a:pPr algn="l">
+              <a:spcAft>
+                <a:spcPts val="585"/>
+              </a:spcAft>
+            </a:pPr>
+            <a:r>
+              <a:rPr sz="1300" b="0" i="0">
+                <a:solidFill>
+                  <a:srgbClr val="1C1B19"/>
+                </a:solidFill>
+                <a:latin typeface="Source Serif 4"/>
+              </a:rPr>
+              <a:t>2,807 hospitalizations and 68 deaths from EVALI in 2019 and 2020, mostly tied to vitamin E acetate in THC carts.</a:t>
+            </a:r>
+          </a:p>
+          <a:p>
+            <a:pPr algn="l">
+              <a:spcAft>
+                <a:spcPts val="585"/>
+              </a:spcAft>
+            </a:pPr>
+            <a:r>
+              <a:rPr sz="1050" b="0" i="0">
+                <a:solidFill>
+                  <a:srgbClr val="5D5A54"/>
+                </a:solidFill>
+                <a:latin typeface="Inter Tight"/>
+              </a:rPr>
+              <a:t>CDC, final update, February 2020</a:t>
+            </a:r>
+          </a:p>
+          <a:p>
+            <a:pPr algn="l">
+              <a:spcAft>
+                <a:spcPts val="585"/>
+              </a:spcAft>
+            </a:pPr>
+            <a:r>
+              <a:rPr sz="1300" b="0" i="0">
+                <a:solidFill>
+                  <a:srgbClr val="1C1B19"/>
+                </a:solidFill>
+                <a:latin typeface="Source Serif 4"/>
+              </a:rPr>
+              <a:t>In a trial with 1,503 teens who vaped, 37.8% using the This is Quitting text program had stopped seven months later, compared with 28.0% without it.</a:t>
+            </a:r>
+          </a:p>
+          <a:p>
+            <a:pPr algn="l">
+              <a:spcAft>
+                <a:spcPts val="585"/>
+              </a:spcAft>
+            </a:pPr>
+            <a:r>
+              <a:rPr sz="1050" b="0" i="0">
+                <a:solidFill>
+                  <a:srgbClr val="5D5A54"/>
+                </a:solidFill>
+                <a:latin typeface="Inter Tight"/>
+              </a:rPr>
+              <a:t>Graham et al., JAMA, 2024</a:t>
+            </a:r>
+          </a:p>
+          <a:p>
+            <a:pPr algn="l">
+              <a:spcAft>
+                <a:spcPts val="585"/>
+              </a:spcAft>
+            </a:pPr>
+            <a:r>
+              <a:rPr sz="1300" b="0" i="0">
+                <a:solidFill>
+                  <a:srgbClr val="1C1B19"/>
+                </a:solidFill>
+                <a:latin typeface="Source Serif 4"/>
+              </a:rPr>
+              <a:t>Massachusetts raised the buying age to 21 in 2018 and banned flavored vapes in 2019. Flavored disposables still arrive through illegal imports, often with no reliable label.</a:t>
+            </a:r>
+          </a:p>
+          <a:p>
+            <a:pPr algn="l">
+              <a:spcAft>
+                <a:spcPts val="585"/>
+              </a:spcAft>
+            </a:pPr>
+            <a:r>
+              <a:rPr sz="1050" b="0" i="0">
+                <a:solidFill>
+                  <a:srgbClr val="5D5A54"/>
+                </a:solidFill>
+                <a:latin typeface="Inter Tight"/>
+              </a:rPr>
+              <a:t>Massachusetts law</a:t>
+            </a:r>
+          </a:p>
+        </p:txBody>
+      </p:sp>
+    </p:spTree>
+  </p:cSld>
+  <p:clrMapOvr>
+    <a:masterClrMapping/>
+  </p:clrMapOvr>
+</p:sld>
+</file>
+
+<file path=ppt/slides/slide2.xml><?xml version="1.0" encoding="utf-8"?>
+<p:sld xmlns:a="http://schemas.openxmlformats.org/drawingml/2006/main" xmlns:p="http://schemas.openxmlformats.org/presentationml/2006/main" xmlns:r="http://schemas.openxmlformats.org/officeDocument/2006/relationships">
+  <p:cSld>
+    <p:bg>
+      <p:bgPr>
+        <a:solidFill>
+          <a:srgbClr val="0B2D5B"/>
+        </a:solidFill>
+        <a:effectLst/>
+      </p:bgPr>
+    </p:bg>
+    <p:spTree>
+      <p:nvGrpSpPr>
+        <p:cNvPr id="1" name=""/>
+        <p:cNvGrpSpPr/>
+        <p:nvPr/>
+      </p:nvGrpSpPr>
+      <p:grpSpPr/>
+      <p:sp>
+        <p:nvSpPr>
+          <p:cNvPr id="2" name="Rectangle 1"/>
+          <p:cNvSpPr/>
+          <p:nvPr/>
+        </p:nvSpPr>
+        <p:spPr>
+          <a:xfrm>
+            <a:off x="548640" y="502920"/>
+            <a:ext cx="457200" cy="54864"/>
+          </a:xfrm>
+          <a:prstGeom prst="rect">
+            <a:avLst/>
+          </a:prstGeom>
+          <a:solidFill>
+            <a:srgbClr val="F47B20"/>
+          </a:solidFill>
+          <a:ln>
+            <a:noFill/>
+          </a:ln>
+          <a:effectLst/>
+        </p:spPr>
+        <p:style>
+          <a:lnRef idx="1">
+            <a:schemeClr val="accent1"/>
+          </a:lnRef>
+          <a:fillRef idx="3">
+            <a:schemeClr val="accent1"/>
+          </a:fillRef>
+          <a:effectRef idx="2">
+            <a:schemeClr val="accent1"/>
+          </a:effectRef>
+          <a:fontRef idx="minor">
+            <a:schemeClr val="lt1"/>
+          </a:fontRef>
+        </p:style>
+        <p:txBody>
+          <a:bodyPr rtlCol="0" anchor="ctr"/>
+          <a:lstStyle/>
+          <a:p>
+            <a:pPr algn="ctr"/>
+          </a:p>
+        </p:txBody>
+      </p:sp>
+      <p:sp>
+        <p:nvSpPr>
+          <p:cNvPr id="3" name="TextBox 2"/>
+          <p:cNvSpPr txBox="1"/>
+          <p:nvPr/>
+        </p:nvSpPr>
+        <p:spPr>
+          <a:xfrm>
+            <a:off x="1143000" y="393192"/>
+            <a:ext cx="8229600" cy="274320"/>
+          </a:xfrm>
+          <a:prstGeom prst="rect">
+            <a:avLst/>
+          </a:prstGeom>
+          <a:noFill/>
+        </p:spPr>
+        <p:txBody>
+          <a:bodyPr wrap="square" anchor="t" lIns="0" rIns="0" tIns="0" bIns="0">
+            <a:spAutoFit/>
+          </a:bodyPr>
+          <a:lstStyle/>
+          <a:p>
+            <a:pPr algn="l">
+              <a:spcAft>
+                <a:spcPts val="540"/>
+              </a:spcAft>
+            </a:pPr>
+            <a:r>
+              <a:rPr sz="1200" b="1" i="0">
+                <a:solidFill>
+                  <a:srgbClr val="5D5A54"/>
+                </a:solidFill>
+                <a:latin typeface="Inter Tight"/>
+              </a:rPr>
+              <a:t>VAPING AND YOUR BRAIN</a:t>
+            </a:r>
+          </a:p>
+        </p:txBody>
+      </p:sp>
+      <p:sp>
+        <p:nvSpPr>
+          <p:cNvPr id="4" name="TextBox 3"/>
+          <p:cNvSpPr txBox="1"/>
+          <p:nvPr/>
+        </p:nvSpPr>
+        <p:spPr>
+          <a:xfrm>
+            <a:off x="8229600" y="6400800"/>
+            <a:ext cx="3410712" cy="274320"/>
+          </a:xfrm>
+          <a:prstGeom prst="rect">
+            <a:avLst/>
+          </a:prstGeom>
+          <a:noFill/>
+        </p:spPr>
+        <p:txBody>
+          <a:bodyPr wrap="square" anchor="t" lIns="0" rIns="0" tIns="0" bIns="0">
+            <a:spAutoFit/>
+          </a:bodyPr>
+          <a:lstStyle/>
+          <a:p>
+            <a:pPr algn="r">
+              <a:spcAft>
+                <a:spcPts val="450"/>
+              </a:spcAft>
+            </a:pPr>
+            <a:r>
+              <a:rPr sz="1000" b="0" i="0">
+                <a:solidFill>
+                  <a:srgbClr val="5D5A54"/>
+                </a:solidFill>
+                <a:latin typeface="Inter Tight"/>
+              </a:rPr>
+              <a:t>Beaver Counseling</a:t>
+            </a:r>
+          </a:p>
+        </p:txBody>
+      </p:sp>
+      <p:sp>
+        <p:nvSpPr>
+          <p:cNvPr id="5" name="TextBox 4"/>
+          <p:cNvSpPr txBox="1"/>
+          <p:nvPr/>
+        </p:nvSpPr>
+        <p:spPr>
+          <a:xfrm>
+            <a:off x="822960" y="2011680"/>
+            <a:ext cx="10515600" cy="1463040"/>
+          </a:xfrm>
+          <a:prstGeom prst="rect">
+            <a:avLst/>
+          </a:prstGeom>
+          <a:noFill/>
+        </p:spPr>
+        <p:txBody>
+          <a:bodyPr wrap="square" anchor="b" lIns="0" rIns="0" tIns="0" bIns="0">
+            <a:spAutoFit/>
+          </a:bodyPr>
+          <a:lstStyle/>
+          <a:p>
+            <a:pPr algn="l">
+              <a:spcAft>
+                <a:spcPts val="2700"/>
+              </a:spcAft>
+            </a:pPr>
+            <a:r>
+              <a:rPr sz="6000" b="1" i="0">
+                <a:solidFill>
+                  <a:srgbClr val="FFFFFF"/>
+                </a:solidFill>
+                <a:latin typeface="Source Serif 4"/>
+              </a:rPr>
+              <a:t>Vaping and Your Brain</a:t>
+            </a:r>
+          </a:p>
+        </p:txBody>
+      </p:sp>
+      <p:sp>
+        <p:nvSpPr>
+          <p:cNvPr id="6" name="TextBox 5"/>
+          <p:cNvSpPr txBox="1"/>
+          <p:nvPr/>
+        </p:nvSpPr>
+        <p:spPr>
+          <a:xfrm>
+            <a:off x="822960" y="3611880"/>
+            <a:ext cx="10515600" cy="914400"/>
+          </a:xfrm>
+          <a:prstGeom prst="rect">
+            <a:avLst/>
+          </a:prstGeom>
+          <a:noFill/>
+        </p:spPr>
+        <p:txBody>
+          <a:bodyPr wrap="square" anchor="t" lIns="0" rIns="0" tIns="0" bIns="0">
+            <a:spAutoFit/>
+          </a:bodyPr>
+          <a:lstStyle/>
+          <a:p>
+            <a:pPr algn="l">
+              <a:spcAft>
+                <a:spcPts val="1080"/>
+              </a:spcAft>
+            </a:pPr>
+            <a:r>
+              <a:rPr sz="2400" b="0" i="1">
+                <a:solidFill>
+                  <a:srgbClr val="E8E4DA"/>
+                </a:solidFill>
+                <a:latin typeface="Source Serif 4"/>
+              </a:rPr>
+              <a:t>What nicotine does to a brain that's still building.</a:t>
+            </a:r>
+          </a:p>
+        </p:txBody>
+      </p:sp>
+      <p:sp>
+        <p:nvSpPr>
+          <p:cNvPr id="7" name="TextBox 6"/>
+          <p:cNvSpPr txBox="1"/>
+          <p:nvPr/>
+        </p:nvSpPr>
+        <p:spPr>
+          <a:xfrm>
+            <a:off x="822960" y="6035040"/>
+            <a:ext cx="7315200" cy="365760"/>
+          </a:xfrm>
+          <a:prstGeom prst="rect">
+            <a:avLst/>
+          </a:prstGeom>
+          <a:noFill/>
+        </p:spPr>
+        <p:txBody>
+          <a:bodyPr wrap="square" anchor="t" lIns="0" rIns="0" tIns="0" bIns="0">
+            <a:spAutoFit/>
+          </a:bodyPr>
+          <a:lstStyle/>
+          <a:p>
+            <a:pPr algn="l">
+              <a:spcAft>
+                <a:spcPts val="585"/>
+              </a:spcAft>
+            </a:pPr>
+            <a:r>
+              <a:rPr sz="1300" b="0" i="0">
+                <a:solidFill>
+                  <a:srgbClr val="E8E4DA"/>
+                </a:solidFill>
+                <a:latin typeface="Inter Tight"/>
+              </a:rPr>
+              <a:t>Beaver Upper School · Counseling</a:t>
+            </a:r>
+          </a:p>
+        </p:txBody>
+      </p:sp>
+    </p:spTree>
+  </p:cSld>
+  <p:clrMapOvr>
+    <a:masterClrMapping/>
+  </p:clrMapOvr>
+</p:sld>
+</file>
+
+<file path=ppt/slides/slide3.xml><?xml version="1.0" encoding="utf-8"?>
 <p:sld xmlns:a="http://schemas.openxmlformats.org/drawingml/2006/main" xmlns:p="http://schemas.openxmlformats.org/presentationml/2006/main" xmlns:r="http://schemas.openxmlformats.org/officeDocument/2006/relationships">
   <p:cSld>
     <p:bg>
@@ -5046,7 +7297,7 @@
                 </a:solidFill>
                 <a:latin typeface="Inter Tight"/>
               </a:rPr>
-              <a:t>THREE MOMENTS</a:t>
+              <a:t>MYTH OR FACT?</a:t>
             </a:r>
           </a:p>
         </p:txBody>
@@ -5099,7 +7350,7 @@
         <p:spPr>
           <a:xfrm>
             <a:off x="822960" y="1005840"/>
-            <a:ext cx="10515600" cy="914400"/>
+            <a:ext cx="10515600" cy="1097280"/>
           </a:xfrm>
           <a:prstGeom prst="rect">
             <a:avLst/>
@@ -5114,77 +7365,31 @@
           <a:p>
             <a:pPr algn="l">
               <a:spcAft>
-                <a:spcPts val="1530"/>
-              </a:spcAft>
-            </a:pPr>
-            <a:r>
-              <a:rPr sz="3400" b="1" i="0">
+                <a:spcPts val="1620"/>
+              </a:spcAft>
+            </a:pPr>
+            <a:r>
+              <a:rPr sz="3600" b="1" i="0">
                 <a:solidFill>
                   <a:srgbClr val="1C1B19"/>
                 </a:solidFill>
                 <a:latin typeface="Source Serif 4"/>
               </a:rPr>
-              <a:t>What would you say or do?</a:t>
-            </a:r>
-          </a:p>
-        </p:txBody>
-      </p:sp>
-      <p:sp>
-        <p:nvSpPr>
-          <p:cNvPr id="6" name="Rectangle 5"/>
-          <p:cNvSpPr/>
-          <p:nvPr/>
-        </p:nvSpPr>
-        <p:spPr>
-          <a:xfrm>
-            <a:off x="822960" y="2103120"/>
-            <a:ext cx="3322320" cy="3840480"/>
-          </a:xfrm>
-          <a:prstGeom prst="rect">
-            <a:avLst/>
-          </a:prstGeom>
-          <a:solidFill>
-            <a:srgbClr val="FFFFFF"/>
-          </a:solidFill>
-          <a:ln w="15875">
-            <a:solidFill>
-              <a:srgbClr val="D8D2C6"/>
-            </a:solidFill>
-          </a:ln>
-          <a:effectLst/>
-        </p:spPr>
-        <p:style>
-          <a:lnRef idx="1">
-            <a:schemeClr val="accent1"/>
-          </a:lnRef>
-          <a:fillRef idx="3">
-            <a:schemeClr val="accent1"/>
-          </a:fillRef>
-          <a:effectRef idx="2">
-            <a:schemeClr val="accent1"/>
-          </a:effectRef>
-          <a:fontRef idx="minor">
-            <a:schemeClr val="lt1"/>
-          </a:fontRef>
-        </p:style>
-        <p:txBody>
-          <a:bodyPr rtlCol="0" anchor="ctr"/>
-          <a:lstStyle/>
-          <a:p>
-            <a:pPr algn="ctr"/>
-          </a:p>
-        </p:txBody>
-      </p:sp>
-      <p:sp>
-        <p:nvSpPr>
-          <p:cNvPr id="7" name="TextBox 6"/>
+              <a:t>Stand up if you think it's a fact.</a:t>
+            </a:r>
+          </a:p>
+        </p:txBody>
+      </p:sp>
+      <p:sp>
+        <p:nvSpPr>
+          <p:cNvPr id="6" name="TextBox 5"/>
           <p:cNvSpPr txBox="1"/>
           <p:nvPr/>
         </p:nvSpPr>
         <p:spPr>
           <a:xfrm>
-            <a:off x="1051560" y="2286000"/>
-            <a:ext cx="2865120" cy="365760"/>
+            <a:off x="822960" y="2057400"/>
+            <a:ext cx="548640" cy="804672"/>
           </a:xfrm>
           <a:prstGeom prst="rect">
             <a:avLst/>
@@ -5199,31 +7404,31 @@
           <a:p>
             <a:pPr algn="l">
               <a:spcAft>
-                <a:spcPts val="585"/>
-              </a:spcAft>
-            </a:pPr>
-            <a:r>
-              <a:rPr sz="1300" b="1" i="0">
-                <a:solidFill>
-                  <a:srgbClr val="0B2D5B"/>
-                </a:solidFill>
-                <a:latin typeface="Inter Tight"/>
-              </a:rPr>
-              <a:t>LUCAS</a:t>
-            </a:r>
-          </a:p>
-        </p:txBody>
-      </p:sp>
-      <p:sp>
-        <p:nvSpPr>
-          <p:cNvPr id="8" name="TextBox 7"/>
+                <a:spcPts val="1170"/>
+              </a:spcAft>
+            </a:pPr>
+            <a:r>
+              <a:rPr sz="2600" b="1" i="0">
+                <a:solidFill>
+                  <a:srgbClr val="F47B20"/>
+                </a:solidFill>
+                <a:latin typeface="Source Serif 4"/>
+              </a:rPr>
+              <a:t>1</a:t>
+            </a:r>
+          </a:p>
+        </p:txBody>
+      </p:sp>
+      <p:sp>
+        <p:nvSpPr>
+          <p:cNvPr id="7" name="TextBox 6"/>
           <p:cNvSpPr txBox="1"/>
           <p:nvPr/>
         </p:nvSpPr>
         <p:spPr>
           <a:xfrm>
-            <a:off x="1051560" y="2743200"/>
-            <a:ext cx="2865120" cy="3017520"/>
+            <a:off x="1463040" y="2093976"/>
+            <a:ext cx="9875520" cy="804672"/>
           </a:xfrm>
           <a:prstGeom prst="rect">
             <a:avLst/>
@@ -5238,77 +7443,31 @@
           <a:p>
             <a:pPr algn="l">
               <a:spcAft>
-                <a:spcPts val="810"/>
-              </a:spcAft>
-            </a:pPr>
-            <a:r>
-              <a:rPr sz="1800" b="0" i="0">
+                <a:spcPts val="945"/>
+              </a:spcAft>
+            </a:pPr>
+            <a:r>
+              <a:rPr sz="2100" b="1" i="0">
                 <a:solidFill>
                   <a:srgbClr val="1C1B19"/>
                 </a:solidFill>
                 <a:latin typeface="Source Serif 4"/>
               </a:rPr>
-              <a:t>Hits his vape between every class. During a two-hour practice SAT he gets shaky, can't focus, and leaves early.</a:t>
-            </a:r>
-          </a:p>
-        </p:txBody>
-      </p:sp>
-      <p:sp>
-        <p:nvSpPr>
-          <p:cNvPr id="9" name="Rectangle 8"/>
-          <p:cNvSpPr/>
-          <p:nvPr/>
-        </p:nvSpPr>
-        <p:spPr>
-          <a:xfrm>
-            <a:off x="4419600" y="2103120"/>
-            <a:ext cx="3322320" cy="3840480"/>
-          </a:xfrm>
-          <a:prstGeom prst="rect">
-            <a:avLst/>
-          </a:prstGeom>
-          <a:solidFill>
-            <a:srgbClr val="FFFFFF"/>
-          </a:solidFill>
-          <a:ln w="15875">
-            <a:solidFill>
-              <a:srgbClr val="D8D2C6"/>
-            </a:solidFill>
-          </a:ln>
-          <a:effectLst/>
-        </p:spPr>
-        <p:style>
-          <a:lnRef idx="1">
-            <a:schemeClr val="accent1"/>
-          </a:lnRef>
-          <a:fillRef idx="3">
-            <a:schemeClr val="accent1"/>
-          </a:fillRef>
-          <a:effectRef idx="2">
-            <a:schemeClr val="accent1"/>
-          </a:effectRef>
-          <a:fontRef idx="minor">
-            <a:schemeClr val="lt1"/>
-          </a:fontRef>
-        </p:style>
-        <p:txBody>
-          <a:bodyPr rtlCol="0" anchor="ctr"/>
-          <a:lstStyle/>
-          <a:p>
-            <a:pPr algn="ctr"/>
-          </a:p>
-        </p:txBody>
-      </p:sp>
-      <p:sp>
-        <p:nvSpPr>
-          <p:cNvPr id="10" name="TextBox 9"/>
+              <a:t>Vaping relieves stress.</a:t>
+            </a:r>
+          </a:p>
+        </p:txBody>
+      </p:sp>
+      <p:sp>
+        <p:nvSpPr>
+          <p:cNvPr id="8" name="TextBox 7"/>
           <p:cNvSpPr txBox="1"/>
           <p:nvPr/>
         </p:nvSpPr>
         <p:spPr>
           <a:xfrm>
-            <a:off x="4648200" y="2286000"/>
-            <a:ext cx="2865120" cy="365760"/>
+            <a:off x="822960" y="2862072"/>
+            <a:ext cx="548640" cy="804672"/>
           </a:xfrm>
           <a:prstGeom prst="rect">
             <a:avLst/>
@@ -5323,31 +7482,31 @@
           <a:p>
             <a:pPr algn="l">
               <a:spcAft>
-                <a:spcPts val="585"/>
-              </a:spcAft>
-            </a:pPr>
-            <a:r>
-              <a:rPr sz="1300" b="1" i="0">
-                <a:solidFill>
-                  <a:srgbClr val="0B2D5B"/>
-                </a:solidFill>
-                <a:latin typeface="Inter Tight"/>
-              </a:rPr>
-              <a:t>IMANI</a:t>
-            </a:r>
-          </a:p>
-        </p:txBody>
-      </p:sp>
-      <p:sp>
-        <p:nvSpPr>
-          <p:cNvPr id="11" name="TextBox 10"/>
+                <a:spcPts val="1170"/>
+              </a:spcAft>
+            </a:pPr>
+            <a:r>
+              <a:rPr sz="2600" b="1" i="0">
+                <a:solidFill>
+                  <a:srgbClr val="F47B20"/>
+                </a:solidFill>
+                <a:latin typeface="Source Serif 4"/>
+              </a:rPr>
+              <a:t>2</a:t>
+            </a:r>
+          </a:p>
+        </p:txBody>
+      </p:sp>
+      <p:sp>
+        <p:nvSpPr>
+          <p:cNvPr id="9" name="TextBox 8"/>
           <p:cNvSpPr txBox="1"/>
           <p:nvPr/>
         </p:nvSpPr>
         <p:spPr>
           <a:xfrm>
-            <a:off x="4648200" y="2743200"/>
-            <a:ext cx="2865120" cy="3017520"/>
+            <a:off x="1463040" y="2898648"/>
+            <a:ext cx="9875520" cy="804672"/>
           </a:xfrm>
           <a:prstGeom prst="rect">
             <a:avLst/>
@@ -5362,77 +7521,31 @@
           <a:p>
             <a:pPr algn="l">
               <a:spcAft>
-                <a:spcPts val="810"/>
-              </a:spcAft>
-            </a:pPr>
-            <a:r>
-              <a:rPr sz="1800" b="0" i="0">
+                <a:spcPts val="945"/>
+              </a:spcAft>
+            </a:pPr>
+            <a:r>
+              <a:rPr sz="2100" b="1" i="0">
                 <a:solidFill>
                   <a:srgbClr val="1C1B19"/>
                 </a:solidFill>
                 <a:latin typeface="Source Serif 4"/>
               </a:rPr>
-              <a:t>Switched from vaping to nicotine pouches. "It's not vaping, so I quit," she says.</a:t>
-            </a:r>
-          </a:p>
-        </p:txBody>
-      </p:sp>
-      <p:sp>
-        <p:nvSpPr>
-          <p:cNvPr id="12" name="Rectangle 11"/>
-          <p:cNvSpPr/>
-          <p:nvPr/>
-        </p:nvSpPr>
-        <p:spPr>
-          <a:xfrm>
-            <a:off x="8016239" y="2103120"/>
-            <a:ext cx="3322320" cy="3840480"/>
-          </a:xfrm>
-          <a:prstGeom prst="rect">
-            <a:avLst/>
-          </a:prstGeom>
-          <a:solidFill>
-            <a:srgbClr val="FFFFFF"/>
-          </a:solidFill>
-          <a:ln w="15875">
-            <a:solidFill>
-              <a:srgbClr val="D8D2C6"/>
-            </a:solidFill>
-          </a:ln>
-          <a:effectLst/>
-        </p:spPr>
-        <p:style>
-          <a:lnRef idx="1">
-            <a:schemeClr val="accent1"/>
-          </a:lnRef>
-          <a:fillRef idx="3">
-            <a:schemeClr val="accent1"/>
-          </a:fillRef>
-          <a:effectRef idx="2">
-            <a:schemeClr val="accent1"/>
-          </a:effectRef>
-          <a:fontRef idx="minor">
-            <a:schemeClr val="lt1"/>
-          </a:fontRef>
-        </p:style>
-        <p:txBody>
-          <a:bodyPr rtlCol="0" anchor="ctr"/>
-          <a:lstStyle/>
-          <a:p>
-            <a:pPr algn="ctr"/>
-          </a:p>
-        </p:txBody>
-      </p:sp>
-      <p:sp>
-        <p:nvSpPr>
-          <p:cNvPr id="13" name="TextBox 12"/>
+              <a:t>Nicotine pouches aren't addictive because you don't inhale them.</a:t>
+            </a:r>
+          </a:p>
+        </p:txBody>
+      </p:sp>
+      <p:sp>
+        <p:nvSpPr>
+          <p:cNvPr id="10" name="TextBox 9"/>
           <p:cNvSpPr txBox="1"/>
           <p:nvPr/>
         </p:nvSpPr>
         <p:spPr>
           <a:xfrm>
-            <a:off x="8244839" y="2286000"/>
-            <a:ext cx="2865120" cy="365760"/>
+            <a:off x="822960" y="3666744"/>
+            <a:ext cx="548640" cy="804672"/>
           </a:xfrm>
           <a:prstGeom prst="rect">
             <a:avLst/>
@@ -5447,31 +7560,31 @@
           <a:p>
             <a:pPr algn="l">
               <a:spcAft>
-                <a:spcPts val="585"/>
-              </a:spcAft>
-            </a:pPr>
-            <a:r>
-              <a:rPr sz="1300" b="1" i="0">
-                <a:solidFill>
-                  <a:srgbClr val="0B2D5B"/>
-                </a:solidFill>
-                <a:latin typeface="Inter Tight"/>
-              </a:rPr>
-              <a:t>A PARENT</a:t>
-            </a:r>
-          </a:p>
-        </p:txBody>
-      </p:sp>
-      <p:sp>
-        <p:nvSpPr>
-          <p:cNvPr id="14" name="TextBox 13"/>
+                <a:spcPts val="1170"/>
+              </a:spcAft>
+            </a:pPr>
+            <a:r>
+              <a:rPr sz="2600" b="1" i="0">
+                <a:solidFill>
+                  <a:srgbClr val="F47B20"/>
+                </a:solidFill>
+                <a:latin typeface="Source Serif 4"/>
+              </a:rPr>
+              <a:t>3</a:t>
+            </a:r>
+          </a:p>
+        </p:txBody>
+      </p:sp>
+      <p:sp>
+        <p:nvSpPr>
+          <p:cNvPr id="11" name="TextBox 10"/>
           <p:cNvSpPr txBox="1"/>
           <p:nvPr/>
         </p:nvSpPr>
         <p:spPr>
           <a:xfrm>
-            <a:off x="8244839" y="2743200"/>
-            <a:ext cx="2865120" cy="3017520"/>
+            <a:off x="1463040" y="3703320"/>
+            <a:ext cx="9875520" cy="804672"/>
           </a:xfrm>
           <a:prstGeom prst="rect">
             <a:avLst/>
@@ -5486,17 +7599,173 @@
           <a:p>
             <a:pPr algn="l">
               <a:spcAft>
-                <a:spcPts val="810"/>
-              </a:spcAft>
-            </a:pPr>
-            <a:r>
-              <a:rPr sz="1800" b="0" i="0">
+                <a:spcPts val="945"/>
+              </a:spcAft>
+            </a:pPr>
+            <a:r>
+              <a:rPr sz="2100" b="1" i="0">
                 <a:solidFill>
                   <a:srgbClr val="1C1B19"/>
                 </a:solidFill>
                 <a:latin typeface="Source Serif 4"/>
               </a:rPr>
-              <a:t>Smokes. They started vaping to cut down and say it's "basically harmless."</a:t>
+              <a:t>Some teens show signs of dependence within weeks of starting.</a:t>
+            </a:r>
+          </a:p>
+        </p:txBody>
+      </p:sp>
+      <p:sp>
+        <p:nvSpPr>
+          <p:cNvPr id="12" name="TextBox 11"/>
+          <p:cNvSpPr txBox="1"/>
+          <p:nvPr/>
+        </p:nvSpPr>
+        <p:spPr>
+          <a:xfrm>
+            <a:off x="822960" y="4471416"/>
+            <a:ext cx="548640" cy="804672"/>
+          </a:xfrm>
+          <a:prstGeom prst="rect">
+            <a:avLst/>
+          </a:prstGeom>
+          <a:noFill/>
+        </p:spPr>
+        <p:txBody>
+          <a:bodyPr wrap="square" anchor="t" lIns="0" rIns="0" tIns="0" bIns="0">
+            <a:spAutoFit/>
+          </a:bodyPr>
+          <a:lstStyle/>
+          <a:p>
+            <a:pPr algn="l">
+              <a:spcAft>
+                <a:spcPts val="1170"/>
+              </a:spcAft>
+            </a:pPr>
+            <a:r>
+              <a:rPr sz="2600" b="1" i="0">
+                <a:solidFill>
+                  <a:srgbClr val="F47B20"/>
+                </a:solidFill>
+                <a:latin typeface="Source Serif 4"/>
+              </a:rPr>
+              <a:t>4</a:t>
+            </a:r>
+          </a:p>
+        </p:txBody>
+      </p:sp>
+      <p:sp>
+        <p:nvSpPr>
+          <p:cNvPr id="13" name="TextBox 12"/>
+          <p:cNvSpPr txBox="1"/>
+          <p:nvPr/>
+        </p:nvSpPr>
+        <p:spPr>
+          <a:xfrm>
+            <a:off x="1463040" y="4507992"/>
+            <a:ext cx="9875520" cy="804672"/>
+          </a:xfrm>
+          <a:prstGeom prst="rect">
+            <a:avLst/>
+          </a:prstGeom>
+          <a:noFill/>
+        </p:spPr>
+        <p:txBody>
+          <a:bodyPr wrap="square" anchor="t" lIns="0" rIns="0" tIns="0" bIns="0">
+            <a:spAutoFit/>
+          </a:bodyPr>
+          <a:lstStyle/>
+          <a:p>
+            <a:pPr algn="l">
+              <a:spcAft>
+                <a:spcPts val="945"/>
+              </a:spcAft>
+            </a:pPr>
+            <a:r>
+              <a:rPr sz="2100" b="1" i="0">
+                <a:solidFill>
+                  <a:srgbClr val="1C1B19"/>
+                </a:solidFill>
+                <a:latin typeface="Source Serif 4"/>
+              </a:rPr>
+              <a:t>Vape aerosol has fewer toxic chemicals than cigarette smoke.</a:t>
+            </a:r>
+          </a:p>
+        </p:txBody>
+      </p:sp>
+      <p:sp>
+        <p:nvSpPr>
+          <p:cNvPr id="14" name="TextBox 13"/>
+          <p:cNvSpPr txBox="1"/>
+          <p:nvPr/>
+        </p:nvSpPr>
+        <p:spPr>
+          <a:xfrm>
+            <a:off x="822960" y="5276088"/>
+            <a:ext cx="548640" cy="804672"/>
+          </a:xfrm>
+          <a:prstGeom prst="rect">
+            <a:avLst/>
+          </a:prstGeom>
+          <a:noFill/>
+        </p:spPr>
+        <p:txBody>
+          <a:bodyPr wrap="square" anchor="t" lIns="0" rIns="0" tIns="0" bIns="0">
+            <a:spAutoFit/>
+          </a:bodyPr>
+          <a:lstStyle/>
+          <a:p>
+            <a:pPr algn="l">
+              <a:spcAft>
+                <a:spcPts val="1170"/>
+              </a:spcAft>
+            </a:pPr>
+            <a:r>
+              <a:rPr sz="2600" b="1" i="0">
+                <a:solidFill>
+                  <a:srgbClr val="F47B20"/>
+                </a:solidFill>
+                <a:latin typeface="Source Serif 4"/>
+              </a:rPr>
+              <a:t>5</a:t>
+            </a:r>
+          </a:p>
+        </p:txBody>
+      </p:sp>
+      <p:sp>
+        <p:nvSpPr>
+          <p:cNvPr id="15" name="TextBox 14"/>
+          <p:cNvSpPr txBox="1"/>
+          <p:nvPr/>
+        </p:nvSpPr>
+        <p:spPr>
+          <a:xfrm>
+            <a:off x="1463040" y="5312664"/>
+            <a:ext cx="9875520" cy="804672"/>
+          </a:xfrm>
+          <a:prstGeom prst="rect">
+            <a:avLst/>
+          </a:prstGeom>
+          <a:noFill/>
+        </p:spPr>
+        <p:txBody>
+          <a:bodyPr wrap="square" anchor="t" lIns="0" rIns="0" tIns="0" bIns="0">
+            <a:spAutoFit/>
+          </a:bodyPr>
+          <a:lstStyle/>
+          <a:p>
+            <a:pPr algn="l">
+              <a:spcAft>
+                <a:spcPts val="945"/>
+              </a:spcAft>
+            </a:pPr>
+            <a:r>
+              <a:rPr sz="2100" b="1" i="0">
+                <a:solidFill>
+                  <a:srgbClr val="1C1B19"/>
+                </a:solidFill>
+                <a:latin typeface="Source Serif 4"/>
+              </a:rPr>
+              <a:t>A vape labeled "nicotine free" has no nicotine.</a:t>
             </a:r>
           </a:p>
         </p:txBody>
@@ -5509,7 +7778,7 @@
 </p:sld>
 </file>
 
-<file path=ppt/slides/slide12.xml><?xml version="1.0" encoding="utf-8"?>
+<file path=ppt/slides/slide4.xml><?xml version="1.0" encoding="utf-8"?>
 <p:sld xmlns:a="http://schemas.openxmlformats.org/drawingml/2006/main" xmlns:p="http://schemas.openxmlformats.org/presentationml/2006/main" xmlns:r="http://schemas.openxmlformats.org/officeDocument/2006/relationships">
   <p:cSld>
     <p:bg>
@@ -5605,7 +7874,7 @@
                 </a:solidFill>
                 <a:latin typeface="Inter Tight"/>
               </a:rPr>
-              <a:t>WHAT HELPS</a:t>
+              <a:t>MYTH OR FACT?</a:t>
             </a:r>
           </a:p>
         </p:txBody>
@@ -5683,7 +7952,7 @@
                 </a:solidFill>
                 <a:latin typeface="Source Serif 4"/>
               </a:rPr>
-              <a:t>Quitting is a skill. It has steps.</a:t>
+              <a:t>The answers</a:t>
             </a:r>
           </a:p>
         </p:txBody>
@@ -5696,8 +7965,8 @@
         </p:nvSpPr>
         <p:spPr>
           <a:xfrm>
-            <a:off x="822960" y="2194560"/>
-            <a:ext cx="548640" cy="1005840"/>
+            <a:off x="822960" y="2057400"/>
+            <a:ext cx="548640" cy="804672"/>
           </a:xfrm>
           <a:prstGeom prst="rect">
             <a:avLst/>
@@ -5735,8 +8004,8 @@
         </p:nvSpPr>
         <p:spPr>
           <a:xfrm>
-            <a:off x="1463040" y="2231136"/>
-            <a:ext cx="9875520" cy="1005840"/>
+            <a:off x="1463040" y="2093976"/>
+            <a:ext cx="9875520" cy="804672"/>
           </a:xfrm>
           <a:prstGeom prst="rect">
             <a:avLst/>
@@ -5761,7 +8030,7 @@
                 </a:solidFill>
                 <a:latin typeface="Source Serif 4"/>
               </a:rPr>
-              <a:t>Map your loop.</a:t>
+              <a:t>Mostly myth.</a:t>
             </a:r>
           </a:p>
           <a:p>
@@ -5777,7 +8046,7 @@
                 </a:solidFill>
                 <a:latin typeface="Source Serif 4"/>
               </a:rPr>
-              <a:t>Notice where, who, and what you felt before each craving.</a:t>
+              <a:t>It relieves its own withdrawal. We'll come back to this.</a:t>
             </a:r>
           </a:p>
         </p:txBody>
@@ -5790,8 +8059,8 @@
         </p:nvSpPr>
         <p:spPr>
           <a:xfrm>
-            <a:off x="822960" y="3200400"/>
-            <a:ext cx="548640" cy="1005840"/>
+            <a:off x="822960" y="2862072"/>
+            <a:ext cx="548640" cy="804672"/>
           </a:xfrm>
           <a:prstGeom prst="rect">
             <a:avLst/>
@@ -5829,8 +8098,8 @@
         </p:nvSpPr>
         <p:spPr>
           <a:xfrm>
-            <a:off x="1463040" y="3236976"/>
-            <a:ext cx="9875520" cy="1005840"/>
+            <a:off x="1463040" y="2898648"/>
+            <a:ext cx="9875520" cy="804672"/>
           </a:xfrm>
           <a:prstGeom prst="rect">
             <a:avLst/>
@@ -5855,7 +8124,7 @@
                 </a:solidFill>
                 <a:latin typeface="Source Serif 4"/>
               </a:rPr>
-              <a:t>Know the timeline.</a:t>
+              <a:t>Myth.</a:t>
             </a:r>
           </a:p>
           <a:p>
@@ -5871,7 +8140,7 @@
                 </a:solidFill>
                 <a:latin typeface="Source Serif 4"/>
               </a:rPr>
-              <a:t>Withdrawal is worst the first few days and fades over weeks. A craving peaks in minutes.</a:t>
+              <a:t>Same nicotine, same loop.</a:t>
             </a:r>
           </a:p>
         </p:txBody>
@@ -5884,8 +8153,8 @@
         </p:nvSpPr>
         <p:spPr>
           <a:xfrm>
-            <a:off x="822960" y="4206240"/>
-            <a:ext cx="548640" cy="1005840"/>
+            <a:off x="822960" y="3666744"/>
+            <a:ext cx="548640" cy="804672"/>
           </a:xfrm>
           <a:prstGeom prst="rect">
             <a:avLst/>
@@ -5923,8 +8192,8 @@
         </p:nvSpPr>
         <p:spPr>
           <a:xfrm>
-            <a:off x="1463040" y="4242816"/>
-            <a:ext cx="9875520" cy="1005840"/>
+            <a:off x="1463040" y="3703320"/>
+            <a:ext cx="9875520" cy="804672"/>
           </a:xfrm>
           <a:prstGeom prst="rect">
             <a:avLst/>
@@ -5949,7 +8218,7 @@
                 </a:solidFill>
                 <a:latin typeface="Source Serif 4"/>
               </a:rPr>
-              <a:t>Text DITCHVAPE to 88709.</a:t>
+              <a:t>Fact.</a:t>
             </a:r>
           </a:p>
           <a:p>
@@ -5965,7 +8234,7 @@
                 </a:solidFill>
                 <a:latin typeface="Source Serif 4"/>
               </a:rPr>
-              <a:t>Free and anonymous. In a 2024 trial, more teens who used it had quit.</a:t>
+              <a:t>In one Massachusetts study, about 1 in 5 occasional users had a symptom within four weeks.</a:t>
             </a:r>
           </a:p>
         </p:txBody>
@@ -5978,8 +8247,8 @@
         </p:nvSpPr>
         <p:spPr>
           <a:xfrm>
-            <a:off x="822960" y="5212080"/>
-            <a:ext cx="548640" cy="1005840"/>
+            <a:off x="822960" y="4471416"/>
+            <a:ext cx="548640" cy="804672"/>
           </a:xfrm>
           <a:prstGeom prst="rect">
             <a:avLst/>
@@ -6017,8 +8286,8 @@
         </p:nvSpPr>
         <p:spPr>
           <a:xfrm>
-            <a:off x="1463040" y="5248656"/>
-            <a:ext cx="9875520" cy="1005840"/>
+            <a:off x="1463040" y="4507992"/>
+            <a:ext cx="9875520" cy="804672"/>
           </a:xfrm>
           <a:prstGeom prst="rect">
             <a:avLst/>
@@ -6043,7 +8312,7 @@
                 </a:solidFill>
                 <a:latin typeface="Source Serif 4"/>
               </a:rPr>
-              <a:t>Bring in the nurse or a counselor.</a:t>
+              <a:t>Fact.</a:t>
             </a:r>
           </a:p>
           <a:p>
@@ -6059,7 +8328,101 @@
                 </a:solidFill>
                 <a:latin typeface="Source Serif 4"/>
               </a:rPr>
-              <a:t>It's about health. They help students quit all the time.</a:t>
+              <a:t>That's why it can help an adult smoker who switches. For a non-smoker it only adds nicotine.</a:t>
+            </a:r>
+          </a:p>
+        </p:txBody>
+      </p:sp>
+      <p:sp>
+        <p:nvSpPr>
+          <p:cNvPr id="14" name="TextBox 13"/>
+          <p:cNvSpPr txBox="1"/>
+          <p:nvPr/>
+        </p:nvSpPr>
+        <p:spPr>
+          <a:xfrm>
+            <a:off x="822960" y="5276088"/>
+            <a:ext cx="548640" cy="804672"/>
+          </a:xfrm>
+          <a:prstGeom prst="rect">
+            <a:avLst/>
+          </a:prstGeom>
+          <a:noFill/>
+        </p:spPr>
+        <p:txBody>
+          <a:bodyPr wrap="square" anchor="t" lIns="0" rIns="0" tIns="0" bIns="0">
+            <a:spAutoFit/>
+          </a:bodyPr>
+          <a:lstStyle/>
+          <a:p>
+            <a:pPr algn="l">
+              <a:spcAft>
+                <a:spcPts val="1170"/>
+              </a:spcAft>
+            </a:pPr>
+            <a:r>
+              <a:rPr sz="2600" b="1" i="0">
+                <a:solidFill>
+                  <a:srgbClr val="F47B20"/>
+                </a:solidFill>
+                <a:latin typeface="Source Serif 4"/>
+              </a:rPr>
+              <a:t>5</a:t>
+            </a:r>
+          </a:p>
+        </p:txBody>
+      </p:sp>
+      <p:sp>
+        <p:nvSpPr>
+          <p:cNvPr id="15" name="TextBox 14"/>
+          <p:cNvSpPr txBox="1"/>
+          <p:nvPr/>
+        </p:nvSpPr>
+        <p:spPr>
+          <a:xfrm>
+            <a:off x="1463040" y="5312664"/>
+            <a:ext cx="9875520" cy="804672"/>
+          </a:xfrm>
+          <a:prstGeom prst="rect">
+            <a:avLst/>
+          </a:prstGeom>
+          <a:noFill/>
+        </p:spPr>
+        <p:txBody>
+          <a:bodyPr wrap="square" anchor="t" lIns="0" rIns="0" tIns="0" bIns="0">
+            <a:spAutoFit/>
+          </a:bodyPr>
+          <a:lstStyle/>
+          <a:p>
+            <a:pPr algn="l">
+              <a:spcAft>
+                <a:spcPts val="945"/>
+              </a:spcAft>
+            </a:pPr>
+            <a:r>
+              <a:rPr sz="2100" b="1" i="0">
+                <a:solidFill>
+                  <a:srgbClr val="1C1B19"/>
+                </a:solidFill>
+                <a:latin typeface="Source Serif 4"/>
+              </a:rPr>
+              <a:t>Myth.</a:t>
+            </a:r>
+          </a:p>
+          <a:p>
+            <a:pPr algn="l">
+              <a:spcAft>
+                <a:spcPts val="945"/>
+              </a:spcAft>
+            </a:pPr>
+            <a:r>
+              <a:rPr sz="1600" b="0" i="0">
+                <a:solidFill>
+                  <a:srgbClr val="5D5A54"/>
+                </a:solidFill>
+                <a:latin typeface="Source Serif 4"/>
+              </a:rPr>
+              <a:t>Some labeled "nicotine free" have tested positive.</a:t>
             </a:r>
           </a:p>
         </p:txBody>
@@ -6072,7 +8435,7 @@
 </p:sld>
 </file>
 
-<file path=ppt/slides/slide13.xml><?xml version="1.0" encoding="utf-8"?>
+<file path=ppt/slides/slide5.xml><?xml version="1.0" encoding="utf-8"?>
 <p:sld xmlns:a="http://schemas.openxmlformats.org/drawingml/2006/main" xmlns:p="http://schemas.openxmlformats.org/presentationml/2006/main" xmlns:r="http://schemas.openxmlformats.org/officeDocument/2006/relationships">
   <p:cSld>
     <p:bg>
@@ -6168,7 +8531,7 @@
                 </a:solidFill>
                 <a:latin typeface="Inter Tight"/>
               </a:rPr>
-              <a:t>BEFORE YOU GO</a:t>
+              <a:t>HOW IT BUILDS</a:t>
             </a:r>
           </a:p>
         </p:txBody>
@@ -6220,7 +8583,7 @@
         </p:nvSpPr>
         <p:spPr>
           <a:xfrm>
-            <a:off x="822960" y="1188720"/>
+            <a:off x="822960" y="1005840"/>
             <a:ext cx="10515600" cy="914400"/>
           </a:xfrm>
           <a:prstGeom prst="rect">
@@ -6236,70 +8599,31 @@
           <a:p>
             <a:pPr algn="l">
               <a:spcAft>
-                <a:spcPts val="1620"/>
-              </a:spcAft>
-            </a:pPr>
-            <a:r>
-              <a:rPr sz="3600" b="1" i="0">
+                <a:spcPts val="1530"/>
+              </a:spcAft>
+            </a:pPr>
+            <a:r>
+              <a:rPr sz="3400" b="1" i="0">
                 <a:solidFill>
                   <a:srgbClr val="1C1B19"/>
                 </a:solidFill>
                 <a:latin typeface="Source Serif 4"/>
               </a:rPr>
-              <a:t>Exit card</a:t>
-            </a:r>
-          </a:p>
-        </p:txBody>
-      </p:sp>
-      <p:sp>
-        <p:nvSpPr>
-          <p:cNvPr id="6" name="TextBox 5"/>
-          <p:cNvSpPr txBox="1"/>
-          <p:nvPr/>
-        </p:nvSpPr>
-        <p:spPr>
-          <a:xfrm>
-            <a:off x="822960" y="2286000"/>
-            <a:ext cx="10515600" cy="1463040"/>
-          </a:xfrm>
-          <a:prstGeom prst="rect">
-            <a:avLst/>
-          </a:prstGeom>
-          <a:noFill/>
-        </p:spPr>
-        <p:txBody>
-          <a:bodyPr wrap="square" anchor="t" lIns="0" rIns="0" tIns="0" bIns="0">
-            <a:spAutoFit/>
-          </a:bodyPr>
-          <a:lstStyle/>
-          <a:p>
-            <a:pPr algn="l">
-              <a:spcAft>
-                <a:spcPts val="1080"/>
-              </a:spcAft>
-            </a:pPr>
-            <a:r>
-              <a:rPr sz="2400" b="0" i="0">
-                <a:solidFill>
-                  <a:srgbClr val="1C1B19"/>
-                </a:solidFill>
-                <a:latin typeface="Source Serif 4"/>
-              </a:rPr>
-              <a:t>What would you tell a friend who says vaping helps their stress?</a:t>
-            </a:r>
-          </a:p>
-        </p:txBody>
-      </p:sp>
-      <p:sp>
-        <p:nvSpPr>
-          <p:cNvPr id="7" name="Rectangle 6"/>
+              <a:t>The loop nicotine plugs into</a:t>
+            </a:r>
+          </a:p>
+        </p:txBody>
+      </p:sp>
+      <p:sp>
+        <p:nvSpPr>
+          <p:cNvPr id="6" name="Rectangle 5"/>
           <p:cNvSpPr/>
           <p:nvPr/>
         </p:nvSpPr>
         <p:spPr>
           <a:xfrm>
-            <a:off x="822960" y="4023360"/>
-            <a:ext cx="10515600" cy="1371600"/>
+            <a:off x="822960" y="2743200"/>
+            <a:ext cx="1874519" cy="1005840"/>
           </a:xfrm>
           <a:prstGeom prst="rect">
             <a:avLst/>
@@ -6309,7 +8633,7 @@
           </a:solidFill>
           <a:ln w="15875">
             <a:solidFill>
-              <a:srgbClr val="1C1B19"/>
+              <a:srgbClr val="0B2D5B"/>
             </a:solidFill>
           </a:ln>
           <a:effectLst/>
@@ -6338,14 +8662,14 @@
       </p:sp>
       <p:sp>
         <p:nvSpPr>
-          <p:cNvPr id="8" name="TextBox 7"/>
+          <p:cNvPr id="7" name="TextBox 6"/>
           <p:cNvSpPr txBox="1"/>
           <p:nvPr/>
         </p:nvSpPr>
         <p:spPr>
           <a:xfrm>
-            <a:off x="1097280" y="4206240"/>
-            <a:ext cx="10058400" cy="365760"/>
+            <a:off x="822960" y="2743200"/>
+            <a:ext cx="1874519" cy="1005840"/>
           </a:xfrm>
           <a:prstGeom prst="rect">
             <a:avLst/>
@@ -6353,112 +8677,85 @@
           <a:noFill/>
         </p:spPr>
         <p:txBody>
-          <a:bodyPr wrap="square" anchor="t" lIns="0" rIns="0" tIns="0" bIns="0">
+          <a:bodyPr wrap="square" anchor="ctr" lIns="0" rIns="0" tIns="0" bIns="0">
             <a:spAutoFit/>
           </a:bodyPr>
           <a:lstStyle/>
           <a:p>
-            <a:pPr algn="l">
-              <a:spcAft>
-                <a:spcPts val="540"/>
-              </a:spcAft>
-            </a:pPr>
-            <a:r>
-              <a:rPr sz="1200" b="1" i="0">
-                <a:solidFill>
-                  <a:srgbClr val="0B2D5B"/>
-                </a:solidFill>
-                <a:latin typeface="Inter Tight"/>
-              </a:rPr>
-              <a:t>TAKE-HOME SHEET</a:t>
-            </a:r>
-          </a:p>
-        </p:txBody>
-      </p:sp>
-      <p:sp>
-        <p:nvSpPr>
-          <p:cNvPr id="9" name="TextBox 8"/>
-          <p:cNvSpPr txBox="1"/>
-          <p:nvPr/>
-        </p:nvSpPr>
-        <p:spPr>
-          <a:xfrm>
-            <a:off x="1097280" y="4617720"/>
-            <a:ext cx="10058400" cy="640080"/>
-          </a:xfrm>
-          <a:prstGeom prst="rect">
-            <a:avLst/>
-          </a:prstGeom>
-          <a:noFill/>
-        </p:spPr>
-        <p:txBody>
-          <a:bodyPr wrap="square" anchor="t" lIns="0" rIns="0" tIns="0" bIns="0">
-            <a:spAutoFit/>
-          </a:bodyPr>
-          <a:lstStyle/>
-          <a:p>
-            <a:pPr algn="l">
+            <a:pPr algn="ctr">
               <a:spcAft>
                 <a:spcPts val="900"/>
               </a:spcAft>
             </a:pPr>
             <a:r>
-              <a:rPr sz="2000" b="0" i="0">
+              <a:rPr sz="2000" b="1" i="0">
                 <a:solidFill>
                   <a:srgbClr val="1C1B19"/>
                 </a:solidFill>
-                <a:latin typeface="Inter Tight"/>
-              </a:rPr>
-              <a:t>https://rmwtoolkit.github.io/bcds-toolkit/vaping-and-your-brain-high-school.html</a:t>
-            </a:r>
-          </a:p>
-        </p:txBody>
-      </p:sp>
-    </p:spTree>
-  </p:cSld>
-  <p:clrMapOvr>
-    <a:masterClrMapping/>
-  </p:clrMapOvr>
-</p:sld>
-</file>
-
-<file path=ppt/slides/slide2.xml><?xml version="1.0" encoding="utf-8"?>
-<p:sld xmlns:a="http://schemas.openxmlformats.org/drawingml/2006/main" xmlns:p="http://schemas.openxmlformats.org/presentationml/2006/main" xmlns:r="http://schemas.openxmlformats.org/officeDocument/2006/relationships" show="0">
-  <p:cSld>
-    <p:bg>
-      <p:bgPr>
-        <a:solidFill>
-          <a:srgbClr val="EEEBE4"/>
-        </a:solidFill>
-        <a:effectLst/>
-      </p:bgPr>
-    </p:bg>
-    <p:spTree>
-      <p:nvGrpSpPr>
-        <p:cNvPr id="1" name=""/>
-        <p:cNvGrpSpPr/>
-        <p:nvPr/>
-      </p:nvGrpSpPr>
-      <p:grpSpPr/>
-      <p:sp>
-        <p:nvSpPr>
-          <p:cNvPr id="2" name="Rectangle 1"/>
+                <a:latin typeface="Source Serif 4"/>
+              </a:rPr>
+              <a:t>Cue</a:t>
+            </a:r>
+          </a:p>
+        </p:txBody>
+      </p:sp>
+      <p:cxnSp>
+        <p:nvCxnSpPr>
+          <p:cNvPr id="8" name="Connector 7"/>
+          <p:cNvCxnSpPr/>
+          <p:nvPr/>
+        </p:nvCxnSpPr>
+        <p:spPr>
+          <a:xfrm>
+            <a:off x="2752344" y="3246120"/>
+            <a:ext cx="176021" cy="0"/>
+          </a:xfrm>
+          <a:prstGeom prst="line">
+            <a:avLst/>
+          </a:prstGeom>
+          <a:ln w="31750">
+            <a:solidFill>
+              <a:srgbClr val="F47B20"/>
+            </a:solidFill>
+            <a:tailEnd type="triangle"/>
+          </a:ln>
+        </p:spPr>
+        <p:style>
+          <a:lnRef idx="2">
+            <a:schemeClr val="accent1"/>
+          </a:lnRef>
+          <a:fillRef idx="0">
+            <a:schemeClr val="accent1"/>
+          </a:fillRef>
+          <a:effectRef idx="1">
+            <a:schemeClr val="accent1"/>
+          </a:effectRef>
+          <a:fontRef idx="minor">
+            <a:schemeClr val="tx1"/>
+          </a:fontRef>
+        </p:style>
+      </p:cxnSp>
+      <p:sp>
+        <p:nvSpPr>
+          <p:cNvPr id="9" name="Rectangle 8"/>
           <p:cNvSpPr/>
           <p:nvPr/>
         </p:nvSpPr>
         <p:spPr>
           <a:xfrm>
-            <a:off x="0" y="0"/>
-            <a:ext cx="12191695" cy="384048"/>
+            <a:off x="2983229" y="2743200"/>
+            <a:ext cx="1874519" cy="1005840"/>
           </a:xfrm>
           <a:prstGeom prst="rect">
             <a:avLst/>
           </a:prstGeom>
           <a:solidFill>
-            <a:srgbClr val="0B2D5B"/>
+            <a:srgbClr val="FFFFFF"/>
           </a:solidFill>
-          <a:ln>
-            <a:noFill/>
+          <a:ln w="15875">
+            <a:solidFill>
+              <a:srgbClr val="0B2D5B"/>
+            </a:solidFill>
           </a:ln>
           <a:effectLst/>
         </p:spPr>
@@ -6486,14 +8783,14 @@
       </p:sp>
       <p:sp>
         <p:nvSpPr>
-          <p:cNvPr id="3" name="TextBox 2"/>
+          <p:cNvPr id="10" name="TextBox 9"/>
           <p:cNvSpPr txBox="1"/>
           <p:nvPr/>
         </p:nvSpPr>
         <p:spPr>
           <a:xfrm>
-            <a:off x="548640" y="100584"/>
-            <a:ext cx="10972800" cy="274320"/>
+            <a:off x="2983229" y="2743200"/>
+            <a:ext cx="1874519" cy="1005840"/>
           </a:xfrm>
           <a:prstGeom prst="rect">
             <a:avLst/>
@@ -6501,446 +8798,85 @@
           <a:noFill/>
         </p:spPr>
         <p:txBody>
-          <a:bodyPr wrap="square" anchor="t" lIns="0" rIns="0" tIns="0" bIns="0">
+          <a:bodyPr wrap="square" anchor="ctr" lIns="0" rIns="0" tIns="0" bIns="0">
             <a:spAutoFit/>
           </a:bodyPr>
           <a:lstStyle/>
           <a:p>
-            <a:pPr algn="l">
-              <a:spcAft>
-                <a:spcPts val="495"/>
-              </a:spcAft>
-            </a:pPr>
-            <a:r>
-              <a:rPr sz="1100" b="1" i="0">
-                <a:solidFill>
-                  <a:srgbClr val="FFFFFF"/>
-                </a:solidFill>
-                <a:latin typeface="Inter Tight"/>
-              </a:rPr>
-              <a:t>TEACHER PAGE  ·  skipped when you present  ·  Before you teach</a:t>
-            </a:r>
-          </a:p>
-        </p:txBody>
-      </p:sp>
-      <p:sp>
-        <p:nvSpPr>
-          <p:cNvPr id="4" name="TextBox 3"/>
-          <p:cNvSpPr txBox="1"/>
-          <p:nvPr/>
-        </p:nvSpPr>
-        <p:spPr>
-          <a:xfrm>
-            <a:off x="548640" y="685800"/>
-            <a:ext cx="10972800" cy="640080"/>
-          </a:xfrm>
-          <a:prstGeom prst="rect">
-            <a:avLst/>
-          </a:prstGeom>
-          <a:noFill/>
-        </p:spPr>
-        <p:txBody>
-          <a:bodyPr wrap="square" anchor="t" lIns="0" rIns="0" tIns="0" bIns="0">
-            <a:spAutoFit/>
-          </a:bodyPr>
-          <a:lstStyle/>
-          <a:p>
-            <a:pPr algn="l">
-              <a:spcAft>
-                <a:spcPts val="1350"/>
-              </a:spcAft>
-            </a:pPr>
-            <a:r>
-              <a:rPr sz="3000" b="1" i="0">
+            <a:pPr algn="ctr">
+              <a:spcAft>
+                <a:spcPts val="900"/>
+              </a:spcAft>
+            </a:pPr>
+            <a:r>
+              <a:rPr sz="2000" b="1" i="0">
                 <a:solidFill>
                   <a:srgbClr val="1C1B19"/>
                 </a:solidFill>
                 <a:latin typeface="Source Serif 4"/>
               </a:rPr>
-              <a:t>Before you teach</a:t>
-            </a:r>
-          </a:p>
-        </p:txBody>
-      </p:sp>
-      <p:sp>
-        <p:nvSpPr>
-          <p:cNvPr id="5" name="TextBox 4"/>
-          <p:cNvSpPr txBox="1"/>
-          <p:nvPr/>
-        </p:nvSpPr>
-        <p:spPr>
-          <a:xfrm>
-            <a:off x="548640" y="1463040"/>
-            <a:ext cx="5394960" cy="4937760"/>
-          </a:xfrm>
-          <a:prstGeom prst="rect">
-            <a:avLst/>
-          </a:prstGeom>
-          <a:noFill/>
-        </p:spPr>
-        <p:txBody>
-          <a:bodyPr wrap="square" anchor="t" lIns="0" rIns="0" tIns="0" bIns="0">
-            <a:spAutoFit/>
-          </a:bodyPr>
-          <a:lstStyle/>
-          <a:p>
-            <a:pPr algn="l">
-              <a:spcAft>
-                <a:spcPts val="585"/>
-              </a:spcAft>
-            </a:pPr>
-            <a:r>
-              <a:rPr sz="1500" b="1" i="0">
-                <a:solidFill>
-                  <a:srgbClr val="1C1B19"/>
-                </a:solidFill>
-                <a:latin typeface="Source Serif 4"/>
-              </a:rPr>
-              <a:t>Assume all four groups are in the room.</a:t>
-            </a:r>
-          </a:p>
-          <a:p>
-            <a:pPr algn="l">
-              <a:spcAft>
-                <a:spcPts val="585"/>
-              </a:spcAft>
-            </a:pPr>
-            <a:r>
-              <a:rPr sz="1300" b="0" i="0">
-                <a:solidFill>
-                  <a:srgbClr val="1C1B19"/>
-                </a:solidFill>
-                <a:latin typeface="Source Serif 4"/>
-              </a:rPr>
-              <a:t>Students who have never tried it, students who vape now and then, students who are dependent, and students whose parent smokes or vapes. Talk to all four. Don't ask for a show of hands about anyone's use.</a:t>
-            </a:r>
-          </a:p>
-          <a:p>
-            <a:pPr algn="l">
-              <a:spcAft>
-                <a:spcPts val="585"/>
-              </a:spcAft>
-            </a:pPr>
-            <a:r>
-              <a:rPr sz="1300" b="0" i="0">
-                <a:solidFill>
-                  <a:srgbClr val="1C1B19"/>
-                </a:solidFill>
-                <a:latin typeface="Source Serif 4"/>
-              </a:rPr>
-              <a:t/>
-            </a:r>
-          </a:p>
-          <a:p>
-            <a:pPr algn="l">
-              <a:spcAft>
-                <a:spcPts val="585"/>
-              </a:spcAft>
-            </a:pPr>
-            <a:r>
-              <a:rPr sz="1500" b="1" i="0">
-                <a:solidFill>
-                  <a:srgbClr val="1C1B19"/>
-                </a:solidFill>
-                <a:latin typeface="Source Serif 4"/>
-              </a:rPr>
-              <a:t>Keep it factual and calm.</a:t>
-            </a:r>
-          </a:p>
-          <a:p>
-            <a:pPr algn="l">
-              <a:spcAft>
-                <a:spcPts val="585"/>
-              </a:spcAft>
-            </a:pPr>
-            <a:r>
-              <a:rPr sz="1300" b="0" i="0">
-                <a:solidFill>
-                  <a:srgbClr val="1C1B19"/>
-                </a:solidFill>
-                <a:latin typeface="Source Serif 4"/>
-              </a:rPr>
-              <a:t>Teens tune out exaggeration fast, and one overstated claim can cost you the rest of the period. The real facts are strong enough on their own.</a:t>
-            </a:r>
-          </a:p>
-          <a:p>
-            <a:pPr algn="l">
-              <a:spcAft>
-                <a:spcPts val="585"/>
-              </a:spcAft>
-            </a:pPr>
-            <a:r>
-              <a:rPr sz="1300" b="0" i="0">
-                <a:solidFill>
-                  <a:srgbClr val="1C1B19"/>
-                </a:solidFill>
-                <a:latin typeface="Source Serif 4"/>
-              </a:rPr>
-              <a:t/>
-            </a:r>
-          </a:p>
-          <a:p>
-            <a:pPr algn="l">
-              <a:spcAft>
-                <a:spcPts val="585"/>
-              </a:spcAft>
-            </a:pPr>
-            <a:r>
-              <a:rPr sz="1500" b="1" i="0">
-                <a:solidFill>
-                  <a:srgbClr val="1C1B19"/>
-                </a:solidFill>
-                <a:latin typeface="Source Serif 4"/>
-              </a:rPr>
-              <a:t>Know your policy before class.</a:t>
-            </a:r>
-          </a:p>
-          <a:p>
-            <a:pPr algn="l">
-              <a:spcAft>
-                <a:spcPts val="585"/>
-              </a:spcAft>
-            </a:pPr>
-            <a:r>
-              <a:rPr sz="1300" b="0" i="0">
-                <a:solidFill>
-                  <a:srgbClr val="1C1B19"/>
-                </a:solidFill>
-                <a:latin typeface="Source Serif 4"/>
-              </a:rPr>
-              <a:t>If a student says "I'm hooked," thank them and say you want to get them help, not get them in trouble. Know ahead of time what your school does next, and who you'll walk them to (the nurse or a counselor).</a:t>
-            </a:r>
-          </a:p>
-          <a:p>
-            <a:pPr algn="l">
-              <a:spcAft>
-                <a:spcPts val="585"/>
-              </a:spcAft>
-            </a:pPr>
-            <a:r>
-              <a:rPr sz="1300" b="0" i="0">
-                <a:solidFill>
-                  <a:srgbClr val="1C1B19"/>
-                </a:solidFill>
-                <a:latin typeface="Source Serif 4"/>
-              </a:rPr>
-              <a:t/>
-            </a:r>
-          </a:p>
-        </p:txBody>
-      </p:sp>
-      <p:sp>
-        <p:nvSpPr>
-          <p:cNvPr id="6" name="TextBox 5"/>
-          <p:cNvSpPr txBox="1"/>
-          <p:nvPr/>
-        </p:nvSpPr>
-        <p:spPr>
-          <a:xfrm>
-            <a:off x="6217920" y="1463040"/>
-            <a:ext cx="5394960" cy="4937760"/>
-          </a:xfrm>
-          <a:prstGeom prst="rect">
-            <a:avLst/>
-          </a:prstGeom>
-          <a:noFill/>
-        </p:spPr>
-        <p:txBody>
-          <a:bodyPr wrap="square" anchor="t" lIns="0" rIns="0" tIns="0" bIns="0">
-            <a:spAutoFit/>
-          </a:bodyPr>
-          <a:lstStyle/>
-          <a:p>
-            <a:pPr algn="l">
-              <a:spcAft>
-                <a:spcPts val="585"/>
-              </a:spcAft>
-            </a:pPr>
-            <a:r>
-              <a:rPr sz="1500" b="1" i="0">
-                <a:solidFill>
-                  <a:srgbClr val="1C1B19"/>
-                </a:solidFill>
-                <a:latin typeface="Source Serif 4"/>
-              </a:rPr>
-              <a:t>Watch the family angle.</a:t>
-            </a:r>
-          </a:p>
-          <a:p>
-            <a:pPr algn="l">
-              <a:spcAft>
-                <a:spcPts val="585"/>
-              </a:spcAft>
-            </a:pPr>
-            <a:r>
-              <a:rPr sz="1300" b="0" i="0">
-                <a:solidFill>
-                  <a:srgbClr val="1C1B19"/>
-                </a:solidFill>
-                <a:latin typeface="Source Serif 4"/>
-              </a:rPr>
-              <a:t>"Your dad's choice and your choice are different decisions" respects the family. Avoid anything that makes a parent sound foolish. Some students are worried about that parent.</a:t>
-            </a:r>
-          </a:p>
-          <a:p>
-            <a:pPr algn="l">
-              <a:spcAft>
-                <a:spcPts val="585"/>
-              </a:spcAft>
-            </a:pPr>
-            <a:r>
-              <a:rPr sz="1300" b="0" i="0">
-                <a:solidFill>
-                  <a:srgbClr val="1C1B19"/>
-                </a:solidFill>
-                <a:latin typeface="Source Serif 4"/>
-              </a:rPr>
-              <a:t/>
-            </a:r>
-          </a:p>
-          <a:p>
-            <a:pPr algn="l">
-              <a:spcAft>
-                <a:spcPts val="585"/>
-              </a:spcAft>
-            </a:pPr>
-            <a:r>
-              <a:rPr sz="1500" b="1" i="0">
-                <a:solidFill>
-                  <a:srgbClr val="1C1B19"/>
-                </a:solidFill>
-                <a:latin typeface="Source Serif 4"/>
-              </a:rPr>
-              <a:t>THC comes up. Let it.</a:t>
-            </a:r>
-          </a:p>
-          <a:p>
-            <a:pPr algn="l">
-              <a:spcAft>
-                <a:spcPts val="585"/>
-              </a:spcAft>
-            </a:pPr>
-            <a:r>
-              <a:rPr sz="1300" b="0" i="0">
-                <a:solidFill>
-                  <a:srgbClr val="1C1B19"/>
-                </a:solidFill>
-                <a:latin typeface="Source Serif 4"/>
-              </a:rPr>
-              <a:t>Students may ask about weed carts. The lung injury outbreak (EVALI) was mostly tied to THC carts from informal sellers. Stick to that fact, and offer the weed lesson if your school uses it.</a:t>
-            </a:r>
-          </a:p>
-          <a:p>
-            <a:pPr algn="l">
-              <a:spcAft>
-                <a:spcPts val="585"/>
-              </a:spcAft>
-            </a:pPr>
-            <a:r>
-              <a:rPr sz="1300" b="0" i="0">
-                <a:solidFill>
-                  <a:srgbClr val="1C1B19"/>
-                </a:solidFill>
-                <a:latin typeface="Source Serif 4"/>
-              </a:rPr>
-              <a:t/>
-            </a:r>
-          </a:p>
-          <a:p>
-            <a:pPr algn="l">
-              <a:spcAft>
-                <a:spcPts val="585"/>
-              </a:spcAft>
-            </a:pPr>
-            <a:r>
-              <a:rPr sz="1500" b="1" i="0">
-                <a:solidFill>
-                  <a:srgbClr val="1C1B19"/>
-                </a:solidFill>
-                <a:latin typeface="Source Serif 4"/>
-              </a:rPr>
-              <a:t>If someone gets sick after vaping.</a:t>
-            </a:r>
-          </a:p>
-          <a:p>
-            <a:pPr algn="l">
-              <a:spcAft>
-                <a:spcPts val="585"/>
-              </a:spcAft>
-            </a:pPr>
-            <a:r>
-              <a:rPr sz="1300" b="0" i="0">
-                <a:solidFill>
-                  <a:srgbClr val="1C1B19"/>
-                </a:solidFill>
-                <a:latin typeface="Source Serif 4"/>
-              </a:rPr>
-              <a:t>Trouble breathing, chest pain, confusion or passing out is a 911 call. Poison Control is 1-800-222-1222. Vape liquid swallowed by a small child is poisonous.</a:t>
-            </a:r>
-          </a:p>
-          <a:p>
-            <a:pPr algn="l">
-              <a:spcAft>
-                <a:spcPts val="585"/>
-              </a:spcAft>
-            </a:pPr>
-            <a:r>
-              <a:rPr sz="1300" b="0" i="0">
-                <a:solidFill>
-                  <a:srgbClr val="1C1B19"/>
-                </a:solidFill>
-                <a:latin typeface="Source Serif 4"/>
-              </a:rPr>
-              <a:t/>
-            </a:r>
-          </a:p>
-        </p:txBody>
-      </p:sp>
-    </p:spTree>
-  </p:cSld>
-  <p:clrMapOvr>
-    <a:masterClrMapping/>
-  </p:clrMapOvr>
-</p:sld>
-</file>
-
-<file path=ppt/slides/slide3.xml><?xml version="1.0" encoding="utf-8"?>
-<p:sld xmlns:a="http://schemas.openxmlformats.org/drawingml/2006/main" xmlns:p="http://schemas.openxmlformats.org/presentationml/2006/main" xmlns:r="http://schemas.openxmlformats.org/officeDocument/2006/relationships" show="0">
-  <p:cSld>
-    <p:bg>
-      <p:bgPr>
-        <a:solidFill>
-          <a:srgbClr val="EEEBE4"/>
-        </a:solidFill>
-        <a:effectLst/>
-      </p:bgPr>
-    </p:bg>
-    <p:spTree>
-      <p:nvGrpSpPr>
-        <p:cNvPr id="1" name=""/>
-        <p:cNvGrpSpPr/>
-        <p:nvPr/>
-      </p:nvGrpSpPr>
-      <p:grpSpPr/>
-      <p:sp>
-        <p:nvSpPr>
-          <p:cNvPr id="2" name="Rectangle 1"/>
+              <a:t>Hit</a:t>
+            </a:r>
+          </a:p>
+        </p:txBody>
+      </p:sp>
+      <p:cxnSp>
+        <p:nvCxnSpPr>
+          <p:cNvPr id="11" name="Connector 10"/>
+          <p:cNvCxnSpPr/>
+          <p:nvPr/>
+        </p:nvCxnSpPr>
+        <p:spPr>
+          <a:xfrm>
+            <a:off x="4912614" y="3246120"/>
+            <a:ext cx="176022" cy="0"/>
+          </a:xfrm>
+          <a:prstGeom prst="line">
+            <a:avLst/>
+          </a:prstGeom>
+          <a:ln w="31750">
+            <a:solidFill>
+              <a:srgbClr val="F47B20"/>
+            </a:solidFill>
+            <a:tailEnd type="triangle"/>
+          </a:ln>
+        </p:spPr>
+        <p:style>
+          <a:lnRef idx="2">
+            <a:schemeClr val="accent1"/>
+          </a:lnRef>
+          <a:fillRef idx="0">
+            <a:schemeClr val="accent1"/>
+          </a:fillRef>
+          <a:effectRef idx="1">
+            <a:schemeClr val="accent1"/>
+          </a:effectRef>
+          <a:fontRef idx="minor">
+            <a:schemeClr val="tx1"/>
+          </a:fontRef>
+        </p:style>
+      </p:cxnSp>
+      <p:sp>
+        <p:nvSpPr>
+          <p:cNvPr id="12" name="Rectangle 11"/>
           <p:cNvSpPr/>
           <p:nvPr/>
         </p:nvSpPr>
         <p:spPr>
           <a:xfrm>
-            <a:off x="0" y="0"/>
-            <a:ext cx="12191695" cy="384048"/>
+            <a:off x="5143500" y="2743200"/>
+            <a:ext cx="1874519" cy="1005840"/>
           </a:xfrm>
           <a:prstGeom prst="rect">
             <a:avLst/>
           </a:prstGeom>
           <a:solidFill>
-            <a:srgbClr val="0B2D5B"/>
+            <a:srgbClr val="FFFFFF"/>
           </a:solidFill>
-          <a:ln>
-            <a:noFill/>
+          <a:ln w="15875">
+            <a:solidFill>
+              <a:srgbClr val="0B2D5B"/>
+            </a:solidFill>
           </a:ln>
           <a:effectLst/>
         </p:spPr>
@@ -6968,14 +8904,14 @@
       </p:sp>
       <p:sp>
         <p:nvSpPr>
-          <p:cNvPr id="3" name="TextBox 2"/>
+          <p:cNvPr id="13" name="TextBox 12"/>
           <p:cNvSpPr txBox="1"/>
           <p:nvPr/>
         </p:nvSpPr>
         <p:spPr>
           <a:xfrm>
-            <a:off x="548640" y="100584"/>
-            <a:ext cx="10972800" cy="274320"/>
+            <a:off x="5143500" y="2743200"/>
+            <a:ext cx="1874519" cy="1005840"/>
           </a:xfrm>
           <a:prstGeom prst="rect">
             <a:avLst/>
@@ -6983,485 +8919,85 @@
           <a:noFill/>
         </p:spPr>
         <p:txBody>
-          <a:bodyPr wrap="square" anchor="t" lIns="0" rIns="0" tIns="0" bIns="0">
+          <a:bodyPr wrap="square" anchor="ctr" lIns="0" rIns="0" tIns="0" bIns="0">
             <a:spAutoFit/>
           </a:bodyPr>
           <a:lstStyle/>
           <a:p>
-            <a:pPr algn="l">
-              <a:spcAft>
-                <a:spcPts val="495"/>
-              </a:spcAft>
-            </a:pPr>
-            <a:r>
-              <a:rPr sz="1100" b="1" i="0">
-                <a:solidFill>
-                  <a:srgbClr val="FFFFFF"/>
-                </a:solidFill>
-                <a:latin typeface="Inter Tight"/>
-              </a:rPr>
-              <a:t>TEACHER PAGE  ·  skipped when you present  ·  Every student in the room</a:t>
-            </a:r>
-          </a:p>
-        </p:txBody>
-      </p:sp>
-      <p:sp>
-        <p:nvSpPr>
-          <p:cNvPr id="4" name="TextBox 3"/>
-          <p:cNvSpPr txBox="1"/>
-          <p:nvPr/>
-        </p:nvSpPr>
-        <p:spPr>
-          <a:xfrm>
-            <a:off x="548640" y="685800"/>
-            <a:ext cx="10972800" cy="640080"/>
-          </a:xfrm>
-          <a:prstGeom prst="rect">
-            <a:avLst/>
-          </a:prstGeom>
-          <a:noFill/>
-        </p:spPr>
-        <p:txBody>
-          <a:bodyPr wrap="square" anchor="t" lIns="0" rIns="0" tIns="0" bIns="0">
-            <a:spAutoFit/>
-          </a:bodyPr>
-          <a:lstStyle/>
-          <a:p>
-            <a:pPr algn="l">
-              <a:spcAft>
-                <a:spcPts val="1350"/>
-              </a:spcAft>
-            </a:pPr>
-            <a:r>
-              <a:rPr sz="3000" b="1" i="0">
+            <a:pPr algn="ctr">
+              <a:spcAft>
+                <a:spcPts val="900"/>
+              </a:spcAft>
+            </a:pPr>
+            <a:r>
+              <a:rPr sz="2000" b="1" i="0">
                 <a:solidFill>
                   <a:srgbClr val="1C1B19"/>
                 </a:solidFill>
                 <a:latin typeface="Source Serif 4"/>
               </a:rPr>
-              <a:t>Every student in the room</a:t>
-            </a:r>
-          </a:p>
-        </p:txBody>
-      </p:sp>
-      <p:sp>
-        <p:nvSpPr>
-          <p:cNvPr id="5" name="TextBox 4"/>
-          <p:cNvSpPr txBox="1"/>
-          <p:nvPr/>
-        </p:nvSpPr>
-        <p:spPr>
-          <a:xfrm>
-            <a:off x="548640" y="1325880"/>
-            <a:ext cx="10972800" cy="365760"/>
-          </a:xfrm>
-          <a:prstGeom prst="rect">
-            <a:avLst/>
-          </a:prstGeom>
-          <a:noFill/>
-        </p:spPr>
-        <p:txBody>
-          <a:bodyPr wrap="square" anchor="t" lIns="0" rIns="0" tIns="0" bIns="0">
-            <a:spAutoFit/>
-          </a:bodyPr>
-          <a:lstStyle/>
-          <a:p>
-            <a:pPr algn="l">
-              <a:spcAft>
-                <a:spcPts val="630"/>
-              </a:spcAft>
-            </a:pPr>
-            <a:r>
-              <a:rPr sz="1400" b="0" i="0">
-                <a:solidFill>
-                  <a:srgbClr val="5D5A54"/>
-                </a:solidFill>
-                <a:latin typeface="Inter Tight"/>
-              </a:rPr>
-              <a:t>Culture, family, identity, ability and money: what to keep in mind for this topic.</a:t>
-            </a:r>
-          </a:p>
-        </p:txBody>
-      </p:sp>
-      <p:sp>
-        <p:nvSpPr>
-          <p:cNvPr id="6" name="TextBox 5"/>
-          <p:cNvSpPr txBox="1"/>
-          <p:nvPr/>
-        </p:nvSpPr>
-        <p:spPr>
-          <a:xfrm>
-            <a:off x="548640" y="1828800"/>
-            <a:ext cx="5394960" cy="4572000"/>
-          </a:xfrm>
-          <a:prstGeom prst="rect">
-            <a:avLst/>
-          </a:prstGeom>
-          <a:noFill/>
-        </p:spPr>
-        <p:txBody>
-          <a:bodyPr wrap="square" anchor="t" lIns="0" rIns="0" tIns="0" bIns="0">
-            <a:spAutoFit/>
-          </a:bodyPr>
-          <a:lstStyle/>
-          <a:p>
-            <a:pPr algn="l">
-              <a:spcAft>
-                <a:spcPts val="585"/>
-              </a:spcAft>
-            </a:pPr>
-            <a:r>
-              <a:rPr sz="1500" b="1" i="0">
-                <a:solidFill>
-                  <a:srgbClr val="1C1B19"/>
-                </a:solidFill>
-                <a:latin typeface="Source Serif 4"/>
-              </a:rPr>
-              <a:t>Families draw different lines.</a:t>
-            </a:r>
-          </a:p>
-          <a:p>
-            <a:pPr algn="l">
-              <a:spcAft>
-                <a:spcPts val="585"/>
-              </a:spcAft>
-            </a:pPr>
-            <a:r>
-              <a:rPr sz="1300" b="0" i="0">
-                <a:solidFill>
-                  <a:srgbClr val="1C1B19"/>
-                </a:solidFill>
-                <a:latin typeface="Source Serif 4"/>
-              </a:rPr>
-              <a:t>In some homes smoking or vaping is an ordinary adult habit, sometimes tied to culture or community. In others any nicotine is off limits. Teach it as health information, never as a judgment of anyone's family.</a:t>
-            </a:r>
-          </a:p>
-          <a:p>
-            <a:pPr algn="l">
-              <a:spcAft>
-                <a:spcPts val="585"/>
-              </a:spcAft>
-            </a:pPr>
-            <a:r>
-              <a:rPr sz="1300" b="0" i="0">
-                <a:solidFill>
-                  <a:srgbClr val="1C1B19"/>
-                </a:solidFill>
-                <a:latin typeface="Source Serif 4"/>
-              </a:rPr>
-              <a:t/>
-            </a:r>
-          </a:p>
-          <a:p>
-            <a:pPr algn="l">
-              <a:spcAft>
-                <a:spcPts val="585"/>
-              </a:spcAft>
-            </a:pPr>
-            <a:r>
-              <a:rPr sz="1500" b="1" i="0">
-                <a:solidFill>
-                  <a:srgbClr val="1C1B19"/>
-                </a:solidFill>
-                <a:latin typeface="Source Serif 4"/>
-              </a:rPr>
-              <a:t>Marketing has aimed at some groups on purpose.</a:t>
-            </a:r>
-          </a:p>
-          <a:p>
-            <a:pPr algn="l">
-              <a:spcAft>
-                <a:spcPts val="585"/>
-              </a:spcAft>
-            </a:pPr>
-            <a:r>
-              <a:rPr sz="1300" b="0" i="0">
-                <a:solidFill>
-                  <a:srgbClr val="1C1B19"/>
-                </a:solidFill>
-                <a:latin typeface="Source Serif 4"/>
-              </a:rPr>
-              <a:t>Tobacco companies have long marketed menthol heavily in Black communities, and have run campaigns aimed at LGBTQ+ young people. Naming that helps students see the target, not blame each other.</a:t>
-            </a:r>
-          </a:p>
-          <a:p>
-            <a:pPr algn="l">
-              <a:spcAft>
-                <a:spcPts val="585"/>
-              </a:spcAft>
-            </a:pPr>
-            <a:r>
-              <a:rPr sz="1300" b="0" i="0">
-                <a:solidFill>
-                  <a:srgbClr val="1C1B19"/>
-                </a:solidFill>
-                <a:latin typeface="Source Serif 4"/>
-              </a:rPr>
-              <a:t/>
-            </a:r>
-          </a:p>
-          <a:p>
-            <a:pPr algn="l">
-              <a:spcAft>
-                <a:spcPts val="585"/>
-              </a:spcAft>
-            </a:pPr>
-            <a:r>
-              <a:rPr sz="1500" b="1" i="0">
-                <a:solidFill>
-                  <a:srgbClr val="1C1B19"/>
-                </a:solidFill>
-                <a:latin typeface="Source Serif 4"/>
-              </a:rPr>
-              <a:t>Disclosure feels riskier for some students.</a:t>
-            </a:r>
-          </a:p>
-          <a:p>
-            <a:pPr algn="l">
-              <a:spcAft>
-                <a:spcPts val="585"/>
-              </a:spcAft>
-            </a:pPr>
-            <a:r>
-              <a:rPr sz="1300" b="0" i="0">
-                <a:solidFill>
-                  <a:srgbClr val="1C1B19"/>
-                </a:solidFill>
-                <a:latin typeface="Source Serif 4"/>
-              </a:rPr>
-              <a:t>Students from families or communities with more experience of discipline or police may fear what happens if they say "I'm hooked." Say plainly what happens next at your school.</a:t>
-            </a:r>
-          </a:p>
-          <a:p>
-            <a:pPr algn="l">
-              <a:spcAft>
-                <a:spcPts val="585"/>
-              </a:spcAft>
-            </a:pPr>
-            <a:r>
-              <a:rPr sz="1300" b="0" i="0">
-                <a:solidFill>
-                  <a:srgbClr val="1C1B19"/>
-                </a:solidFill>
-                <a:latin typeface="Source Serif 4"/>
-              </a:rPr>
-              <a:t/>
-            </a:r>
-          </a:p>
-        </p:txBody>
-      </p:sp>
-      <p:sp>
-        <p:nvSpPr>
-          <p:cNvPr id="7" name="TextBox 6"/>
-          <p:cNvSpPr txBox="1"/>
-          <p:nvPr/>
-        </p:nvSpPr>
-        <p:spPr>
-          <a:xfrm>
-            <a:off x="6217920" y="1828800"/>
-            <a:ext cx="5394960" cy="4572000"/>
-          </a:xfrm>
-          <a:prstGeom prst="rect">
-            <a:avLst/>
-          </a:prstGeom>
-          <a:noFill/>
-        </p:spPr>
-        <p:txBody>
-          <a:bodyPr wrap="square" anchor="t" lIns="0" rIns="0" tIns="0" bIns="0">
-            <a:spAutoFit/>
-          </a:bodyPr>
-          <a:lstStyle/>
-          <a:p>
-            <a:pPr algn="l">
-              <a:spcAft>
-                <a:spcPts val="585"/>
-              </a:spcAft>
-            </a:pPr>
-            <a:r>
-              <a:rPr sz="1500" b="1" i="0">
-                <a:solidFill>
-                  <a:srgbClr val="1C1B19"/>
-                </a:solidFill>
-                <a:latin typeface="Source Serif 4"/>
-              </a:rPr>
-              <a:t>Some students say it helps them focus.</a:t>
-            </a:r>
-          </a:p>
-          <a:p>
-            <a:pPr algn="l">
-              <a:spcAft>
-                <a:spcPts val="585"/>
-              </a:spcAft>
-            </a:pPr>
-            <a:r>
-              <a:rPr sz="1300" b="0" i="0">
-                <a:solidFill>
-                  <a:srgbClr val="1C1B19"/>
-                </a:solidFill>
-                <a:latin typeface="Source Serif 4"/>
-              </a:rPr>
-              <a:t>Students with ADHD or anxiety sometimes describe vaping as self-medication. Take that seriously and connect them with the nurse or a counselor rather than debating it in front of the class.</a:t>
-            </a:r>
-          </a:p>
-          <a:p>
-            <a:pPr algn="l">
-              <a:spcAft>
-                <a:spcPts val="585"/>
-              </a:spcAft>
-            </a:pPr>
-            <a:r>
-              <a:rPr sz="1300" b="0" i="0">
-                <a:solidFill>
-                  <a:srgbClr val="1C1B19"/>
-                </a:solidFill>
-                <a:latin typeface="Source Serif 4"/>
-              </a:rPr>
-              <a:t/>
-            </a:r>
-          </a:p>
-          <a:p>
-            <a:pPr algn="l">
-              <a:spcAft>
-                <a:spcPts val="585"/>
-              </a:spcAft>
-            </a:pPr>
-            <a:r>
-              <a:rPr sz="1500" b="1" i="0">
-                <a:solidFill>
-                  <a:srgbClr val="1C1B19"/>
-                </a:solidFill>
-                <a:latin typeface="Source Serif 4"/>
-              </a:rPr>
-              <a:t>Cost and language.</a:t>
-            </a:r>
-          </a:p>
-          <a:p>
-            <a:pPr algn="l">
-              <a:spcAft>
-                <a:spcPts val="585"/>
-              </a:spcAft>
-            </a:pPr>
-            <a:r>
-              <a:rPr sz="1300" b="0" i="0">
-                <a:solidFill>
-                  <a:srgbClr val="1C1B19"/>
-                </a:solidFill>
-                <a:latin typeface="Source Serif 4"/>
-              </a:rPr>
-              <a:t>Every support in this lesson is free (the text program, the nurse, a counselor). Some students translate health information for their family; the take-home sheet is written in plain language they can share.</a:t>
-            </a:r>
-          </a:p>
-          <a:p>
-            <a:pPr algn="l">
-              <a:spcAft>
-                <a:spcPts val="585"/>
-              </a:spcAft>
-            </a:pPr>
-            <a:r>
-              <a:rPr sz="1300" b="0" i="0">
-                <a:solidFill>
-                  <a:srgbClr val="1C1B19"/>
-                </a:solidFill>
-                <a:latin typeface="Source Serif 4"/>
-              </a:rPr>
-              <a:t/>
-            </a:r>
-          </a:p>
-          <a:p>
-            <a:pPr algn="l">
-              <a:spcAft>
-                <a:spcPts val="585"/>
-              </a:spcAft>
-            </a:pPr>
-            <a:r>
-              <a:rPr sz="1500" b="1" i="0">
-                <a:solidFill>
-                  <a:srgbClr val="1C1B19"/>
-                </a:solidFill>
-                <a:latin typeface="Source Serif 4"/>
-              </a:rPr>
-              <a:t>Who "family" is.</a:t>
-            </a:r>
-          </a:p>
-          <a:p>
-            <a:pPr algn="l">
-              <a:spcAft>
-                <a:spcPts val="585"/>
-              </a:spcAft>
-            </a:pPr>
-            <a:r>
-              <a:rPr sz="1300" b="0" i="0">
-                <a:solidFill>
-                  <a:srgbClr val="1C1B19"/>
-                </a:solidFill>
-                <a:latin typeface="Source Serif 4"/>
-              </a:rPr>
-              <a:t>The parent scenario works with any adult at home: a grandparent, an aunt, a foster parent. Swap in whoever fits your students.</a:t>
-            </a:r>
-          </a:p>
-          <a:p>
-            <a:pPr algn="l">
-              <a:spcAft>
-                <a:spcPts val="585"/>
-              </a:spcAft>
-            </a:pPr>
-            <a:r>
-              <a:rPr sz="1300" b="0" i="0">
-                <a:solidFill>
-                  <a:srgbClr val="1C1B19"/>
-                </a:solidFill>
-                <a:latin typeface="Source Serif 4"/>
-              </a:rPr>
-              <a:t/>
-            </a:r>
-          </a:p>
-        </p:txBody>
-      </p:sp>
-    </p:spTree>
-  </p:cSld>
-  <p:clrMapOvr>
-    <a:masterClrMapping/>
-  </p:clrMapOvr>
-</p:sld>
-</file>
-
-<file path=ppt/slides/slide4.xml><?xml version="1.0" encoding="utf-8"?>
-<p:sld xmlns:a="http://schemas.openxmlformats.org/drawingml/2006/main" xmlns:p="http://schemas.openxmlformats.org/presentationml/2006/main" xmlns:r="http://schemas.openxmlformats.org/officeDocument/2006/relationships" show="0">
-  <p:cSld>
-    <p:bg>
-      <p:bgPr>
-        <a:solidFill>
-          <a:srgbClr val="EEEBE4"/>
-        </a:solidFill>
-        <a:effectLst/>
-      </p:bgPr>
-    </p:bg>
-    <p:spTree>
-      <p:nvGrpSpPr>
-        <p:cNvPr id="1" name=""/>
-        <p:cNvGrpSpPr/>
-        <p:nvPr/>
-      </p:nvGrpSpPr>
-      <p:grpSpPr/>
-      <p:sp>
-        <p:nvSpPr>
-          <p:cNvPr id="2" name="Rectangle 1"/>
+              <a:t>Relief</a:t>
+            </a:r>
+          </a:p>
+        </p:txBody>
+      </p:sp>
+      <p:cxnSp>
+        <p:nvCxnSpPr>
+          <p:cNvPr id="14" name="Connector 13"/>
+          <p:cNvCxnSpPr/>
+          <p:nvPr/>
+        </p:nvCxnSpPr>
+        <p:spPr>
+          <a:xfrm>
+            <a:off x="7072883" y="3246120"/>
+            <a:ext cx="176023" cy="0"/>
+          </a:xfrm>
+          <a:prstGeom prst="line">
+            <a:avLst/>
+          </a:prstGeom>
+          <a:ln w="31750">
+            <a:solidFill>
+              <a:srgbClr val="F47B20"/>
+            </a:solidFill>
+            <a:tailEnd type="triangle"/>
+          </a:ln>
+        </p:spPr>
+        <p:style>
+          <a:lnRef idx="2">
+            <a:schemeClr val="accent1"/>
+          </a:lnRef>
+          <a:fillRef idx="0">
+            <a:schemeClr val="accent1"/>
+          </a:fillRef>
+          <a:effectRef idx="1">
+            <a:schemeClr val="accent1"/>
+          </a:effectRef>
+          <a:fontRef idx="minor">
+            <a:schemeClr val="tx1"/>
+          </a:fontRef>
+        </p:style>
+      </p:cxnSp>
+      <p:sp>
+        <p:nvSpPr>
+          <p:cNvPr id="15" name="Rectangle 14"/>
           <p:cNvSpPr/>
           <p:nvPr/>
         </p:nvSpPr>
         <p:spPr>
           <a:xfrm>
-            <a:off x="0" y="0"/>
-            <a:ext cx="12191695" cy="384048"/>
+            <a:off x="7303770" y="2743200"/>
+            <a:ext cx="1874519" cy="1005840"/>
           </a:xfrm>
           <a:prstGeom prst="rect">
             <a:avLst/>
           </a:prstGeom>
           <a:solidFill>
-            <a:srgbClr val="0B2D5B"/>
+            <a:srgbClr val="FFFFFF"/>
           </a:solidFill>
-          <a:ln>
-            <a:noFill/>
+          <a:ln w="15875">
+            <a:solidFill>
+              <a:srgbClr val="0B2D5B"/>
+            </a:solidFill>
           </a:ln>
           <a:effectLst/>
         </p:spPr>
@@ -7489,14 +9025,14 @@
       </p:sp>
       <p:sp>
         <p:nvSpPr>
-          <p:cNvPr id="3" name="TextBox 2"/>
+          <p:cNvPr id="16" name="TextBox 15"/>
           <p:cNvSpPr txBox="1"/>
           <p:nvPr/>
         </p:nvSpPr>
         <p:spPr>
           <a:xfrm>
-            <a:off x="548640" y="100584"/>
-            <a:ext cx="10972800" cy="274320"/>
+            <a:off x="7303770" y="2743200"/>
+            <a:ext cx="1874519" cy="1005840"/>
           </a:xfrm>
           <a:prstGeom prst="rect">
             <a:avLst/>
@@ -7504,414 +9040,85 @@
           <a:noFill/>
         </p:spPr>
         <p:txBody>
-          <a:bodyPr wrap="square" anchor="t" lIns="0" rIns="0" tIns="0" bIns="0">
+          <a:bodyPr wrap="square" anchor="ctr" lIns="0" rIns="0" tIns="0" bIns="0">
             <a:spAutoFit/>
           </a:bodyPr>
           <a:lstStyle/>
           <a:p>
-            <a:pPr algn="l">
-              <a:spcAft>
-                <a:spcPts val="495"/>
-              </a:spcAft>
-            </a:pPr>
-            <a:r>
-              <a:rPr sz="1100" b="1" i="0">
-                <a:solidFill>
-                  <a:srgbClr val="FFFFFF"/>
-                </a:solidFill>
-                <a:latin typeface="Inter Tight"/>
-              </a:rPr>
-              <a:t>TEACHER PAGE  ·  skipped when you present  ·  Background</a:t>
-            </a:r>
-          </a:p>
-        </p:txBody>
-      </p:sp>
-      <p:sp>
-        <p:nvSpPr>
-          <p:cNvPr id="4" name="TextBox 3"/>
-          <p:cNvSpPr txBox="1"/>
-          <p:nvPr/>
-        </p:nvSpPr>
-        <p:spPr>
-          <a:xfrm>
-            <a:off x="548640" y="685800"/>
-            <a:ext cx="10972800" cy="640080"/>
-          </a:xfrm>
-          <a:prstGeom prst="rect">
-            <a:avLst/>
-          </a:prstGeom>
-          <a:noFill/>
-        </p:spPr>
-        <p:txBody>
-          <a:bodyPr wrap="square" anchor="t" lIns="0" rIns="0" tIns="0" bIns="0">
-            <a:spAutoFit/>
-          </a:bodyPr>
-          <a:lstStyle/>
-          <a:p>
-            <a:pPr algn="l">
-              <a:spcAft>
-                <a:spcPts val="1350"/>
-              </a:spcAft>
-            </a:pPr>
-            <a:r>
-              <a:rPr sz="3000" b="1" i="0">
+            <a:pPr algn="ctr">
+              <a:spcAft>
+                <a:spcPts val="900"/>
+              </a:spcAft>
+            </a:pPr>
+            <a:r>
+              <a:rPr sz="2000" b="1" i="0">
                 <a:solidFill>
                   <a:srgbClr val="1C1B19"/>
                 </a:solidFill>
                 <a:latin typeface="Source Serif 4"/>
               </a:rPr>
-              <a:t>What the research says</a:t>
-            </a:r>
-          </a:p>
-        </p:txBody>
-      </p:sp>
-      <p:sp>
-        <p:nvSpPr>
-          <p:cNvPr id="5" name="TextBox 4"/>
-          <p:cNvSpPr txBox="1"/>
-          <p:nvPr/>
-        </p:nvSpPr>
-        <p:spPr>
-          <a:xfrm>
-            <a:off x="548640" y="1463040"/>
-            <a:ext cx="5394960" cy="4937760"/>
-          </a:xfrm>
-          <a:prstGeom prst="rect">
-            <a:avLst/>
-          </a:prstGeom>
-          <a:noFill/>
-        </p:spPr>
-        <p:txBody>
-          <a:bodyPr wrap="square" anchor="t" lIns="0" rIns="0" tIns="0" bIns="0">
-            <a:spAutoFit/>
-          </a:bodyPr>
-          <a:lstStyle/>
-          <a:p>
-            <a:pPr algn="l">
-              <a:spcAft>
-                <a:spcPts val="585"/>
-              </a:spcAft>
-            </a:pPr>
-            <a:r>
-              <a:rPr sz="1300" b="0" i="0">
-                <a:solidFill>
-                  <a:srgbClr val="1C1B19"/>
-                </a:solidFill>
-                <a:latin typeface="Source Serif 4"/>
-              </a:rPr>
-              <a:t>In 2024, 7.8% of U.S. high school students had vaped in the past 30 days, the lowest in a decade. Nicotine pouches were the second most used product.</a:t>
-            </a:r>
-          </a:p>
-          <a:p>
-            <a:pPr algn="l">
-              <a:spcAft>
-                <a:spcPts val="585"/>
-              </a:spcAft>
-            </a:pPr>
-            <a:r>
-              <a:rPr sz="1050" b="0" i="0">
-                <a:solidFill>
-                  <a:srgbClr val="5D5A54"/>
-                </a:solidFill>
-                <a:latin typeface="Inter Tight"/>
-              </a:rPr>
-              <a:t>National Youth Tobacco Survey, 2024 (Jamal et al., MMWR)</a:t>
-            </a:r>
-          </a:p>
-          <a:p>
-            <a:pPr algn="l">
-              <a:spcAft>
-                <a:spcPts val="585"/>
-              </a:spcAft>
-            </a:pPr>
-            <a:r>
-              <a:rPr sz="1300" b="0" i="0">
-                <a:solidFill>
-                  <a:srgbClr val="1C1B19"/>
-                </a:solidFill>
-                <a:latin typeface="Source Serif 4"/>
-              </a:rPr>
-              <a:t>Nicotine makes dopamine neurons fire in bursts within seconds. With regular use the brain adds nicotine receptors and needs nicotine to feel normal. Attention and impulse-control circuits are still maturing into the mid-20s.</a:t>
-            </a:r>
-          </a:p>
-          <a:p>
-            <a:pPr algn="l">
-              <a:spcAft>
-                <a:spcPts val="585"/>
-              </a:spcAft>
-            </a:pPr>
-            <a:r>
-              <a:rPr sz="1050" b="0" i="0">
-                <a:solidFill>
-                  <a:srgbClr val="5D5A54"/>
-                </a:solidFill>
-                <a:latin typeface="Inter Tight"/>
-              </a:rPr>
-              <a:t>Surgeon General's report on youth e-cigarette use, 2016</a:t>
-            </a:r>
-          </a:p>
-          <a:p>
-            <a:pPr algn="l">
-              <a:spcAft>
-                <a:spcPts val="585"/>
-              </a:spcAft>
-            </a:pPr>
-            <a:r>
-              <a:rPr sz="1300" b="0" i="0">
-                <a:solidFill>
-                  <a:srgbClr val="1C1B19"/>
-                </a:solidFill>
-                <a:latin typeface="Source Serif 4"/>
-              </a:rPr>
-              <a:t>Nicotine doesn't lower stress overall. Dependent users feel tense as it wears off, and the next dose brings them back to where non-users already are. People who quit report less stress over time.</a:t>
-            </a:r>
-          </a:p>
-          <a:p>
-            <a:pPr algn="l">
-              <a:spcAft>
-                <a:spcPts val="585"/>
-              </a:spcAft>
-            </a:pPr>
-            <a:r>
-              <a:rPr sz="1050" b="0" i="0">
-                <a:solidFill>
-                  <a:srgbClr val="5D5A54"/>
-                </a:solidFill>
-                <a:latin typeface="Inter Tight"/>
-              </a:rPr>
-              <a:t>Parrott, American Psychologist, 1999</a:t>
-            </a:r>
-          </a:p>
-          <a:p>
-            <a:pPr algn="l">
-              <a:spcAft>
-                <a:spcPts val="585"/>
-              </a:spcAft>
-            </a:pPr>
-            <a:r>
-              <a:rPr sz="1300" b="0" i="0">
-                <a:solidFill>
-                  <a:srgbClr val="1C1B19"/>
-                </a:solidFill>
-                <a:latin typeface="Source Serif 4"/>
-              </a:rPr>
-              <a:t>In a study of 681 seventh graders in central Massachusetts, 22% of those who smoked occasionally reported a dependence symptom within four weeks of starting monthly use.</a:t>
-            </a:r>
-          </a:p>
-          <a:p>
-            <a:pPr algn="l">
-              <a:spcAft>
-                <a:spcPts val="585"/>
-              </a:spcAft>
-            </a:pPr>
-            <a:r>
-              <a:rPr sz="1050" b="0" i="0">
-                <a:solidFill>
-                  <a:srgbClr val="5D5A54"/>
-                </a:solidFill>
-                <a:latin typeface="Inter Tight"/>
-              </a:rPr>
-              <a:t>DiFranza et al., Tobacco Control, 2000</a:t>
-            </a:r>
-          </a:p>
-        </p:txBody>
-      </p:sp>
-      <p:sp>
-        <p:nvSpPr>
-          <p:cNvPr id="6" name="TextBox 5"/>
-          <p:cNvSpPr txBox="1"/>
-          <p:nvPr/>
-        </p:nvSpPr>
-        <p:spPr>
-          <a:xfrm>
-            <a:off x="6217920" y="1463040"/>
-            <a:ext cx="5394960" cy="4937760"/>
-          </a:xfrm>
-          <a:prstGeom prst="rect">
-            <a:avLst/>
-          </a:prstGeom>
-          <a:noFill/>
-        </p:spPr>
-        <p:txBody>
-          <a:bodyPr wrap="square" anchor="t" lIns="0" rIns="0" tIns="0" bIns="0">
-            <a:spAutoFit/>
-          </a:bodyPr>
-          <a:lstStyle/>
-          <a:p>
-            <a:pPr algn="l">
-              <a:spcAft>
-                <a:spcPts val="585"/>
-              </a:spcAft>
-            </a:pPr>
-            <a:r>
-              <a:rPr sz="1300" b="0" i="0">
-                <a:solidFill>
-                  <a:srgbClr val="1C1B19"/>
-                </a:solidFill>
-                <a:latin typeface="Source Serif 4"/>
-              </a:rPr>
-              <a:t>Substantial evidence that e-cigarette use raises the risk that young people try cigarettes. Conclusive evidence that vape aerosol has fewer toxicants than cigarette smoke, which matters for an adult smoker who switches completely.</a:t>
-            </a:r>
-          </a:p>
-          <a:p>
-            <a:pPr algn="l">
-              <a:spcAft>
-                <a:spcPts val="585"/>
-              </a:spcAft>
-            </a:pPr>
-            <a:r>
-              <a:rPr sz="1050" b="0" i="0">
-                <a:solidFill>
-                  <a:srgbClr val="5D5A54"/>
-                </a:solidFill>
-                <a:latin typeface="Inter Tight"/>
-              </a:rPr>
-              <a:t>National Academies of Sciences, 2018</a:t>
-            </a:r>
-          </a:p>
-          <a:p>
-            <a:pPr algn="l">
-              <a:spcAft>
-                <a:spcPts val="585"/>
-              </a:spcAft>
-            </a:pPr>
-            <a:r>
-              <a:rPr sz="1300" b="0" i="0">
-                <a:solidFill>
-                  <a:srgbClr val="1C1B19"/>
-                </a:solidFill>
-                <a:latin typeface="Source Serif 4"/>
-              </a:rPr>
-              <a:t>2,807 hospitalizations and 68 deaths from EVALI in 2019 and 2020, mostly tied to vitamin E acetate in THC carts.</a:t>
-            </a:r>
-          </a:p>
-          <a:p>
-            <a:pPr algn="l">
-              <a:spcAft>
-                <a:spcPts val="585"/>
-              </a:spcAft>
-            </a:pPr>
-            <a:r>
-              <a:rPr sz="1050" b="0" i="0">
-                <a:solidFill>
-                  <a:srgbClr val="5D5A54"/>
-                </a:solidFill>
-                <a:latin typeface="Inter Tight"/>
-              </a:rPr>
-              <a:t>CDC, final update, February 2020</a:t>
-            </a:r>
-          </a:p>
-          <a:p>
-            <a:pPr algn="l">
-              <a:spcAft>
-                <a:spcPts val="585"/>
-              </a:spcAft>
-            </a:pPr>
-            <a:r>
-              <a:rPr sz="1300" b="0" i="0">
-                <a:solidFill>
-                  <a:srgbClr val="1C1B19"/>
-                </a:solidFill>
-                <a:latin typeface="Source Serif 4"/>
-              </a:rPr>
-              <a:t>In a trial with 1,503 teens who vaped, 37.8% using the This is Quitting text program had stopped seven months later, compared with 28.0% without it.</a:t>
-            </a:r>
-          </a:p>
-          <a:p>
-            <a:pPr algn="l">
-              <a:spcAft>
-                <a:spcPts val="585"/>
-              </a:spcAft>
-            </a:pPr>
-            <a:r>
-              <a:rPr sz="1050" b="0" i="0">
-                <a:solidFill>
-                  <a:srgbClr val="5D5A54"/>
-                </a:solidFill>
-                <a:latin typeface="Inter Tight"/>
-              </a:rPr>
-              <a:t>Graham et al., JAMA, 2024</a:t>
-            </a:r>
-          </a:p>
-          <a:p>
-            <a:pPr algn="l">
-              <a:spcAft>
-                <a:spcPts val="585"/>
-              </a:spcAft>
-            </a:pPr>
-            <a:r>
-              <a:rPr sz="1300" b="0" i="0">
-                <a:solidFill>
-                  <a:srgbClr val="1C1B19"/>
-                </a:solidFill>
-                <a:latin typeface="Source Serif 4"/>
-              </a:rPr>
-              <a:t>Massachusetts raised the buying age to 21 in 2018 and banned flavored vapes in 2019. Flavored disposables still arrive through illegal imports, often with no reliable label.</a:t>
-            </a:r>
-          </a:p>
-          <a:p>
-            <a:pPr algn="l">
-              <a:spcAft>
-                <a:spcPts val="585"/>
-              </a:spcAft>
-            </a:pPr>
-            <a:r>
-              <a:rPr sz="1050" b="0" i="0">
-                <a:solidFill>
-                  <a:srgbClr val="5D5A54"/>
-                </a:solidFill>
-                <a:latin typeface="Inter Tight"/>
-              </a:rPr>
-              <a:t>Massachusetts law</a:t>
-            </a:r>
-          </a:p>
-        </p:txBody>
-      </p:sp>
-    </p:spTree>
-  </p:cSld>
-  <p:clrMapOvr>
-    <a:masterClrMapping/>
-  </p:clrMapOvr>
-</p:sld>
-</file>
-
-<file path=ppt/slides/slide5.xml><?xml version="1.0" encoding="utf-8"?>
-<p:sld xmlns:a="http://schemas.openxmlformats.org/drawingml/2006/main" xmlns:p="http://schemas.openxmlformats.org/presentationml/2006/main" xmlns:r="http://schemas.openxmlformats.org/officeDocument/2006/relationships">
-  <p:cSld>
-    <p:bg>
-      <p:bgPr>
-        <a:solidFill>
-          <a:srgbClr val="0B2D5B"/>
-        </a:solidFill>
-        <a:effectLst/>
-      </p:bgPr>
-    </p:bg>
-    <p:spTree>
-      <p:nvGrpSpPr>
-        <p:cNvPr id="1" name=""/>
-        <p:cNvGrpSpPr/>
-        <p:nvPr/>
-      </p:nvGrpSpPr>
-      <p:grpSpPr/>
-      <p:sp>
-        <p:nvSpPr>
-          <p:cNvPr id="2" name="Rectangle 1"/>
+              <a:t>Wears off</a:t>
+            </a:r>
+          </a:p>
+        </p:txBody>
+      </p:sp>
+      <p:cxnSp>
+        <p:nvCxnSpPr>
+          <p:cNvPr id="17" name="Connector 16"/>
+          <p:cNvCxnSpPr/>
+          <p:nvPr/>
+        </p:nvCxnSpPr>
+        <p:spPr>
+          <a:xfrm>
+            <a:off x="9233154" y="3246120"/>
+            <a:ext cx="176022" cy="0"/>
+          </a:xfrm>
+          <a:prstGeom prst="line">
+            <a:avLst/>
+          </a:prstGeom>
+          <a:ln w="31750">
+            <a:solidFill>
+              <a:srgbClr val="F47B20"/>
+            </a:solidFill>
+            <a:tailEnd type="triangle"/>
+          </a:ln>
+        </p:spPr>
+        <p:style>
+          <a:lnRef idx="2">
+            <a:schemeClr val="accent1"/>
+          </a:lnRef>
+          <a:fillRef idx="0">
+            <a:schemeClr val="accent1"/>
+          </a:fillRef>
+          <a:effectRef idx="1">
+            <a:schemeClr val="accent1"/>
+          </a:effectRef>
+          <a:fontRef idx="minor">
+            <a:schemeClr val="tx1"/>
+          </a:fontRef>
+        </p:style>
+      </p:cxnSp>
+      <p:sp>
+        <p:nvSpPr>
+          <p:cNvPr id="18" name="Rectangle 17"/>
           <p:cNvSpPr/>
           <p:nvPr/>
         </p:nvSpPr>
         <p:spPr>
           <a:xfrm>
-            <a:off x="548640" y="502920"/>
-            <a:ext cx="457200" cy="54864"/>
+            <a:off x="9464040" y="2743200"/>
+            <a:ext cx="1874519" cy="1005840"/>
           </a:xfrm>
           <a:prstGeom prst="rect">
             <a:avLst/>
           </a:prstGeom>
           <a:solidFill>
-            <a:srgbClr val="F47B20"/>
+            <a:srgbClr val="FFFFFF"/>
           </a:solidFill>
-          <a:ln>
-            <a:noFill/>
+          <a:ln w="15875">
+            <a:solidFill>
+              <a:srgbClr val="0B2D5B"/>
+            </a:solidFill>
           </a:ln>
           <a:effectLst/>
         </p:spPr>
@@ -7939,14 +9146,53 @@
       </p:sp>
       <p:sp>
         <p:nvSpPr>
-          <p:cNvPr id="3" name="TextBox 2"/>
+          <p:cNvPr id="19" name="TextBox 18"/>
           <p:cNvSpPr txBox="1"/>
           <p:nvPr/>
         </p:nvSpPr>
         <p:spPr>
           <a:xfrm>
-            <a:off x="1143000" y="393192"/>
-            <a:ext cx="8229600" cy="274320"/>
+            <a:off x="9464040" y="2743200"/>
+            <a:ext cx="1874519" cy="1005840"/>
+          </a:xfrm>
+          <a:prstGeom prst="rect">
+            <a:avLst/>
+          </a:prstGeom>
+          <a:noFill/>
+        </p:spPr>
+        <p:txBody>
+          <a:bodyPr wrap="square" anchor="ctr" lIns="0" rIns="0" tIns="0" bIns="0">
+            <a:spAutoFit/>
+          </a:bodyPr>
+          <a:lstStyle/>
+          <a:p>
+            <a:pPr algn="ctr">
+              <a:spcAft>
+                <a:spcPts val="900"/>
+              </a:spcAft>
+            </a:pPr>
+            <a:r>
+              <a:rPr sz="2000" b="1" i="0">
+                <a:solidFill>
+                  <a:srgbClr val="1C1B19"/>
+                </a:solidFill>
+                <a:latin typeface="Source Serif 4"/>
+              </a:rPr>
+              <a:t>Craving</a:t>
+            </a:r>
+          </a:p>
+        </p:txBody>
+      </p:sp>
+      <p:sp>
+        <p:nvSpPr>
+          <p:cNvPr id="20" name="TextBox 19"/>
+          <p:cNvSpPr txBox="1"/>
+          <p:nvPr/>
+        </p:nvSpPr>
+        <p:spPr>
+          <a:xfrm>
+            <a:off x="822960" y="4160520"/>
+            <a:ext cx="10515600" cy="457200"/>
           </a:xfrm>
           <a:prstGeom prst="rect">
             <a:avLst/>
@@ -7959,33 +9205,33 @@
           </a:bodyPr>
           <a:lstStyle/>
           <a:p>
-            <a:pPr algn="l">
-              <a:spcAft>
-                <a:spcPts val="540"/>
-              </a:spcAft>
-            </a:pPr>
-            <a:r>
-              <a:rPr sz="1200" b="1" i="0">
-                <a:solidFill>
-                  <a:srgbClr val="5D5A54"/>
+            <a:pPr algn="ctr">
+              <a:spcAft>
+                <a:spcPts val="810"/>
+              </a:spcAft>
+            </a:pPr>
+            <a:r>
+              <a:rPr sz="1800" b="1" i="0">
+                <a:solidFill>
+                  <a:srgbClr val="F47B20"/>
                 </a:solidFill>
                 <a:latin typeface="Inter Tight"/>
               </a:rPr>
-              <a:t>VAPING AND YOUR BRAIN</a:t>
-            </a:r>
-          </a:p>
-        </p:txBody>
-      </p:sp>
-      <p:sp>
-        <p:nvSpPr>
-          <p:cNvPr id="4" name="TextBox 3"/>
+              <a:t>↺  and around again</a:t>
+            </a:r>
+          </a:p>
+        </p:txBody>
+      </p:sp>
+      <p:sp>
+        <p:nvSpPr>
+          <p:cNvPr id="21" name="TextBox 20"/>
           <p:cNvSpPr txBox="1"/>
           <p:nvPr/>
         </p:nvSpPr>
         <p:spPr>
           <a:xfrm>
-            <a:off x="8229600" y="6400800"/>
-            <a:ext cx="3410712" cy="274320"/>
+            <a:off x="822960" y="4846320"/>
+            <a:ext cx="10515600" cy="1188720"/>
           </a:xfrm>
           <a:prstGeom prst="rect">
             <a:avLst/>
@@ -7998,136 +9244,19 @@
           </a:bodyPr>
           <a:lstStyle/>
           <a:p>
-            <a:pPr algn="r">
-              <a:spcAft>
-                <a:spcPts val="450"/>
-              </a:spcAft>
-            </a:pPr>
-            <a:r>
-              <a:rPr sz="1000" b="0" i="0">
+            <a:pPr algn="ctr">
+              <a:spcAft>
+                <a:spcPts val="900"/>
+              </a:spcAft>
+            </a:pPr>
+            <a:r>
+              <a:rPr sz="2000" b="0" i="1">
                 <a:solidFill>
                   <a:srgbClr val="5D5A54"/>
                 </a:solidFill>
-                <a:latin typeface="Inter Tight"/>
-              </a:rPr>
-              <a:t>Beaver Counseling</a:t>
-            </a:r>
-          </a:p>
-        </p:txBody>
-      </p:sp>
-      <p:sp>
-        <p:nvSpPr>
-          <p:cNvPr id="5" name="TextBox 4"/>
-          <p:cNvSpPr txBox="1"/>
-          <p:nvPr/>
-        </p:nvSpPr>
-        <p:spPr>
-          <a:xfrm>
-            <a:off x="822960" y="2011680"/>
-            <a:ext cx="10515600" cy="1463040"/>
-          </a:xfrm>
-          <a:prstGeom prst="rect">
-            <a:avLst/>
-          </a:prstGeom>
-          <a:noFill/>
-        </p:spPr>
-        <p:txBody>
-          <a:bodyPr wrap="square" anchor="b" lIns="0" rIns="0" tIns="0" bIns="0">
-            <a:spAutoFit/>
-          </a:bodyPr>
-          <a:lstStyle/>
-          <a:p>
-            <a:pPr algn="l">
-              <a:spcAft>
-                <a:spcPts val="2700"/>
-              </a:spcAft>
-            </a:pPr>
-            <a:r>
-              <a:rPr sz="6000" b="1" i="0">
-                <a:solidFill>
-                  <a:srgbClr val="FFFFFF"/>
-                </a:solidFill>
-                <a:latin typeface="Source Serif 4"/>
-              </a:rPr>
-              <a:t>Vaping and Your Brain</a:t>
-            </a:r>
-          </a:p>
-        </p:txBody>
-      </p:sp>
-      <p:sp>
-        <p:nvSpPr>
-          <p:cNvPr id="6" name="TextBox 5"/>
-          <p:cNvSpPr txBox="1"/>
-          <p:nvPr/>
-        </p:nvSpPr>
-        <p:spPr>
-          <a:xfrm>
-            <a:off x="822960" y="3611880"/>
-            <a:ext cx="10515600" cy="914400"/>
-          </a:xfrm>
-          <a:prstGeom prst="rect">
-            <a:avLst/>
-          </a:prstGeom>
-          <a:noFill/>
-        </p:spPr>
-        <p:txBody>
-          <a:bodyPr wrap="square" anchor="t" lIns="0" rIns="0" tIns="0" bIns="0">
-            <a:spAutoFit/>
-          </a:bodyPr>
-          <a:lstStyle/>
-          <a:p>
-            <a:pPr algn="l">
-              <a:spcAft>
-                <a:spcPts val="1080"/>
-              </a:spcAft>
-            </a:pPr>
-            <a:r>
-              <a:rPr sz="2400" b="0" i="1">
-                <a:solidFill>
-                  <a:srgbClr val="E8E4DA"/>
-                </a:solidFill>
-                <a:latin typeface="Source Serif 4"/>
-              </a:rPr>
-              <a:t>What nicotine does to a brain that's still building.</a:t>
-            </a:r>
-          </a:p>
-        </p:txBody>
-      </p:sp>
-      <p:sp>
-        <p:nvSpPr>
-          <p:cNvPr id="7" name="TextBox 6"/>
-          <p:cNvSpPr txBox="1"/>
-          <p:nvPr/>
-        </p:nvSpPr>
-        <p:spPr>
-          <a:xfrm>
-            <a:off x="822960" y="6035040"/>
-            <a:ext cx="7315200" cy="365760"/>
-          </a:xfrm>
-          <a:prstGeom prst="rect">
-            <a:avLst/>
-          </a:prstGeom>
-          <a:noFill/>
-        </p:spPr>
-        <p:txBody>
-          <a:bodyPr wrap="square" anchor="t" lIns="0" rIns="0" tIns="0" bIns="0">
-            <a:spAutoFit/>
-          </a:bodyPr>
-          <a:lstStyle/>
-          <a:p>
-            <a:pPr algn="l">
-              <a:spcAft>
-                <a:spcPts val="585"/>
-              </a:spcAft>
-            </a:pPr>
-            <a:r>
-              <a:rPr sz="1300" b="0" i="0">
-                <a:solidFill>
-                  <a:srgbClr val="E8E4DA"/>
-                </a:solidFill>
-                <a:latin typeface="Inter Tight"/>
-              </a:rPr>
-              <a:t>Beaver Upper School · Counseling</a:t>
+                <a:latin typeface="Source Serif 4"/>
+              </a:rPr>
+              <a:t>Dopamine tags the hit as worth repeating, and everything around it gets tagged too.</a:t>
             </a:r>
           </a:p>
         </p:txBody>
@@ -8236,7 +9365,7 @@
                 </a:solidFill>
                 <a:latin typeface="Inter Tight"/>
               </a:rPr>
-              <a:t>MYTH OR FACT?</a:t>
+              <a:t>YOUR TURN</a:t>
             </a:r>
           </a:p>
         </p:txBody>
@@ -8282,14 +9411,97 @@
       </p:sp>
       <p:sp>
         <p:nvSpPr>
-          <p:cNvPr id="5" name="TextBox 4"/>
+          <p:cNvPr id="5" name="Rectangle 4"/>
+          <p:cNvSpPr/>
+          <p:nvPr/>
+        </p:nvSpPr>
+        <p:spPr>
+          <a:xfrm>
+            <a:off x="822960" y="1371600"/>
+            <a:ext cx="73152" cy="3566160"/>
+          </a:xfrm>
+          <a:prstGeom prst="rect">
+            <a:avLst/>
+          </a:prstGeom>
+          <a:solidFill>
+            <a:srgbClr val="F47B20"/>
+          </a:solidFill>
+          <a:ln>
+            <a:noFill/>
+          </a:ln>
+          <a:effectLst/>
+        </p:spPr>
+        <p:style>
+          <a:lnRef idx="1">
+            <a:schemeClr val="accent1"/>
+          </a:lnRef>
+          <a:fillRef idx="3">
+            <a:schemeClr val="accent1"/>
+          </a:fillRef>
+          <a:effectRef idx="2">
+            <a:schemeClr val="accent1"/>
+          </a:effectRef>
+          <a:fontRef idx="minor">
+            <a:schemeClr val="lt1"/>
+          </a:fontRef>
+        </p:style>
+        <p:txBody>
+          <a:bodyPr rtlCol="0" anchor="ctr"/>
+          <a:lstStyle/>
+          <a:p>
+            <a:pPr algn="ctr"/>
+          </a:p>
+        </p:txBody>
+      </p:sp>
+      <p:sp>
+        <p:nvSpPr>
+          <p:cNvPr id="6" name="TextBox 5"/>
           <p:cNvSpPr txBox="1"/>
           <p:nvPr/>
         </p:nvSpPr>
         <p:spPr>
           <a:xfrm>
-            <a:off x="822960" y="1005840"/>
-            <a:ext cx="10515600" cy="1097280"/>
+            <a:off x="1188720" y="1371600"/>
+            <a:ext cx="10058400" cy="3566160"/>
+          </a:xfrm>
+          <a:prstGeom prst="rect">
+            <a:avLst/>
+          </a:prstGeom>
+          <a:noFill/>
+        </p:spPr>
+        <p:txBody>
+          <a:bodyPr wrap="square" anchor="ctr" lIns="0" rIns="0" tIns="0" bIns="0">
+            <a:spAutoFit/>
+          </a:bodyPr>
+          <a:lstStyle/>
+          <a:p>
+            <a:pPr algn="l">
+              <a:spcAft>
+                <a:spcPts val="1800"/>
+              </a:spcAft>
+            </a:pPr>
+            <a:r>
+              <a:rPr sz="4000" b="0" i="1">
+                <a:solidFill>
+                  <a:srgbClr val="1C1B19"/>
+                </a:solidFill>
+                <a:latin typeface="Source Serif 4"/>
+              </a:rPr>
+              <a:t>Where do the cues show up during a school day?</a:t>
+            </a:r>
+          </a:p>
+        </p:txBody>
+      </p:sp>
+      <p:sp>
+        <p:nvSpPr>
+          <p:cNvPr id="7" name="TextBox 6"/>
+          <p:cNvSpPr txBox="1"/>
+          <p:nvPr/>
+        </p:nvSpPr>
+        <p:spPr>
+          <a:xfrm>
+            <a:off x="1188720" y="5120640"/>
+            <a:ext cx="10058400" cy="914400"/>
           </a:xfrm>
           <a:prstGeom prst="rect">
             <a:avLst/>
@@ -8304,407 +9516,17 @@
           <a:p>
             <a:pPr algn="l">
               <a:spcAft>
-                <a:spcPts val="1620"/>
-              </a:spcAft>
-            </a:pPr>
-            <a:r>
-              <a:rPr sz="3600" b="1" i="0">
-                <a:solidFill>
-                  <a:srgbClr val="1C1B19"/>
-                </a:solidFill>
-                <a:latin typeface="Source Serif 4"/>
-              </a:rPr>
-              <a:t>Stand up if you think it's a fact.</a:t>
-            </a:r>
-          </a:p>
-        </p:txBody>
-      </p:sp>
-      <p:sp>
-        <p:nvSpPr>
-          <p:cNvPr id="6" name="TextBox 5"/>
-          <p:cNvSpPr txBox="1"/>
-          <p:nvPr/>
-        </p:nvSpPr>
-        <p:spPr>
-          <a:xfrm>
-            <a:off x="822960" y="2057400"/>
-            <a:ext cx="548640" cy="804672"/>
-          </a:xfrm>
-          <a:prstGeom prst="rect">
-            <a:avLst/>
-          </a:prstGeom>
-          <a:noFill/>
-        </p:spPr>
-        <p:txBody>
-          <a:bodyPr wrap="square" anchor="t" lIns="0" rIns="0" tIns="0" bIns="0">
-            <a:spAutoFit/>
-          </a:bodyPr>
-          <a:lstStyle/>
-          <a:p>
-            <a:pPr algn="l">
-              <a:spcAft>
-                <a:spcPts val="1170"/>
-              </a:spcAft>
-            </a:pPr>
-            <a:r>
-              <a:rPr sz="2600" b="1" i="0">
-                <a:solidFill>
-                  <a:srgbClr val="F47B20"/>
-                </a:solidFill>
-                <a:latin typeface="Source Serif 4"/>
-              </a:rPr>
-              <a:t>1</a:t>
-            </a:r>
-          </a:p>
-        </p:txBody>
-      </p:sp>
-      <p:sp>
-        <p:nvSpPr>
-          <p:cNvPr id="7" name="TextBox 6"/>
-          <p:cNvSpPr txBox="1"/>
-          <p:nvPr/>
-        </p:nvSpPr>
-        <p:spPr>
-          <a:xfrm>
-            <a:off x="1463040" y="2093976"/>
-            <a:ext cx="9875520" cy="804672"/>
-          </a:xfrm>
-          <a:prstGeom prst="rect">
-            <a:avLst/>
-          </a:prstGeom>
-          <a:noFill/>
-        </p:spPr>
-        <p:txBody>
-          <a:bodyPr wrap="square" anchor="t" lIns="0" rIns="0" tIns="0" bIns="0">
-            <a:spAutoFit/>
-          </a:bodyPr>
-          <a:lstStyle/>
-          <a:p>
-            <a:pPr algn="l">
-              <a:spcAft>
-                <a:spcPts val="945"/>
-              </a:spcAft>
-            </a:pPr>
-            <a:r>
-              <a:rPr sz="2100" b="1" i="0">
-                <a:solidFill>
-                  <a:srgbClr val="1C1B19"/>
-                </a:solidFill>
-                <a:latin typeface="Source Serif 4"/>
-              </a:rPr>
-              <a:t>Vaping relieves stress.</a:t>
-            </a:r>
-          </a:p>
-        </p:txBody>
-      </p:sp>
-      <p:sp>
-        <p:nvSpPr>
-          <p:cNvPr id="8" name="TextBox 7"/>
-          <p:cNvSpPr txBox="1"/>
-          <p:nvPr/>
-        </p:nvSpPr>
-        <p:spPr>
-          <a:xfrm>
-            <a:off x="822960" y="2862072"/>
-            <a:ext cx="548640" cy="804672"/>
-          </a:xfrm>
-          <a:prstGeom prst="rect">
-            <a:avLst/>
-          </a:prstGeom>
-          <a:noFill/>
-        </p:spPr>
-        <p:txBody>
-          <a:bodyPr wrap="square" anchor="t" lIns="0" rIns="0" tIns="0" bIns="0">
-            <a:spAutoFit/>
-          </a:bodyPr>
-          <a:lstStyle/>
-          <a:p>
-            <a:pPr algn="l">
-              <a:spcAft>
-                <a:spcPts val="1170"/>
-              </a:spcAft>
-            </a:pPr>
-            <a:r>
-              <a:rPr sz="2600" b="1" i="0">
-                <a:solidFill>
-                  <a:srgbClr val="F47B20"/>
-                </a:solidFill>
-                <a:latin typeface="Source Serif 4"/>
-              </a:rPr>
-              <a:t>2</a:t>
-            </a:r>
-          </a:p>
-        </p:txBody>
-      </p:sp>
-      <p:sp>
-        <p:nvSpPr>
-          <p:cNvPr id="9" name="TextBox 8"/>
-          <p:cNvSpPr txBox="1"/>
-          <p:nvPr/>
-        </p:nvSpPr>
-        <p:spPr>
-          <a:xfrm>
-            <a:off x="1463040" y="2898648"/>
-            <a:ext cx="9875520" cy="804672"/>
-          </a:xfrm>
-          <a:prstGeom prst="rect">
-            <a:avLst/>
-          </a:prstGeom>
-          <a:noFill/>
-        </p:spPr>
-        <p:txBody>
-          <a:bodyPr wrap="square" anchor="t" lIns="0" rIns="0" tIns="0" bIns="0">
-            <a:spAutoFit/>
-          </a:bodyPr>
-          <a:lstStyle/>
-          <a:p>
-            <a:pPr algn="l">
-              <a:spcAft>
-                <a:spcPts val="945"/>
-              </a:spcAft>
-            </a:pPr>
-            <a:r>
-              <a:rPr sz="2100" b="1" i="0">
-                <a:solidFill>
-                  <a:srgbClr val="1C1B19"/>
-                </a:solidFill>
-                <a:latin typeface="Source Serif 4"/>
-              </a:rPr>
-              <a:t>Nicotine pouches aren't addictive because you don't inhale them.</a:t>
-            </a:r>
-          </a:p>
-        </p:txBody>
-      </p:sp>
-      <p:sp>
-        <p:nvSpPr>
-          <p:cNvPr id="10" name="TextBox 9"/>
-          <p:cNvSpPr txBox="1"/>
-          <p:nvPr/>
-        </p:nvSpPr>
-        <p:spPr>
-          <a:xfrm>
-            <a:off x="822960" y="3666744"/>
-            <a:ext cx="548640" cy="804672"/>
-          </a:xfrm>
-          <a:prstGeom prst="rect">
-            <a:avLst/>
-          </a:prstGeom>
-          <a:noFill/>
-        </p:spPr>
-        <p:txBody>
-          <a:bodyPr wrap="square" anchor="t" lIns="0" rIns="0" tIns="0" bIns="0">
-            <a:spAutoFit/>
-          </a:bodyPr>
-          <a:lstStyle/>
-          <a:p>
-            <a:pPr algn="l">
-              <a:spcAft>
-                <a:spcPts val="1170"/>
-              </a:spcAft>
-            </a:pPr>
-            <a:r>
-              <a:rPr sz="2600" b="1" i="0">
-                <a:solidFill>
-                  <a:srgbClr val="F47B20"/>
-                </a:solidFill>
-                <a:latin typeface="Source Serif 4"/>
-              </a:rPr>
-              <a:t>3</a:t>
-            </a:r>
-          </a:p>
-        </p:txBody>
-      </p:sp>
-      <p:sp>
-        <p:nvSpPr>
-          <p:cNvPr id="11" name="TextBox 10"/>
-          <p:cNvSpPr txBox="1"/>
-          <p:nvPr/>
-        </p:nvSpPr>
-        <p:spPr>
-          <a:xfrm>
-            <a:off x="1463040" y="3703320"/>
-            <a:ext cx="9875520" cy="804672"/>
-          </a:xfrm>
-          <a:prstGeom prst="rect">
-            <a:avLst/>
-          </a:prstGeom>
-          <a:noFill/>
-        </p:spPr>
-        <p:txBody>
-          <a:bodyPr wrap="square" anchor="t" lIns="0" rIns="0" tIns="0" bIns="0">
-            <a:spAutoFit/>
-          </a:bodyPr>
-          <a:lstStyle/>
-          <a:p>
-            <a:pPr algn="l">
-              <a:spcAft>
-                <a:spcPts val="945"/>
-              </a:spcAft>
-            </a:pPr>
-            <a:r>
-              <a:rPr sz="2100" b="1" i="0">
-                <a:solidFill>
-                  <a:srgbClr val="1C1B19"/>
-                </a:solidFill>
-                <a:latin typeface="Source Serif 4"/>
-              </a:rPr>
-              <a:t>Some teens show signs of dependence within weeks of starting.</a:t>
-            </a:r>
-          </a:p>
-        </p:txBody>
-      </p:sp>
-      <p:sp>
-        <p:nvSpPr>
-          <p:cNvPr id="12" name="TextBox 11"/>
-          <p:cNvSpPr txBox="1"/>
-          <p:nvPr/>
-        </p:nvSpPr>
-        <p:spPr>
-          <a:xfrm>
-            <a:off x="822960" y="4471416"/>
-            <a:ext cx="548640" cy="804672"/>
-          </a:xfrm>
-          <a:prstGeom prst="rect">
-            <a:avLst/>
-          </a:prstGeom>
-          <a:noFill/>
-        </p:spPr>
-        <p:txBody>
-          <a:bodyPr wrap="square" anchor="t" lIns="0" rIns="0" tIns="0" bIns="0">
-            <a:spAutoFit/>
-          </a:bodyPr>
-          <a:lstStyle/>
-          <a:p>
-            <a:pPr algn="l">
-              <a:spcAft>
-                <a:spcPts val="1170"/>
-              </a:spcAft>
-            </a:pPr>
-            <a:r>
-              <a:rPr sz="2600" b="1" i="0">
-                <a:solidFill>
-                  <a:srgbClr val="F47B20"/>
-                </a:solidFill>
-                <a:latin typeface="Source Serif 4"/>
-              </a:rPr>
-              <a:t>4</a:t>
-            </a:r>
-          </a:p>
-        </p:txBody>
-      </p:sp>
-      <p:sp>
-        <p:nvSpPr>
-          <p:cNvPr id="13" name="TextBox 12"/>
-          <p:cNvSpPr txBox="1"/>
-          <p:nvPr/>
-        </p:nvSpPr>
-        <p:spPr>
-          <a:xfrm>
-            <a:off x="1463040" y="4507992"/>
-            <a:ext cx="9875520" cy="804672"/>
-          </a:xfrm>
-          <a:prstGeom prst="rect">
-            <a:avLst/>
-          </a:prstGeom>
-          <a:noFill/>
-        </p:spPr>
-        <p:txBody>
-          <a:bodyPr wrap="square" anchor="t" lIns="0" rIns="0" tIns="0" bIns="0">
-            <a:spAutoFit/>
-          </a:bodyPr>
-          <a:lstStyle/>
-          <a:p>
-            <a:pPr algn="l">
-              <a:spcAft>
-                <a:spcPts val="945"/>
-              </a:spcAft>
-            </a:pPr>
-            <a:r>
-              <a:rPr sz="2100" b="1" i="0">
-                <a:solidFill>
-                  <a:srgbClr val="1C1B19"/>
-                </a:solidFill>
-                <a:latin typeface="Source Serif 4"/>
-              </a:rPr>
-              <a:t>Vape aerosol has fewer toxic chemicals than cigarette smoke.</a:t>
-            </a:r>
-          </a:p>
-        </p:txBody>
-      </p:sp>
-      <p:sp>
-        <p:nvSpPr>
-          <p:cNvPr id="14" name="TextBox 13"/>
-          <p:cNvSpPr txBox="1"/>
-          <p:nvPr/>
-        </p:nvSpPr>
-        <p:spPr>
-          <a:xfrm>
-            <a:off x="822960" y="5276088"/>
-            <a:ext cx="548640" cy="804672"/>
-          </a:xfrm>
-          <a:prstGeom prst="rect">
-            <a:avLst/>
-          </a:prstGeom>
-          <a:noFill/>
-        </p:spPr>
-        <p:txBody>
-          <a:bodyPr wrap="square" anchor="t" lIns="0" rIns="0" tIns="0" bIns="0">
-            <a:spAutoFit/>
-          </a:bodyPr>
-          <a:lstStyle/>
-          <a:p>
-            <a:pPr algn="l">
-              <a:spcAft>
-                <a:spcPts val="1170"/>
-              </a:spcAft>
-            </a:pPr>
-            <a:r>
-              <a:rPr sz="2600" b="1" i="0">
-                <a:solidFill>
-                  <a:srgbClr val="F47B20"/>
-                </a:solidFill>
-                <a:latin typeface="Source Serif 4"/>
-              </a:rPr>
-              <a:t>5</a:t>
-            </a:r>
-          </a:p>
-        </p:txBody>
-      </p:sp>
-      <p:sp>
-        <p:nvSpPr>
-          <p:cNvPr id="15" name="TextBox 14"/>
-          <p:cNvSpPr txBox="1"/>
-          <p:nvPr/>
-        </p:nvSpPr>
-        <p:spPr>
-          <a:xfrm>
-            <a:off x="1463040" y="5312664"/>
-            <a:ext cx="9875520" cy="804672"/>
-          </a:xfrm>
-          <a:prstGeom prst="rect">
-            <a:avLst/>
-          </a:prstGeom>
-          <a:noFill/>
-        </p:spPr>
-        <p:txBody>
-          <a:bodyPr wrap="square" anchor="t" lIns="0" rIns="0" tIns="0" bIns="0">
-            <a:spAutoFit/>
-          </a:bodyPr>
-          <a:lstStyle/>
-          <a:p>
-            <a:pPr algn="l">
-              <a:spcAft>
-                <a:spcPts val="945"/>
-              </a:spcAft>
-            </a:pPr>
-            <a:r>
-              <a:rPr sz="2100" b="1" i="0">
-                <a:solidFill>
-                  <a:srgbClr val="1C1B19"/>
-                </a:solidFill>
-                <a:latin typeface="Source Serif 4"/>
-              </a:rPr>
-              <a:t>A vape labeled "nicotine free" has no nicotine.</a:t>
+                <a:spcPts val="810"/>
+              </a:spcAft>
+            </a:pPr>
+            <a:r>
+              <a:rPr sz="1800" b="0" i="0">
+                <a:solidFill>
+                  <a:srgbClr val="5D5A54"/>
+                </a:solidFill>
+                <a:latin typeface="Inter Tight"/>
+              </a:rPr>
+              <a:t>One per card. No names. We'll put them on the loop.</a:t>
             </a:r>
           </a:p>
         </p:txBody>
@@ -8813,7 +9635,7 @@
                 </a:solidFill>
                 <a:latin typeface="Inter Tight"/>
               </a:rPr>
-              <a:t>MYTH OR FACT?</a:t>
+              <a:t>THE STRESS TRAP</a:t>
             </a:r>
           </a:p>
         </p:txBody>
@@ -8865,7 +9687,46 @@
         </p:nvSpPr>
         <p:spPr>
           <a:xfrm>
-            <a:off x="822960" y="1005840"/>
+            <a:off x="822960" y="1463040"/>
+            <a:ext cx="10515600" cy="3291840"/>
+          </a:xfrm>
+          <a:prstGeom prst="rect">
+            <a:avLst/>
+          </a:prstGeom>
+          <a:noFill/>
+        </p:spPr>
+        <p:txBody>
+          <a:bodyPr wrap="square" anchor="ctr" lIns="0" rIns="0" tIns="0" bIns="0">
+            <a:spAutoFit/>
+          </a:bodyPr>
+          <a:lstStyle/>
+          <a:p>
+            <a:pPr algn="l">
+              <a:spcAft>
+                <a:spcPts val="2070"/>
+              </a:spcAft>
+            </a:pPr>
+            <a:r>
+              <a:rPr sz="4600" b="1" i="0">
+                <a:solidFill>
+                  <a:srgbClr val="1C1B19"/>
+                </a:solidFill>
+                <a:latin typeface="Source Serif 4"/>
+              </a:rPr>
+              <a:t>It relieves stress it created.</a:t>
+            </a:r>
+          </a:p>
+        </p:txBody>
+      </p:sp>
+      <p:sp>
+        <p:nvSpPr>
+          <p:cNvPr id="6" name="TextBox 5"/>
+          <p:cNvSpPr txBox="1"/>
+          <p:nvPr/>
+        </p:nvSpPr>
+        <p:spPr>
+          <a:xfrm>
+            <a:off x="822960" y="4846320"/>
             <a:ext cx="10515600" cy="1097280"/>
           </a:xfrm>
           <a:prstGeom prst="rect">
@@ -8881,487 +9742,17 @@
           <a:p>
             <a:pPr algn="l">
               <a:spcAft>
-                <a:spcPts val="1620"/>
-              </a:spcAft>
-            </a:pPr>
-            <a:r>
-              <a:rPr sz="3600" b="1" i="0">
-                <a:solidFill>
-                  <a:srgbClr val="1C1B19"/>
-                </a:solidFill>
-                <a:latin typeface="Source Serif 4"/>
-              </a:rPr>
-              <a:t>The answers</a:t>
-            </a:r>
-          </a:p>
-        </p:txBody>
-      </p:sp>
-      <p:sp>
-        <p:nvSpPr>
-          <p:cNvPr id="6" name="TextBox 5"/>
-          <p:cNvSpPr txBox="1"/>
-          <p:nvPr/>
-        </p:nvSpPr>
-        <p:spPr>
-          <a:xfrm>
-            <a:off x="822960" y="2057400"/>
-            <a:ext cx="548640" cy="804672"/>
-          </a:xfrm>
-          <a:prstGeom prst="rect">
-            <a:avLst/>
-          </a:prstGeom>
-          <a:noFill/>
-        </p:spPr>
-        <p:txBody>
-          <a:bodyPr wrap="square" anchor="t" lIns="0" rIns="0" tIns="0" bIns="0">
-            <a:spAutoFit/>
-          </a:bodyPr>
-          <a:lstStyle/>
-          <a:p>
-            <a:pPr algn="l">
-              <a:spcAft>
-                <a:spcPts val="1170"/>
-              </a:spcAft>
-            </a:pPr>
-            <a:r>
-              <a:rPr sz="2600" b="1" i="0">
-                <a:solidFill>
-                  <a:srgbClr val="F47B20"/>
-                </a:solidFill>
-                <a:latin typeface="Source Serif 4"/>
-              </a:rPr>
-              <a:t>1</a:t>
-            </a:r>
-          </a:p>
-        </p:txBody>
-      </p:sp>
-      <p:sp>
-        <p:nvSpPr>
-          <p:cNvPr id="7" name="TextBox 6"/>
-          <p:cNvSpPr txBox="1"/>
-          <p:nvPr/>
-        </p:nvSpPr>
-        <p:spPr>
-          <a:xfrm>
-            <a:off x="1463040" y="2093976"/>
-            <a:ext cx="9875520" cy="804672"/>
-          </a:xfrm>
-          <a:prstGeom prst="rect">
-            <a:avLst/>
-          </a:prstGeom>
-          <a:noFill/>
-        </p:spPr>
-        <p:txBody>
-          <a:bodyPr wrap="square" anchor="t" lIns="0" rIns="0" tIns="0" bIns="0">
-            <a:spAutoFit/>
-          </a:bodyPr>
-          <a:lstStyle/>
-          <a:p>
-            <a:pPr algn="l">
-              <a:spcAft>
-                <a:spcPts val="945"/>
-              </a:spcAft>
-            </a:pPr>
-            <a:r>
-              <a:rPr sz="2100" b="1" i="0">
-                <a:solidFill>
-                  <a:srgbClr val="1C1B19"/>
-                </a:solidFill>
-                <a:latin typeface="Source Serif 4"/>
-              </a:rPr>
-              <a:t>Mostly myth.</a:t>
-            </a:r>
-          </a:p>
-          <a:p>
-            <a:pPr algn="l">
-              <a:spcAft>
-                <a:spcPts val="945"/>
-              </a:spcAft>
-            </a:pPr>
-            <a:r>
-              <a:rPr sz="1600" b="0" i="0">
+                <a:spcPts val="990"/>
+              </a:spcAft>
+            </a:pPr>
+            <a:r>
+              <a:rPr sz="2200" b="0" i="1">
                 <a:solidFill>
                   <a:srgbClr val="5D5A54"/>
                 </a:solidFill>
                 <a:latin typeface="Source Serif 4"/>
               </a:rPr>
-              <a:t>It relieves its own withdrawal. We'll come back to this.</a:t>
-            </a:r>
-          </a:p>
-        </p:txBody>
-      </p:sp>
-      <p:sp>
-        <p:nvSpPr>
-          <p:cNvPr id="8" name="TextBox 7"/>
-          <p:cNvSpPr txBox="1"/>
-          <p:nvPr/>
-        </p:nvSpPr>
-        <p:spPr>
-          <a:xfrm>
-            <a:off x="822960" y="2862072"/>
-            <a:ext cx="548640" cy="804672"/>
-          </a:xfrm>
-          <a:prstGeom prst="rect">
-            <a:avLst/>
-          </a:prstGeom>
-          <a:noFill/>
-        </p:spPr>
-        <p:txBody>
-          <a:bodyPr wrap="square" anchor="t" lIns="0" rIns="0" tIns="0" bIns="0">
-            <a:spAutoFit/>
-          </a:bodyPr>
-          <a:lstStyle/>
-          <a:p>
-            <a:pPr algn="l">
-              <a:spcAft>
-                <a:spcPts val="1170"/>
-              </a:spcAft>
-            </a:pPr>
-            <a:r>
-              <a:rPr sz="2600" b="1" i="0">
-                <a:solidFill>
-                  <a:srgbClr val="F47B20"/>
-                </a:solidFill>
-                <a:latin typeface="Source Serif 4"/>
-              </a:rPr>
-              <a:t>2</a:t>
-            </a:r>
-          </a:p>
-        </p:txBody>
-      </p:sp>
-      <p:sp>
-        <p:nvSpPr>
-          <p:cNvPr id="9" name="TextBox 8"/>
-          <p:cNvSpPr txBox="1"/>
-          <p:nvPr/>
-        </p:nvSpPr>
-        <p:spPr>
-          <a:xfrm>
-            <a:off x="1463040" y="2898648"/>
-            <a:ext cx="9875520" cy="804672"/>
-          </a:xfrm>
-          <a:prstGeom prst="rect">
-            <a:avLst/>
-          </a:prstGeom>
-          <a:noFill/>
-        </p:spPr>
-        <p:txBody>
-          <a:bodyPr wrap="square" anchor="t" lIns="0" rIns="0" tIns="0" bIns="0">
-            <a:spAutoFit/>
-          </a:bodyPr>
-          <a:lstStyle/>
-          <a:p>
-            <a:pPr algn="l">
-              <a:spcAft>
-                <a:spcPts val="945"/>
-              </a:spcAft>
-            </a:pPr>
-            <a:r>
-              <a:rPr sz="2100" b="1" i="0">
-                <a:solidFill>
-                  <a:srgbClr val="1C1B19"/>
-                </a:solidFill>
-                <a:latin typeface="Source Serif 4"/>
-              </a:rPr>
-              <a:t>Myth.</a:t>
-            </a:r>
-          </a:p>
-          <a:p>
-            <a:pPr algn="l">
-              <a:spcAft>
-                <a:spcPts val="945"/>
-              </a:spcAft>
-            </a:pPr>
-            <a:r>
-              <a:rPr sz="1600" b="0" i="0">
-                <a:solidFill>
-                  <a:srgbClr val="5D5A54"/>
-                </a:solidFill>
-                <a:latin typeface="Source Serif 4"/>
-              </a:rPr>
-              <a:t>Same nicotine, same loop.</a:t>
-            </a:r>
-          </a:p>
-        </p:txBody>
-      </p:sp>
-      <p:sp>
-        <p:nvSpPr>
-          <p:cNvPr id="10" name="TextBox 9"/>
-          <p:cNvSpPr txBox="1"/>
-          <p:nvPr/>
-        </p:nvSpPr>
-        <p:spPr>
-          <a:xfrm>
-            <a:off x="822960" y="3666744"/>
-            <a:ext cx="548640" cy="804672"/>
-          </a:xfrm>
-          <a:prstGeom prst="rect">
-            <a:avLst/>
-          </a:prstGeom>
-          <a:noFill/>
-        </p:spPr>
-        <p:txBody>
-          <a:bodyPr wrap="square" anchor="t" lIns="0" rIns="0" tIns="0" bIns="0">
-            <a:spAutoFit/>
-          </a:bodyPr>
-          <a:lstStyle/>
-          <a:p>
-            <a:pPr algn="l">
-              <a:spcAft>
-                <a:spcPts val="1170"/>
-              </a:spcAft>
-            </a:pPr>
-            <a:r>
-              <a:rPr sz="2600" b="1" i="0">
-                <a:solidFill>
-                  <a:srgbClr val="F47B20"/>
-                </a:solidFill>
-                <a:latin typeface="Source Serif 4"/>
-              </a:rPr>
-              <a:t>3</a:t>
-            </a:r>
-          </a:p>
-        </p:txBody>
-      </p:sp>
-      <p:sp>
-        <p:nvSpPr>
-          <p:cNvPr id="11" name="TextBox 10"/>
-          <p:cNvSpPr txBox="1"/>
-          <p:nvPr/>
-        </p:nvSpPr>
-        <p:spPr>
-          <a:xfrm>
-            <a:off x="1463040" y="3703320"/>
-            <a:ext cx="9875520" cy="804672"/>
-          </a:xfrm>
-          <a:prstGeom prst="rect">
-            <a:avLst/>
-          </a:prstGeom>
-          <a:noFill/>
-        </p:spPr>
-        <p:txBody>
-          <a:bodyPr wrap="square" anchor="t" lIns="0" rIns="0" tIns="0" bIns="0">
-            <a:spAutoFit/>
-          </a:bodyPr>
-          <a:lstStyle/>
-          <a:p>
-            <a:pPr algn="l">
-              <a:spcAft>
-                <a:spcPts val="945"/>
-              </a:spcAft>
-            </a:pPr>
-            <a:r>
-              <a:rPr sz="2100" b="1" i="0">
-                <a:solidFill>
-                  <a:srgbClr val="1C1B19"/>
-                </a:solidFill>
-                <a:latin typeface="Source Serif 4"/>
-              </a:rPr>
-              <a:t>Fact.</a:t>
-            </a:r>
-          </a:p>
-          <a:p>
-            <a:pPr algn="l">
-              <a:spcAft>
-                <a:spcPts val="945"/>
-              </a:spcAft>
-            </a:pPr>
-            <a:r>
-              <a:rPr sz="1600" b="0" i="0">
-                <a:solidFill>
-                  <a:srgbClr val="5D5A54"/>
-                </a:solidFill>
-                <a:latin typeface="Source Serif 4"/>
-              </a:rPr>
-              <a:t>In one Massachusetts study, about 1 in 5 occasional users had a symptom within four weeks.</a:t>
-            </a:r>
-          </a:p>
-        </p:txBody>
-      </p:sp>
-      <p:sp>
-        <p:nvSpPr>
-          <p:cNvPr id="12" name="TextBox 11"/>
-          <p:cNvSpPr txBox="1"/>
-          <p:nvPr/>
-        </p:nvSpPr>
-        <p:spPr>
-          <a:xfrm>
-            <a:off x="822960" y="4471416"/>
-            <a:ext cx="548640" cy="804672"/>
-          </a:xfrm>
-          <a:prstGeom prst="rect">
-            <a:avLst/>
-          </a:prstGeom>
-          <a:noFill/>
-        </p:spPr>
-        <p:txBody>
-          <a:bodyPr wrap="square" anchor="t" lIns="0" rIns="0" tIns="0" bIns="0">
-            <a:spAutoFit/>
-          </a:bodyPr>
-          <a:lstStyle/>
-          <a:p>
-            <a:pPr algn="l">
-              <a:spcAft>
-                <a:spcPts val="1170"/>
-              </a:spcAft>
-            </a:pPr>
-            <a:r>
-              <a:rPr sz="2600" b="1" i="0">
-                <a:solidFill>
-                  <a:srgbClr val="F47B20"/>
-                </a:solidFill>
-                <a:latin typeface="Source Serif 4"/>
-              </a:rPr>
-              <a:t>4</a:t>
-            </a:r>
-          </a:p>
-        </p:txBody>
-      </p:sp>
-      <p:sp>
-        <p:nvSpPr>
-          <p:cNvPr id="13" name="TextBox 12"/>
-          <p:cNvSpPr txBox="1"/>
-          <p:nvPr/>
-        </p:nvSpPr>
-        <p:spPr>
-          <a:xfrm>
-            <a:off x="1463040" y="4507992"/>
-            <a:ext cx="9875520" cy="804672"/>
-          </a:xfrm>
-          <a:prstGeom prst="rect">
-            <a:avLst/>
-          </a:prstGeom>
-          <a:noFill/>
-        </p:spPr>
-        <p:txBody>
-          <a:bodyPr wrap="square" anchor="t" lIns="0" rIns="0" tIns="0" bIns="0">
-            <a:spAutoFit/>
-          </a:bodyPr>
-          <a:lstStyle/>
-          <a:p>
-            <a:pPr algn="l">
-              <a:spcAft>
-                <a:spcPts val="945"/>
-              </a:spcAft>
-            </a:pPr>
-            <a:r>
-              <a:rPr sz="2100" b="1" i="0">
-                <a:solidFill>
-                  <a:srgbClr val="1C1B19"/>
-                </a:solidFill>
-                <a:latin typeface="Source Serif 4"/>
-              </a:rPr>
-              <a:t>Fact.</a:t>
-            </a:r>
-          </a:p>
-          <a:p>
-            <a:pPr algn="l">
-              <a:spcAft>
-                <a:spcPts val="945"/>
-              </a:spcAft>
-            </a:pPr>
-            <a:r>
-              <a:rPr sz="1600" b="0" i="0">
-                <a:solidFill>
-                  <a:srgbClr val="5D5A54"/>
-                </a:solidFill>
-                <a:latin typeface="Source Serif 4"/>
-              </a:rPr>
-              <a:t>That's why it can help an adult smoker who switches. For a non-smoker it only adds nicotine.</a:t>
-            </a:r>
-          </a:p>
-        </p:txBody>
-      </p:sp>
-      <p:sp>
-        <p:nvSpPr>
-          <p:cNvPr id="14" name="TextBox 13"/>
-          <p:cNvSpPr txBox="1"/>
-          <p:nvPr/>
-        </p:nvSpPr>
-        <p:spPr>
-          <a:xfrm>
-            <a:off x="822960" y="5276088"/>
-            <a:ext cx="548640" cy="804672"/>
-          </a:xfrm>
-          <a:prstGeom prst="rect">
-            <a:avLst/>
-          </a:prstGeom>
-          <a:noFill/>
-        </p:spPr>
-        <p:txBody>
-          <a:bodyPr wrap="square" anchor="t" lIns="0" rIns="0" tIns="0" bIns="0">
-            <a:spAutoFit/>
-          </a:bodyPr>
-          <a:lstStyle/>
-          <a:p>
-            <a:pPr algn="l">
-              <a:spcAft>
-                <a:spcPts val="1170"/>
-              </a:spcAft>
-            </a:pPr>
-            <a:r>
-              <a:rPr sz="2600" b="1" i="0">
-                <a:solidFill>
-                  <a:srgbClr val="F47B20"/>
-                </a:solidFill>
-                <a:latin typeface="Source Serif 4"/>
-              </a:rPr>
-              <a:t>5</a:t>
-            </a:r>
-          </a:p>
-        </p:txBody>
-      </p:sp>
-      <p:sp>
-        <p:nvSpPr>
-          <p:cNvPr id="15" name="TextBox 14"/>
-          <p:cNvSpPr txBox="1"/>
-          <p:nvPr/>
-        </p:nvSpPr>
-        <p:spPr>
-          <a:xfrm>
-            <a:off x="1463040" y="5312664"/>
-            <a:ext cx="9875520" cy="804672"/>
-          </a:xfrm>
-          <a:prstGeom prst="rect">
-            <a:avLst/>
-          </a:prstGeom>
-          <a:noFill/>
-        </p:spPr>
-        <p:txBody>
-          <a:bodyPr wrap="square" anchor="t" lIns="0" rIns="0" tIns="0" bIns="0">
-            <a:spAutoFit/>
-          </a:bodyPr>
-          <a:lstStyle/>
-          <a:p>
-            <a:pPr algn="l">
-              <a:spcAft>
-                <a:spcPts val="945"/>
-              </a:spcAft>
-            </a:pPr>
-            <a:r>
-              <a:rPr sz="2100" b="1" i="0">
-                <a:solidFill>
-                  <a:srgbClr val="1C1B19"/>
-                </a:solidFill>
-                <a:latin typeface="Source Serif 4"/>
-              </a:rPr>
-              <a:t>Myth.</a:t>
-            </a:r>
-          </a:p>
-          <a:p>
-            <a:pPr algn="l">
-              <a:spcAft>
-                <a:spcPts val="945"/>
-              </a:spcAft>
-            </a:pPr>
-            <a:r>
-              <a:rPr sz="1600" b="0" i="0">
-                <a:solidFill>
-                  <a:srgbClr val="5D5A54"/>
-                </a:solidFill>
-                <a:latin typeface="Source Serif 4"/>
-              </a:rPr>
-              <a:t>Some labeled "nicotine free" have tested positive.</a:t>
+              <a:t>As nicotine wears off you feel edgy and foggy. The next hit fixes that. People who quit feel less stressed over time.</a:t>
             </a:r>
           </a:p>
         </p:txBody>
@@ -9470,7 +9861,7 @@
                 </a:solidFill>
                 <a:latin typeface="Inter Tight"/>
               </a:rPr>
-              <a:t>HOW IT BUILDS</a:t>
+              <a:t>THREE MOMENTS</a:t>
             </a:r>
           </a:p>
         </p:txBody>
@@ -9548,7 +9939,7 @@
                 </a:solidFill>
                 <a:latin typeface="Source Serif 4"/>
               </a:rPr>
-              <a:t>The loop nicotine plugs into</a:t>
+              <a:t>What would you say or do?</a:t>
             </a:r>
           </a:p>
         </p:txBody>
@@ -9561,8 +9952,8 @@
         </p:nvSpPr>
         <p:spPr>
           <a:xfrm>
-            <a:off x="822960" y="2743200"/>
-            <a:ext cx="1874519" cy="1005840"/>
+            <a:off x="822960" y="2103120"/>
+            <a:ext cx="3322320" cy="3840480"/>
           </a:xfrm>
           <a:prstGeom prst="rect">
             <a:avLst/>
@@ -9572,7 +9963,7 @@
           </a:solidFill>
           <a:ln w="15875">
             <a:solidFill>
-              <a:srgbClr val="0B2D5B"/>
+              <a:srgbClr val="D8D2C6"/>
             </a:solidFill>
           </a:ln>
           <a:effectLst/>
@@ -9607,8 +9998,8 @@
         </p:nvSpPr>
         <p:spPr>
           <a:xfrm>
-            <a:off x="822960" y="2743200"/>
-            <a:ext cx="1874519" cy="1005840"/>
+            <a:off x="1051560" y="2286000"/>
+            <a:ext cx="2865120" cy="365760"/>
           </a:xfrm>
           <a:prstGeom prst="rect">
             <a:avLst/>
@@ -9616,64 +10007,67 @@
           <a:noFill/>
         </p:spPr>
         <p:txBody>
-          <a:bodyPr wrap="square" anchor="ctr" lIns="0" rIns="0" tIns="0" bIns="0">
+          <a:bodyPr wrap="square" anchor="t" lIns="0" rIns="0" tIns="0" bIns="0">
             <a:spAutoFit/>
           </a:bodyPr>
           <a:lstStyle/>
           <a:p>
-            <a:pPr algn="ctr">
-              <a:spcAft>
-                <a:spcPts val="900"/>
-              </a:spcAft>
-            </a:pPr>
-            <a:r>
-              <a:rPr sz="2000" b="1" i="0">
+            <a:pPr algn="l">
+              <a:spcAft>
+                <a:spcPts val="585"/>
+              </a:spcAft>
+            </a:pPr>
+            <a:r>
+              <a:rPr sz="1300" b="1" i="0">
+                <a:solidFill>
+                  <a:srgbClr val="0B2D5B"/>
+                </a:solidFill>
+                <a:latin typeface="Inter Tight"/>
+              </a:rPr>
+              <a:t>LUCAS</a:t>
+            </a:r>
+          </a:p>
+        </p:txBody>
+      </p:sp>
+      <p:sp>
+        <p:nvSpPr>
+          <p:cNvPr id="8" name="TextBox 7"/>
+          <p:cNvSpPr txBox="1"/>
+          <p:nvPr/>
+        </p:nvSpPr>
+        <p:spPr>
+          <a:xfrm>
+            <a:off x="1051560" y="2743200"/>
+            <a:ext cx="2865120" cy="3017520"/>
+          </a:xfrm>
+          <a:prstGeom prst="rect">
+            <a:avLst/>
+          </a:prstGeom>
+          <a:noFill/>
+        </p:spPr>
+        <p:txBody>
+          <a:bodyPr wrap="square" anchor="t" lIns="0" rIns="0" tIns="0" bIns="0">
+            <a:spAutoFit/>
+          </a:bodyPr>
+          <a:lstStyle/>
+          <a:p>
+            <a:pPr algn="l">
+              <a:spcAft>
+                <a:spcPts val="810"/>
+              </a:spcAft>
+            </a:pPr>
+            <a:r>
+              <a:rPr sz="1800" b="0" i="0">
                 <a:solidFill>
                   <a:srgbClr val="1C1B19"/>
                 </a:solidFill>
                 <a:latin typeface="Source Serif 4"/>
               </a:rPr>
-              <a:t>Cue</a:t>
-            </a:r>
-          </a:p>
-        </p:txBody>
-      </p:sp>
-      <p:cxnSp>
-        <p:nvCxnSpPr>
-          <p:cNvPr id="8" name="Connector 7"/>
-          <p:cNvCxnSpPr/>
-          <p:nvPr/>
-        </p:nvCxnSpPr>
-        <p:spPr>
-          <a:xfrm>
-            <a:off x="2752344" y="3246120"/>
-            <a:ext cx="176021" cy="0"/>
-          </a:xfrm>
-          <a:prstGeom prst="line">
-            <a:avLst/>
-          </a:prstGeom>
-          <a:ln w="31750">
-            <a:solidFill>
-              <a:srgbClr val="F47B20"/>
-            </a:solidFill>
-            <a:tailEnd type="triangle"/>
-          </a:ln>
-        </p:spPr>
-        <p:style>
-          <a:lnRef idx="2">
-            <a:schemeClr val="accent1"/>
-          </a:lnRef>
-          <a:fillRef idx="0">
-            <a:schemeClr val="accent1"/>
-          </a:fillRef>
-          <a:effectRef idx="1">
-            <a:schemeClr val="accent1"/>
-          </a:effectRef>
-          <a:fontRef idx="minor">
-            <a:schemeClr val="tx1"/>
-          </a:fontRef>
-        </p:style>
-      </p:cxnSp>
+              <a:t>Hits his vape between every class. During a two-hour practice SAT he gets shaky, can't focus, and leaves early.</a:t>
+            </a:r>
+          </a:p>
+        </p:txBody>
+      </p:sp>
       <p:sp>
         <p:nvSpPr>
           <p:cNvPr id="9" name="Rectangle 8"/>
@@ -9682,8 +10076,8 @@
         </p:nvSpPr>
         <p:spPr>
           <a:xfrm>
-            <a:off x="2983229" y="2743200"/>
-            <a:ext cx="1874519" cy="1005840"/>
+            <a:off x="4419600" y="2103120"/>
+            <a:ext cx="3322320" cy="3840480"/>
           </a:xfrm>
           <a:prstGeom prst="rect">
             <a:avLst/>
@@ -9693,7 +10087,7 @@
           </a:solidFill>
           <a:ln w="15875">
             <a:solidFill>
-              <a:srgbClr val="0B2D5B"/>
+              <a:srgbClr val="D8D2C6"/>
             </a:solidFill>
           </a:ln>
           <a:effectLst/>
@@ -9728,8 +10122,8 @@
         </p:nvSpPr>
         <p:spPr>
           <a:xfrm>
-            <a:off x="2983229" y="2743200"/>
-            <a:ext cx="1874519" cy="1005840"/>
+            <a:off x="4648200" y="2286000"/>
+            <a:ext cx="2865120" cy="365760"/>
           </a:xfrm>
           <a:prstGeom prst="rect">
             <a:avLst/>
@@ -9737,64 +10131,67 @@
           <a:noFill/>
         </p:spPr>
         <p:txBody>
-          <a:bodyPr wrap="square" anchor="ctr" lIns="0" rIns="0" tIns="0" bIns="0">
+          <a:bodyPr wrap="square" anchor="t" lIns="0" rIns="0" tIns="0" bIns="0">
             <a:spAutoFit/>
           </a:bodyPr>
           <a:lstStyle/>
           <a:p>
-            <a:pPr algn="ctr">
-              <a:spcAft>
-                <a:spcPts val="900"/>
-              </a:spcAft>
-            </a:pPr>
-            <a:r>
-              <a:rPr sz="2000" b="1" i="0">
+            <a:pPr algn="l">
+              <a:spcAft>
+                <a:spcPts val="585"/>
+              </a:spcAft>
+            </a:pPr>
+            <a:r>
+              <a:rPr sz="1300" b="1" i="0">
+                <a:solidFill>
+                  <a:srgbClr val="0B2D5B"/>
+                </a:solidFill>
+                <a:latin typeface="Inter Tight"/>
+              </a:rPr>
+              <a:t>IMANI</a:t>
+            </a:r>
+          </a:p>
+        </p:txBody>
+      </p:sp>
+      <p:sp>
+        <p:nvSpPr>
+          <p:cNvPr id="11" name="TextBox 10"/>
+          <p:cNvSpPr txBox="1"/>
+          <p:nvPr/>
+        </p:nvSpPr>
+        <p:spPr>
+          <a:xfrm>
+            <a:off x="4648200" y="2743200"/>
+            <a:ext cx="2865120" cy="3017520"/>
+          </a:xfrm>
+          <a:prstGeom prst="rect">
+            <a:avLst/>
+          </a:prstGeom>
+          <a:noFill/>
+        </p:spPr>
+        <p:txBody>
+          <a:bodyPr wrap="square" anchor="t" lIns="0" rIns="0" tIns="0" bIns="0">
+            <a:spAutoFit/>
+          </a:bodyPr>
+          <a:lstStyle/>
+          <a:p>
+            <a:pPr algn="l">
+              <a:spcAft>
+                <a:spcPts val="810"/>
+              </a:spcAft>
+            </a:pPr>
+            <a:r>
+              <a:rPr sz="1800" b="0" i="0">
                 <a:solidFill>
                   <a:srgbClr val="1C1B19"/>
                 </a:solidFill>
                 <a:latin typeface="Source Serif 4"/>
               </a:rPr>
-              <a:t>Hit</a:t>
-            </a:r>
-          </a:p>
-        </p:txBody>
-      </p:sp>
-      <p:cxnSp>
-        <p:nvCxnSpPr>
-          <p:cNvPr id="11" name="Connector 10"/>
-          <p:cNvCxnSpPr/>
-          <p:nvPr/>
-        </p:nvCxnSpPr>
-        <p:spPr>
-          <a:xfrm>
-            <a:off x="4912614" y="3246120"/>
-            <a:ext cx="176022" cy="0"/>
-          </a:xfrm>
-          <a:prstGeom prst="line">
-            <a:avLst/>
-          </a:prstGeom>
-          <a:ln w="31750">
-            <a:solidFill>
-              <a:srgbClr val="F47B20"/>
-            </a:solidFill>
-            <a:tailEnd type="triangle"/>
-          </a:ln>
-        </p:spPr>
-        <p:style>
-          <a:lnRef idx="2">
-            <a:schemeClr val="accent1"/>
-          </a:lnRef>
-          <a:fillRef idx="0">
-            <a:schemeClr val="accent1"/>
-          </a:fillRef>
-          <a:effectRef idx="1">
-            <a:schemeClr val="accent1"/>
-          </a:effectRef>
-          <a:fontRef idx="minor">
-            <a:schemeClr val="tx1"/>
-          </a:fontRef>
-        </p:style>
-      </p:cxnSp>
+              <a:t>Switched from vaping to nicotine pouches. "It's not vaping, so I quit," she says.</a:t>
+            </a:r>
+          </a:p>
+        </p:txBody>
+      </p:sp>
       <p:sp>
         <p:nvSpPr>
           <p:cNvPr id="12" name="Rectangle 11"/>
@@ -9803,8 +10200,8 @@
         </p:nvSpPr>
         <p:spPr>
           <a:xfrm>
-            <a:off x="5143500" y="2743200"/>
-            <a:ext cx="1874519" cy="1005840"/>
+            <a:off x="8016239" y="2103120"/>
+            <a:ext cx="3322320" cy="3840480"/>
           </a:xfrm>
           <a:prstGeom prst="rect">
             <a:avLst/>
@@ -9814,7 +10211,7 @@
           </a:solidFill>
           <a:ln w="15875">
             <a:solidFill>
-              <a:srgbClr val="0B2D5B"/>
+              <a:srgbClr val="D8D2C6"/>
             </a:solidFill>
           </a:ln>
           <a:effectLst/>
@@ -9849,289 +10246,8 @@
         </p:nvSpPr>
         <p:spPr>
           <a:xfrm>
-            <a:off x="5143500" y="2743200"/>
-            <a:ext cx="1874519" cy="1005840"/>
-          </a:xfrm>
-          <a:prstGeom prst="rect">
-            <a:avLst/>
-          </a:prstGeom>
-          <a:noFill/>
-        </p:spPr>
-        <p:txBody>
-          <a:bodyPr wrap="square" anchor="ctr" lIns="0" rIns="0" tIns="0" bIns="0">
-            <a:spAutoFit/>
-          </a:bodyPr>
-          <a:lstStyle/>
-          <a:p>
-            <a:pPr algn="ctr">
-              <a:spcAft>
-                <a:spcPts val="900"/>
-              </a:spcAft>
-            </a:pPr>
-            <a:r>
-              <a:rPr sz="2000" b="1" i="0">
-                <a:solidFill>
-                  <a:srgbClr val="1C1B19"/>
-                </a:solidFill>
-                <a:latin typeface="Source Serif 4"/>
-              </a:rPr>
-              <a:t>Relief</a:t>
-            </a:r>
-          </a:p>
-        </p:txBody>
-      </p:sp>
-      <p:cxnSp>
-        <p:nvCxnSpPr>
-          <p:cNvPr id="14" name="Connector 13"/>
-          <p:cNvCxnSpPr/>
-          <p:nvPr/>
-        </p:nvCxnSpPr>
-        <p:spPr>
-          <a:xfrm>
-            <a:off x="7072883" y="3246120"/>
-            <a:ext cx="176023" cy="0"/>
-          </a:xfrm>
-          <a:prstGeom prst="line">
-            <a:avLst/>
-          </a:prstGeom>
-          <a:ln w="31750">
-            <a:solidFill>
-              <a:srgbClr val="F47B20"/>
-            </a:solidFill>
-            <a:tailEnd type="triangle"/>
-          </a:ln>
-        </p:spPr>
-        <p:style>
-          <a:lnRef idx="2">
-            <a:schemeClr val="accent1"/>
-          </a:lnRef>
-          <a:fillRef idx="0">
-            <a:schemeClr val="accent1"/>
-          </a:fillRef>
-          <a:effectRef idx="1">
-            <a:schemeClr val="accent1"/>
-          </a:effectRef>
-          <a:fontRef idx="minor">
-            <a:schemeClr val="tx1"/>
-          </a:fontRef>
-        </p:style>
-      </p:cxnSp>
-      <p:sp>
-        <p:nvSpPr>
-          <p:cNvPr id="15" name="Rectangle 14"/>
-          <p:cNvSpPr/>
-          <p:nvPr/>
-        </p:nvSpPr>
-        <p:spPr>
-          <a:xfrm>
-            <a:off x="7303770" y="2743200"/>
-            <a:ext cx="1874519" cy="1005840"/>
-          </a:xfrm>
-          <a:prstGeom prst="rect">
-            <a:avLst/>
-          </a:prstGeom>
-          <a:solidFill>
-            <a:srgbClr val="FFFFFF"/>
-          </a:solidFill>
-          <a:ln w="15875">
-            <a:solidFill>
-              <a:srgbClr val="0B2D5B"/>
-            </a:solidFill>
-          </a:ln>
-          <a:effectLst/>
-        </p:spPr>
-        <p:style>
-          <a:lnRef idx="1">
-            <a:schemeClr val="accent1"/>
-          </a:lnRef>
-          <a:fillRef idx="3">
-            <a:schemeClr val="accent1"/>
-          </a:fillRef>
-          <a:effectRef idx="2">
-            <a:schemeClr val="accent1"/>
-          </a:effectRef>
-          <a:fontRef idx="minor">
-            <a:schemeClr val="lt1"/>
-          </a:fontRef>
-        </p:style>
-        <p:txBody>
-          <a:bodyPr rtlCol="0" anchor="ctr"/>
-          <a:lstStyle/>
-          <a:p>
-            <a:pPr algn="ctr"/>
-          </a:p>
-        </p:txBody>
-      </p:sp>
-      <p:sp>
-        <p:nvSpPr>
-          <p:cNvPr id="16" name="TextBox 15"/>
-          <p:cNvSpPr txBox="1"/>
-          <p:nvPr/>
-        </p:nvSpPr>
-        <p:spPr>
-          <a:xfrm>
-            <a:off x="7303770" y="2743200"/>
-            <a:ext cx="1874519" cy="1005840"/>
-          </a:xfrm>
-          <a:prstGeom prst="rect">
-            <a:avLst/>
-          </a:prstGeom>
-          <a:noFill/>
-        </p:spPr>
-        <p:txBody>
-          <a:bodyPr wrap="square" anchor="ctr" lIns="0" rIns="0" tIns="0" bIns="0">
-            <a:spAutoFit/>
-          </a:bodyPr>
-          <a:lstStyle/>
-          <a:p>
-            <a:pPr algn="ctr">
-              <a:spcAft>
-                <a:spcPts val="900"/>
-              </a:spcAft>
-            </a:pPr>
-            <a:r>
-              <a:rPr sz="2000" b="1" i="0">
-                <a:solidFill>
-                  <a:srgbClr val="1C1B19"/>
-                </a:solidFill>
-                <a:latin typeface="Source Serif 4"/>
-              </a:rPr>
-              <a:t>Wears off</a:t>
-            </a:r>
-          </a:p>
-        </p:txBody>
-      </p:sp>
-      <p:cxnSp>
-        <p:nvCxnSpPr>
-          <p:cNvPr id="17" name="Connector 16"/>
-          <p:cNvCxnSpPr/>
-          <p:nvPr/>
-        </p:nvCxnSpPr>
-        <p:spPr>
-          <a:xfrm>
-            <a:off x="9233154" y="3246120"/>
-            <a:ext cx="176022" cy="0"/>
-          </a:xfrm>
-          <a:prstGeom prst="line">
-            <a:avLst/>
-          </a:prstGeom>
-          <a:ln w="31750">
-            <a:solidFill>
-              <a:srgbClr val="F47B20"/>
-            </a:solidFill>
-            <a:tailEnd type="triangle"/>
-          </a:ln>
-        </p:spPr>
-        <p:style>
-          <a:lnRef idx="2">
-            <a:schemeClr val="accent1"/>
-          </a:lnRef>
-          <a:fillRef idx="0">
-            <a:schemeClr val="accent1"/>
-          </a:fillRef>
-          <a:effectRef idx="1">
-            <a:schemeClr val="accent1"/>
-          </a:effectRef>
-          <a:fontRef idx="minor">
-            <a:schemeClr val="tx1"/>
-          </a:fontRef>
-        </p:style>
-      </p:cxnSp>
-      <p:sp>
-        <p:nvSpPr>
-          <p:cNvPr id="18" name="Rectangle 17"/>
-          <p:cNvSpPr/>
-          <p:nvPr/>
-        </p:nvSpPr>
-        <p:spPr>
-          <a:xfrm>
-            <a:off x="9464040" y="2743200"/>
-            <a:ext cx="1874519" cy="1005840"/>
-          </a:xfrm>
-          <a:prstGeom prst="rect">
-            <a:avLst/>
-          </a:prstGeom>
-          <a:solidFill>
-            <a:srgbClr val="FFFFFF"/>
-          </a:solidFill>
-          <a:ln w="15875">
-            <a:solidFill>
-              <a:srgbClr val="0B2D5B"/>
-            </a:solidFill>
-          </a:ln>
-          <a:effectLst/>
-        </p:spPr>
-        <p:style>
-          <a:lnRef idx="1">
-            <a:schemeClr val="accent1"/>
-          </a:lnRef>
-          <a:fillRef idx="3">
-            <a:schemeClr val="accent1"/>
-          </a:fillRef>
-          <a:effectRef idx="2">
-            <a:schemeClr val="accent1"/>
-          </a:effectRef>
-          <a:fontRef idx="minor">
-            <a:schemeClr val="lt1"/>
-          </a:fontRef>
-        </p:style>
-        <p:txBody>
-          <a:bodyPr rtlCol="0" anchor="ctr"/>
-          <a:lstStyle/>
-          <a:p>
-            <a:pPr algn="ctr"/>
-          </a:p>
-        </p:txBody>
-      </p:sp>
-      <p:sp>
-        <p:nvSpPr>
-          <p:cNvPr id="19" name="TextBox 18"/>
-          <p:cNvSpPr txBox="1"/>
-          <p:nvPr/>
-        </p:nvSpPr>
-        <p:spPr>
-          <a:xfrm>
-            <a:off x="9464040" y="2743200"/>
-            <a:ext cx="1874519" cy="1005840"/>
-          </a:xfrm>
-          <a:prstGeom prst="rect">
-            <a:avLst/>
-          </a:prstGeom>
-          <a:noFill/>
-        </p:spPr>
-        <p:txBody>
-          <a:bodyPr wrap="square" anchor="ctr" lIns="0" rIns="0" tIns="0" bIns="0">
-            <a:spAutoFit/>
-          </a:bodyPr>
-          <a:lstStyle/>
-          <a:p>
-            <a:pPr algn="ctr">
-              <a:spcAft>
-                <a:spcPts val="900"/>
-              </a:spcAft>
-            </a:pPr>
-            <a:r>
-              <a:rPr sz="2000" b="1" i="0">
-                <a:solidFill>
-                  <a:srgbClr val="1C1B19"/>
-                </a:solidFill>
-                <a:latin typeface="Source Serif 4"/>
-              </a:rPr>
-              <a:t>Craving</a:t>
-            </a:r>
-          </a:p>
-        </p:txBody>
-      </p:sp>
-      <p:sp>
-        <p:nvSpPr>
-          <p:cNvPr id="20" name="TextBox 19"/>
-          <p:cNvSpPr txBox="1"/>
-          <p:nvPr/>
-        </p:nvSpPr>
-        <p:spPr>
-          <a:xfrm>
-            <a:off x="822960" y="4160520"/>
-            <a:ext cx="10515600" cy="457200"/>
+            <a:off x="8244839" y="2286000"/>
+            <a:ext cx="2865120" cy="365760"/>
           </a:xfrm>
           <a:prstGeom prst="rect">
             <a:avLst/>
@@ -10144,33 +10260,33 @@
           </a:bodyPr>
           <a:lstStyle/>
           <a:p>
-            <a:pPr algn="ctr">
-              <a:spcAft>
-                <a:spcPts val="810"/>
-              </a:spcAft>
-            </a:pPr>
-            <a:r>
-              <a:rPr sz="1800" b="1" i="0">
-                <a:solidFill>
-                  <a:srgbClr val="F47B20"/>
+            <a:pPr algn="l">
+              <a:spcAft>
+                <a:spcPts val="585"/>
+              </a:spcAft>
+            </a:pPr>
+            <a:r>
+              <a:rPr sz="1300" b="1" i="0">
+                <a:solidFill>
+                  <a:srgbClr val="0B2D5B"/>
                 </a:solidFill>
                 <a:latin typeface="Inter Tight"/>
               </a:rPr>
-              <a:t>↺  and around again</a:t>
-            </a:r>
-          </a:p>
-        </p:txBody>
-      </p:sp>
-      <p:sp>
-        <p:nvSpPr>
-          <p:cNvPr id="21" name="TextBox 20"/>
+              <a:t>A PARENT</a:t>
+            </a:r>
+          </a:p>
+        </p:txBody>
+      </p:sp>
+      <p:sp>
+        <p:nvSpPr>
+          <p:cNvPr id="14" name="TextBox 13"/>
           <p:cNvSpPr txBox="1"/>
           <p:nvPr/>
         </p:nvSpPr>
         <p:spPr>
           <a:xfrm>
-            <a:off x="822960" y="4846320"/>
-            <a:ext cx="10515600" cy="1188720"/>
+            <a:off x="8244839" y="2743200"/>
+            <a:ext cx="2865120" cy="3017520"/>
           </a:xfrm>
           <a:prstGeom prst="rect">
             <a:avLst/>
@@ -10183,19 +10299,19 @@
           </a:bodyPr>
           <a:lstStyle/>
           <a:p>
-            <a:pPr algn="ctr">
-              <a:spcAft>
-                <a:spcPts val="900"/>
-              </a:spcAft>
-            </a:pPr>
-            <a:r>
-              <a:rPr sz="2000" b="0" i="1">
-                <a:solidFill>
-                  <a:srgbClr val="5D5A54"/>
-                </a:solidFill>
-                <a:latin typeface="Source Serif 4"/>
-              </a:rPr>
-              <a:t>Dopamine tags the hit as worth repeating, and everything around it gets tagged too.</a:t>
+            <a:pPr algn="l">
+              <a:spcAft>
+                <a:spcPts val="810"/>
+              </a:spcAft>
+            </a:pPr>
+            <a:r>
+              <a:rPr sz="1800" b="0" i="0">
+                <a:solidFill>
+                  <a:srgbClr val="1C1B19"/>
+                </a:solidFill>
+                <a:latin typeface="Source Serif 4"/>
+              </a:rPr>
+              <a:t>Smokes. They started vaping to cut down and say it's "basically harmless."</a:t>
             </a:r>
           </a:p>
         </p:txBody>
@@ -10304,7 +10420,7 @@
                 </a:solidFill>
                 <a:latin typeface="Inter Tight"/>
               </a:rPr>
-              <a:t>YOUR TURN</a:t>
+              <a:t>WHAT HELPS</a:t>
             </a:r>
           </a:p>
         </p:txBody>
@@ -10350,97 +10466,14 @@
       </p:sp>
       <p:sp>
         <p:nvSpPr>
-          <p:cNvPr id="5" name="Rectangle 4"/>
-          <p:cNvSpPr/>
-          <p:nvPr/>
-        </p:nvSpPr>
-        <p:spPr>
-          <a:xfrm>
-            <a:off x="822960" y="1371600"/>
-            <a:ext cx="73152" cy="3566160"/>
-          </a:xfrm>
-          <a:prstGeom prst="rect">
-            <a:avLst/>
-          </a:prstGeom>
-          <a:solidFill>
-            <a:srgbClr val="F47B20"/>
-          </a:solidFill>
-          <a:ln>
-            <a:noFill/>
-          </a:ln>
-          <a:effectLst/>
-        </p:spPr>
-        <p:style>
-          <a:lnRef idx="1">
-            <a:schemeClr val="accent1"/>
-          </a:lnRef>
-          <a:fillRef idx="3">
-            <a:schemeClr val="accent1"/>
-          </a:fillRef>
-          <a:effectRef idx="2">
-            <a:schemeClr val="accent1"/>
-          </a:effectRef>
-          <a:fontRef idx="minor">
-            <a:schemeClr val="lt1"/>
-          </a:fontRef>
-        </p:style>
-        <p:txBody>
-          <a:bodyPr rtlCol="0" anchor="ctr"/>
-          <a:lstStyle/>
-          <a:p>
-            <a:pPr algn="ctr"/>
-          </a:p>
-        </p:txBody>
-      </p:sp>
-      <p:sp>
-        <p:nvSpPr>
-          <p:cNvPr id="6" name="TextBox 5"/>
+          <p:cNvPr id="5" name="TextBox 4"/>
           <p:cNvSpPr txBox="1"/>
           <p:nvPr/>
         </p:nvSpPr>
         <p:spPr>
           <a:xfrm>
-            <a:off x="1188720" y="1371600"/>
-            <a:ext cx="10058400" cy="3566160"/>
-          </a:xfrm>
-          <a:prstGeom prst="rect">
-            <a:avLst/>
-          </a:prstGeom>
-          <a:noFill/>
-        </p:spPr>
-        <p:txBody>
-          <a:bodyPr wrap="square" anchor="ctr" lIns="0" rIns="0" tIns="0" bIns="0">
-            <a:spAutoFit/>
-          </a:bodyPr>
-          <a:lstStyle/>
-          <a:p>
-            <a:pPr algn="l">
-              <a:spcAft>
-                <a:spcPts val="1800"/>
-              </a:spcAft>
-            </a:pPr>
-            <a:r>
-              <a:rPr sz="4000" b="0" i="1">
-                <a:solidFill>
-                  <a:srgbClr val="1C1B19"/>
-                </a:solidFill>
-                <a:latin typeface="Source Serif 4"/>
-              </a:rPr>
-              <a:t>Where do the cues show up during a school day?</a:t>
-            </a:r>
-          </a:p>
-        </p:txBody>
-      </p:sp>
-      <p:sp>
-        <p:nvSpPr>
-          <p:cNvPr id="7" name="TextBox 6"/>
-          <p:cNvSpPr txBox="1"/>
-          <p:nvPr/>
-        </p:nvSpPr>
-        <p:spPr>
-          <a:xfrm>
-            <a:off x="1188720" y="5120640"/>
-            <a:ext cx="10058400" cy="914400"/>
+            <a:off x="822960" y="1005840"/>
+            <a:ext cx="10515600" cy="1097280"/>
           </a:xfrm>
           <a:prstGeom prst="rect">
             <a:avLst/>
@@ -10455,17 +10488,393 @@
           <a:p>
             <a:pPr algn="l">
               <a:spcAft>
-                <a:spcPts val="810"/>
-              </a:spcAft>
-            </a:pPr>
-            <a:r>
-              <a:rPr sz="1800" b="0" i="0">
+                <a:spcPts val="1620"/>
+              </a:spcAft>
+            </a:pPr>
+            <a:r>
+              <a:rPr sz="3600" b="1" i="0">
+                <a:solidFill>
+                  <a:srgbClr val="1C1B19"/>
+                </a:solidFill>
+                <a:latin typeface="Source Serif 4"/>
+              </a:rPr>
+              <a:t>Quitting is a skill. It has steps.</a:t>
+            </a:r>
+          </a:p>
+        </p:txBody>
+      </p:sp>
+      <p:sp>
+        <p:nvSpPr>
+          <p:cNvPr id="6" name="TextBox 5"/>
+          <p:cNvSpPr txBox="1"/>
+          <p:nvPr/>
+        </p:nvSpPr>
+        <p:spPr>
+          <a:xfrm>
+            <a:off x="822960" y="2194560"/>
+            <a:ext cx="548640" cy="1005840"/>
+          </a:xfrm>
+          <a:prstGeom prst="rect">
+            <a:avLst/>
+          </a:prstGeom>
+          <a:noFill/>
+        </p:spPr>
+        <p:txBody>
+          <a:bodyPr wrap="square" anchor="t" lIns="0" rIns="0" tIns="0" bIns="0">
+            <a:spAutoFit/>
+          </a:bodyPr>
+          <a:lstStyle/>
+          <a:p>
+            <a:pPr algn="l">
+              <a:spcAft>
+                <a:spcPts val="1170"/>
+              </a:spcAft>
+            </a:pPr>
+            <a:r>
+              <a:rPr sz="2600" b="1" i="0">
+                <a:solidFill>
+                  <a:srgbClr val="F47B20"/>
+                </a:solidFill>
+                <a:latin typeface="Source Serif 4"/>
+              </a:rPr>
+              <a:t>1</a:t>
+            </a:r>
+          </a:p>
+        </p:txBody>
+      </p:sp>
+      <p:sp>
+        <p:nvSpPr>
+          <p:cNvPr id="7" name="TextBox 6"/>
+          <p:cNvSpPr txBox="1"/>
+          <p:nvPr/>
+        </p:nvSpPr>
+        <p:spPr>
+          <a:xfrm>
+            <a:off x="1463040" y="2231136"/>
+            <a:ext cx="9875520" cy="1005840"/>
+          </a:xfrm>
+          <a:prstGeom prst="rect">
+            <a:avLst/>
+          </a:prstGeom>
+          <a:noFill/>
+        </p:spPr>
+        <p:txBody>
+          <a:bodyPr wrap="square" anchor="t" lIns="0" rIns="0" tIns="0" bIns="0">
+            <a:spAutoFit/>
+          </a:bodyPr>
+          <a:lstStyle/>
+          <a:p>
+            <a:pPr algn="l">
+              <a:spcAft>
+                <a:spcPts val="945"/>
+              </a:spcAft>
+            </a:pPr>
+            <a:r>
+              <a:rPr sz="2100" b="1" i="0">
+                <a:solidFill>
+                  <a:srgbClr val="1C1B19"/>
+                </a:solidFill>
+                <a:latin typeface="Source Serif 4"/>
+              </a:rPr>
+              <a:t>Map your loop.</a:t>
+            </a:r>
+          </a:p>
+          <a:p>
+            <a:pPr algn="l">
+              <a:spcAft>
+                <a:spcPts val="945"/>
+              </a:spcAft>
+            </a:pPr>
+            <a:r>
+              <a:rPr sz="1600" b="0" i="0">
                 <a:solidFill>
                   <a:srgbClr val="5D5A54"/>
                 </a:solidFill>
-                <a:latin typeface="Inter Tight"/>
-              </a:rPr>
-              <a:t>One per card. No names. We'll put them on the loop.</a:t>
+                <a:latin typeface="Source Serif 4"/>
+              </a:rPr>
+              <a:t>Notice where, who, and what you felt before each craving.</a:t>
+            </a:r>
+          </a:p>
+        </p:txBody>
+      </p:sp>
+      <p:sp>
+        <p:nvSpPr>
+          <p:cNvPr id="8" name="TextBox 7"/>
+          <p:cNvSpPr txBox="1"/>
+          <p:nvPr/>
+        </p:nvSpPr>
+        <p:spPr>
+          <a:xfrm>
+            <a:off x="822960" y="3200400"/>
+            <a:ext cx="548640" cy="1005840"/>
+          </a:xfrm>
+          <a:prstGeom prst="rect">
+            <a:avLst/>
+          </a:prstGeom>
+          <a:noFill/>
+        </p:spPr>
+        <p:txBody>
+          <a:bodyPr wrap="square" anchor="t" lIns="0" rIns="0" tIns="0" bIns="0">
+            <a:spAutoFit/>
+          </a:bodyPr>
+          <a:lstStyle/>
+          <a:p>
+            <a:pPr algn="l">
+              <a:spcAft>
+                <a:spcPts val="1170"/>
+              </a:spcAft>
+            </a:pPr>
+            <a:r>
+              <a:rPr sz="2600" b="1" i="0">
+                <a:solidFill>
+                  <a:srgbClr val="F47B20"/>
+                </a:solidFill>
+                <a:latin typeface="Source Serif 4"/>
+              </a:rPr>
+              <a:t>2</a:t>
+            </a:r>
+          </a:p>
+        </p:txBody>
+      </p:sp>
+      <p:sp>
+        <p:nvSpPr>
+          <p:cNvPr id="9" name="TextBox 8"/>
+          <p:cNvSpPr txBox="1"/>
+          <p:nvPr/>
+        </p:nvSpPr>
+        <p:spPr>
+          <a:xfrm>
+            <a:off x="1463040" y="3236976"/>
+            <a:ext cx="9875520" cy="1005840"/>
+          </a:xfrm>
+          <a:prstGeom prst="rect">
+            <a:avLst/>
+          </a:prstGeom>
+          <a:noFill/>
+        </p:spPr>
+        <p:txBody>
+          <a:bodyPr wrap="square" anchor="t" lIns="0" rIns="0" tIns="0" bIns="0">
+            <a:spAutoFit/>
+          </a:bodyPr>
+          <a:lstStyle/>
+          <a:p>
+            <a:pPr algn="l">
+              <a:spcAft>
+                <a:spcPts val="945"/>
+              </a:spcAft>
+            </a:pPr>
+            <a:r>
+              <a:rPr sz="2100" b="1" i="0">
+                <a:solidFill>
+                  <a:srgbClr val="1C1B19"/>
+                </a:solidFill>
+                <a:latin typeface="Source Serif 4"/>
+              </a:rPr>
+              <a:t>Know the timeline.</a:t>
+            </a:r>
+          </a:p>
+          <a:p>
+            <a:pPr algn="l">
+              <a:spcAft>
+                <a:spcPts val="945"/>
+              </a:spcAft>
+            </a:pPr>
+            <a:r>
+              <a:rPr sz="1600" b="0" i="0">
+                <a:solidFill>
+                  <a:srgbClr val="5D5A54"/>
+                </a:solidFill>
+                <a:latin typeface="Source Serif 4"/>
+              </a:rPr>
+              <a:t>Withdrawal is worst the first few days and fades over weeks. A craving peaks in minutes.</a:t>
+            </a:r>
+          </a:p>
+        </p:txBody>
+      </p:sp>
+      <p:sp>
+        <p:nvSpPr>
+          <p:cNvPr id="10" name="TextBox 9"/>
+          <p:cNvSpPr txBox="1"/>
+          <p:nvPr/>
+        </p:nvSpPr>
+        <p:spPr>
+          <a:xfrm>
+            <a:off x="822960" y="4206240"/>
+            <a:ext cx="548640" cy="1005840"/>
+          </a:xfrm>
+          <a:prstGeom prst="rect">
+            <a:avLst/>
+          </a:prstGeom>
+          <a:noFill/>
+        </p:spPr>
+        <p:txBody>
+          <a:bodyPr wrap="square" anchor="t" lIns="0" rIns="0" tIns="0" bIns="0">
+            <a:spAutoFit/>
+          </a:bodyPr>
+          <a:lstStyle/>
+          <a:p>
+            <a:pPr algn="l">
+              <a:spcAft>
+                <a:spcPts val="1170"/>
+              </a:spcAft>
+            </a:pPr>
+            <a:r>
+              <a:rPr sz="2600" b="1" i="0">
+                <a:solidFill>
+                  <a:srgbClr val="F47B20"/>
+                </a:solidFill>
+                <a:latin typeface="Source Serif 4"/>
+              </a:rPr>
+              <a:t>3</a:t>
+            </a:r>
+          </a:p>
+        </p:txBody>
+      </p:sp>
+      <p:sp>
+        <p:nvSpPr>
+          <p:cNvPr id="11" name="TextBox 10"/>
+          <p:cNvSpPr txBox="1"/>
+          <p:nvPr/>
+        </p:nvSpPr>
+        <p:spPr>
+          <a:xfrm>
+            <a:off x="1463040" y="4242816"/>
+            <a:ext cx="9875520" cy="1005840"/>
+          </a:xfrm>
+          <a:prstGeom prst="rect">
+            <a:avLst/>
+          </a:prstGeom>
+          <a:noFill/>
+        </p:spPr>
+        <p:txBody>
+          <a:bodyPr wrap="square" anchor="t" lIns="0" rIns="0" tIns="0" bIns="0">
+            <a:spAutoFit/>
+          </a:bodyPr>
+          <a:lstStyle/>
+          <a:p>
+            <a:pPr algn="l">
+              <a:spcAft>
+                <a:spcPts val="945"/>
+              </a:spcAft>
+            </a:pPr>
+            <a:r>
+              <a:rPr sz="2100" b="1" i="0">
+                <a:solidFill>
+                  <a:srgbClr val="1C1B19"/>
+                </a:solidFill>
+                <a:latin typeface="Source Serif 4"/>
+              </a:rPr>
+              <a:t>Text DITCHVAPE to 88709.</a:t>
+            </a:r>
+          </a:p>
+          <a:p>
+            <a:pPr algn="l">
+              <a:spcAft>
+                <a:spcPts val="945"/>
+              </a:spcAft>
+            </a:pPr>
+            <a:r>
+              <a:rPr sz="1600" b="0" i="0">
+                <a:solidFill>
+                  <a:srgbClr val="5D5A54"/>
+                </a:solidFill>
+                <a:latin typeface="Source Serif 4"/>
+              </a:rPr>
+              <a:t>Free and anonymous. In a 2024 trial, more teens who used it had quit.</a:t>
+            </a:r>
+          </a:p>
+        </p:txBody>
+      </p:sp>
+      <p:sp>
+        <p:nvSpPr>
+          <p:cNvPr id="12" name="TextBox 11"/>
+          <p:cNvSpPr txBox="1"/>
+          <p:nvPr/>
+        </p:nvSpPr>
+        <p:spPr>
+          <a:xfrm>
+            <a:off x="822960" y="5212080"/>
+            <a:ext cx="548640" cy="1005840"/>
+          </a:xfrm>
+          <a:prstGeom prst="rect">
+            <a:avLst/>
+          </a:prstGeom>
+          <a:noFill/>
+        </p:spPr>
+        <p:txBody>
+          <a:bodyPr wrap="square" anchor="t" lIns="0" rIns="0" tIns="0" bIns="0">
+            <a:spAutoFit/>
+          </a:bodyPr>
+          <a:lstStyle/>
+          <a:p>
+            <a:pPr algn="l">
+              <a:spcAft>
+                <a:spcPts val="1170"/>
+              </a:spcAft>
+            </a:pPr>
+            <a:r>
+              <a:rPr sz="2600" b="1" i="0">
+                <a:solidFill>
+                  <a:srgbClr val="F47B20"/>
+                </a:solidFill>
+                <a:latin typeface="Source Serif 4"/>
+              </a:rPr>
+              <a:t>4</a:t>
+            </a:r>
+          </a:p>
+        </p:txBody>
+      </p:sp>
+      <p:sp>
+        <p:nvSpPr>
+          <p:cNvPr id="13" name="TextBox 12"/>
+          <p:cNvSpPr txBox="1"/>
+          <p:nvPr/>
+        </p:nvSpPr>
+        <p:spPr>
+          <a:xfrm>
+            <a:off x="1463040" y="5248656"/>
+            <a:ext cx="9875520" cy="1005840"/>
+          </a:xfrm>
+          <a:prstGeom prst="rect">
+            <a:avLst/>
+          </a:prstGeom>
+          <a:noFill/>
+        </p:spPr>
+        <p:txBody>
+          <a:bodyPr wrap="square" anchor="t" lIns="0" rIns="0" tIns="0" bIns="0">
+            <a:spAutoFit/>
+          </a:bodyPr>
+          <a:lstStyle/>
+          <a:p>
+            <a:pPr algn="l">
+              <a:spcAft>
+                <a:spcPts val="945"/>
+              </a:spcAft>
+            </a:pPr>
+            <a:r>
+              <a:rPr sz="2100" b="1" i="0">
+                <a:solidFill>
+                  <a:srgbClr val="1C1B19"/>
+                </a:solidFill>
+                <a:latin typeface="Source Serif 4"/>
+              </a:rPr>
+              <a:t>Bring in the nurse or a counselor.</a:t>
+            </a:r>
+          </a:p>
+          <a:p>
+            <a:pPr algn="l">
+              <a:spcAft>
+                <a:spcPts val="945"/>
+              </a:spcAft>
+            </a:pPr>
+            <a:r>
+              <a:rPr sz="1600" b="0" i="0">
+                <a:solidFill>
+                  <a:srgbClr val="5D5A54"/>
+                </a:solidFill>
+                <a:latin typeface="Source Serif 4"/>
+              </a:rPr>
+              <a:t>It's about health. They help students quit all the time.</a:t>
             </a:r>
           </a:p>
         </p:txBody>

--- a/decks/vaping-and-your-brain-lesson-v2.pptx
+++ b/decks/vaping-and-your-brain-lesson-v2.pptx
@@ -4440,7 +4440,7 @@
                 </a:solidFill>
                 <a:latin typeface="Source Serif 4"/>
               </a:rPr>
-              <a:t>Students learn how nicotine dependence builds (cue, hit, relief, craving), why vaping feels like stress relief, and two real ways to get help quitting. Bring sticky notes, keep it calm and factual, and know your school's next step before a student says "I'm hooked."</a:t>
+              <a:t>Students learn how nicotine dependence builds (cue, hit, relief, craving), why vaping feels like stress relief, and two real ways to get help quitting. Bring sticky notes, keep it calm and factual, and if a student says "I'm hooked," walk them to the nurse or a counselor.</a:t>
             </a:r>
           </a:p>
           <a:p>
@@ -5753,7 +5753,7 @@
                 </a:solidFill>
                 <a:latin typeface="Source Serif 4"/>
               </a:rPr>
-              <a:t>Know your policy before class.</a:t>
+              <a:t>If a student says "I'm hooked."</a:t>
             </a:r>
           </a:p>
           <a:p>
@@ -5769,7 +5769,7 @@
                 </a:solidFill>
                 <a:latin typeface="Source Serif 4"/>
               </a:rPr>
-              <a:t>If a student says "I'm hooked," thank them and say you want to get them help, not get them in trouble. Know ahead of time what your school does next, and who you'll walk them to (the nurse or a counselor).</a:t>
+              <a:t>Thank them and say you want to get them help, not get them in trouble. Walk them to the nurse or a counselor that day.</a:t>
             </a:r>
           </a:p>
           <a:p>
@@ -7189,6 +7189,45 @@
                 <a:latin typeface="Inter Tight"/>
               </a:rPr>
               <a:t>Beaver Upper School · Counseling</a:t>
+            </a:r>
+          </a:p>
+        </p:txBody>
+      </p:sp>
+      <p:sp>
+        <p:nvSpPr>
+          <p:cNvPr id="8" name="TextBox 7"/>
+          <p:cNvSpPr txBox="1"/>
+          <p:nvPr/>
+        </p:nvSpPr>
+        <p:spPr>
+          <a:xfrm>
+            <a:off x="6766560" y="5897880"/>
+            <a:ext cx="4846320" cy="640080"/>
+          </a:xfrm>
+          <a:prstGeom prst="rect">
+            <a:avLst/>
+          </a:prstGeom>
+          <a:noFill/>
+        </p:spPr>
+        <p:txBody>
+          <a:bodyPr wrap="square" anchor="t" lIns="0" rIns="0" tIns="0" bIns="0">
+            <a:spAutoFit/>
+          </a:bodyPr>
+          <a:lstStyle/>
+          <a:p>
+            <a:pPr algn="r">
+              <a:spcAft>
+                <a:spcPts val="495"/>
+              </a:spcAft>
+            </a:pPr>
+            <a:r>
+              <a:rPr sz="1100" b="0" i="0">
+                <a:solidFill>
+                  <a:srgbClr val="E8E4DA"/>
+                </a:solidFill>
+                <a:latin typeface="Inter Tight"/>
+              </a:rPr>
+              <a:t>Written by Dr. Rick Wilson, with AI-assisted drafting. Every lesson is reviewed and edited by Dr. Wilson.</a:t>
             </a:r>
           </a:p>
         </p:txBody>
